--- a/docs/deck/nelo-deck.pptx
+++ b/docs/deck/nelo-deck.pptx
@@ -19,9 +19,10 @@
     <p:sldId id="267" r:id="rId13"/>
     <p:sldId id="268" r:id="rId14"/>
     <p:sldId id="269" r:id="rId15"/>
+    <p:sldId id="270" r:id="rId16"/>
   </p:sldIdLst>
   <p:notesMasterIdLst>
-    <p:notesMasterId r:id="rId16"/>
+    <p:notesMasterId r:id="rId17"/>
   </p:notesMasterIdLst>
   <p:sldSz cx="12192000" cy="6858000"/>
   <p:notesSz cx="6858000" cy="12192000"/>
@@ -120,42 +121,43 @@
   <p:extLst>
     <p:ext uri="{521415D9-36F7-43E2-AB2F-B90AF26B5E84}">
       <p14:sectionLst xmlns:p14="http://schemas.microsoft.com/office/powerpoint/2010/main">
-        <p14:section name="Opening" id="{ec365c57-83cb-300f-71ff-f333b25659b7}">
+        <p14:section name="Opening" id="{6a47e5fa-9f93-3120-dcf9-d8d9ff033f1b}">
           <p14:sldIdLst>
             <p14:sldId id="256"/>
           </p14:sldIdLst>
         </p14:section>
-        <p14:section name="Problem" id="{abc3adec-1891-d86a-4d5f-513d6b8d6b27}">
+        <p14:section name="Problem" id="{4d02129d-b23b-4ff5-3fe0-013c0f03d86f}">
           <p14:sldIdLst>
             <p14:sldId id="257"/>
             <p14:sldId id="258"/>
           </p14:sldIdLst>
         </p14:section>
-        <p14:section name="Product" id="{94c95c08-b63c-9634-6530-504674ed45e9}">
+        <p14:section name="Product" id="{ba987034-b61a-dd7c-8d38-1dd4e1a42214}">
           <p14:sldIdLst>
             <p14:sldId id="259"/>
             <p14:sldId id="260"/>
           </p14:sldIdLst>
         </p14:section>
-        <p14:section name="Proof" id="{01158a6b-2195-71e5-1509-64afb9d2ff85}">
+        <p14:section name="Proof" id="{9166a47b-cc5a-a616-9f3d-f5faaef028a7}">
           <p14:sldIdLst>
             <p14:sldId id="261"/>
             <p14:sldId id="262"/>
           </p14:sldIdLst>
         </p14:section>
-        <p14:section name="Business" id="{3907683c-0ba8-e043-1ce9-95a17608f58e}">
+        <p14:section name="Business" id="{877fb853-9d1a-219a-8982-51959e27df50}">
           <p14:sldIdLst>
             <p14:sldId id="263"/>
             <p14:sldId id="264"/>
             <p14:sldId id="265"/>
             <p14:sldId id="266"/>
+            <p14:sldId id="267"/>
           </p14:sldIdLst>
         </p14:section>
-        <p14:section name="Close" id="{02d3a4c1-0948-ed3a-fc20-c98c39ce1735}">
+        <p14:section name="Close" id="{a267eda7-1cbe-adb7-474a-e9eb4e253352}">
           <p14:sldIdLst>
-            <p14:sldId id="267"/>
             <p14:sldId id="268"/>
             <p14:sldId id="269"/>
+            <p14:sldId id="270"/>
           </p14:sldIdLst>
         </p14:section>
       </p14:sectionLst>
@@ -193,259 +195,7 @@
                 </a:solidFill>
                 <a:latin typeface="+mn-lt"/>
               </a:rPr>
-              <a:t>Money already moving on phones ($B)</a:t>
-            </a:r>
-          </a:p>
-        </c:rich>
-      </c:tx>
-      <c:layout/>
-      <c:overlay val="0"/>
-    </c:title>
-    <c:autoTitleDeleted val="0"/>
-    <c:plotArea>
-      <c:layout/>
-      <c:barChart>
-        <c:barDir val="bar"/>
-        <c:grouping val="clustered"/>
-        <c:varyColors val="0"/>
-        <c:ser>
-          <c:idx val="0"/>
-          <c:order val="0"/>
-          <c:tx>
-            <c:strRef>
-              <c:f>Sheet1!$B$1</c:f>
-              <c:strCache>
-                <c:ptCount val="1"/>
-                <c:pt idx="0">
-                  <c:v>Value</c:v>
-                </c:pt>
-              </c:strCache>
-            </c:strRef>
-          </c:tx>
-          <c:spPr>
-            <a:solidFill>
-              <a:srgbClr val="1A6B4C"/>
-            </a:solidFill>
-            <a:effectLst/>
-          </c:spPr>
-          <c:invertIfNegative val="0"/>
-          <c:dLbls>
-            <c:numFmt formatCode="&quot;$&quot;#,##0&quot;B&quot;" sourceLinked="0"/>
-            <c:txPr>
-              <a:bodyPr/>
-              <a:lstStyle/>
-              <a:p>
-                <a:pPr>
-                  <a:defRPr b="0" i="0" strike="noStrike" sz="1200" u="none">
-                    <a:solidFill>
-                      <a:srgbClr val="0F1A16"/>
-                    </a:solidFill>
-                    <a:latin typeface="+mn-lt"/>
-                  </a:defRPr>
-                </a:pPr>
-              </a:p>
-            </c:txPr>
-            <c:showLegendKey val="0"/>
-            <c:showVal val="1"/>
-            <c:showCatName val="0"/>
-            <c:showSerName val="0"/>
-            <c:showPercent val="0"/>
-            <c:showBubbleSize val="0"/>
-            <c:showLeaderLines val="0"/>
-          </c:dLbls>
-          <c:cat>
-            <c:multiLvlStrRef>
-              <c:f>Sheet1!$A$2:$A$3</c:f>
-              <c:multiLvlStrCache>
-                <c:ptCount val="2"/>
-                <c:lvl>
-                  <c:pt idx="0">
-                    <c:v>SSA mobile money, 2025</c:v>
-                  </c:pt>
-                  <c:pt idx="1">
-                    <c:v>Solana stablecoin volume, Feb 2026</c:v>
-                  </c:pt>
-                </c:lvl>
-              </c:multiLvlStrCache>
-            </c:multiLvlStrRef>
-          </c:cat>
-          <c:val>
-            <c:numRef>
-              <c:f>Sheet1!$B$2:$B$3</c:f>
-              <c:numCache>
-                <c:formatCode>General</c:formatCode>
-                <c:ptCount val="2"/>
-                <c:pt idx="0">
-                  <c:v>1400</c:v>
-                </c:pt>
-                <c:pt idx="1">
-                  <c:v>650</c:v>
-                </c:pt>
-              </c:numCache>
-            </c:numRef>
-          </c:val>
-        </c:ser>
-        <c:dLbls>
-          <c:numFmt formatCode="&quot;$&quot;#,##0&quot;B&quot;" sourceLinked="0"/>
-          <c:txPr>
-            <a:bodyPr/>
-            <a:lstStyle/>
-            <a:p>
-              <a:pPr>
-                <a:defRPr b="0" i="0" strike="noStrike" sz="1200" u="none">
-                  <a:solidFill>
-                    <a:srgbClr val="0F1A16"/>
-                  </a:solidFill>
-                  <a:latin typeface="+mn-lt"/>
-                </a:defRPr>
-              </a:pPr>
-            </a:p>
-          </c:txPr>
-          <c:showLegendKey val="0"/>
-          <c:showVal val="1"/>
-          <c:showCatName val="0"/>
-          <c:showSerName val="0"/>
-          <c:showPercent val="0"/>
-          <c:showBubbleSize val="0"/>
-          <c:showLeaderLines val="0"/>
-        </c:dLbls>
-        <c:gapWidth val="150"/>
-        <c:overlap val="0"/>
-        <c:axId val="2094734554"/>
-        <c:axId val="2094734552"/>
-        <c:axId val="2094734556"/>
-      </c:barChart>
-      <c:catAx>
-        <c:axId val="2094734554"/>
-        <c:scaling>
-          <c:orientation val="minMax"/>
-        </c:scaling>
-        <c:delete val="0"/>
-        <c:axPos val="l"/>
-        <c:numFmt formatCode="General" sourceLinked="1"/>
-        <c:majorTickMark val="out"/>
-        <c:minorTickMark val="none"/>
-        <c:tickLblPos val="nextTo"/>
-        <c:spPr>
-          <a:ln w="12700" cap="flat">
-            <a:solidFill>
-              <a:srgbClr val="888888"/>
-            </a:solidFill>
-            <a:prstDash val="solid"/>
-            <a:round/>
-          </a:ln>
-        </c:spPr>
-        <c:txPr>
-          <a:bodyPr/>
-          <a:lstStyle/>
-          <a:p>
-            <a:pPr>
-              <a:defRPr sz="1200" b="0" i="0" u="none" strike="noStrike">
-                <a:solidFill>
-                  <a:srgbClr val="6B7A74"/>
-                </a:solidFill>
-                <a:latin typeface="+mn-lt"/>
-              </a:defRPr>
-            </a:pPr>
-            <a:endParaRPr lang="en-US"/>
-          </a:p>
-        </c:txPr>
-        <c:crossAx val="2094734552"/>
-        <c:crosses val="autoZero"/>
-        <c:auto val="1"/>
-        <c:lblAlgn val="ctr"/>
-        <c:noMultiLvlLbl val="1"/>
-      </c:catAx>
-      <c:valAx>
-        <c:axId val="2094734552"/>
-        <c:scaling>
-          <c:orientation val="minMax"/>
-        </c:scaling>
-        <c:delete val="1"/>
-        <c:axPos val="b"/>
-        <c:numFmt formatCode="General" sourceLinked="0"/>
-        <c:majorTickMark val="out"/>
-        <c:minorTickMark val="none"/>
-        <c:tickLblPos val="low"/>
-        <c:spPr>
-          <a:ln w="12700" cap="flat">
-            <a:solidFill>
-              <a:srgbClr val="888888"/>
-            </a:solidFill>
-            <a:prstDash val="solid"/>
-            <a:round/>
-          </a:ln>
-        </c:spPr>
-        <c:txPr>
-          <a:bodyPr/>
-          <a:lstStyle/>
-          <a:p>
-            <a:pPr>
-              <a:defRPr sz="1200" b="0" i="0" u="none" strike="noStrike">
-                <a:solidFill>
-                  <a:srgbClr val="000000"/>
-                </a:solidFill>
-                <a:latin typeface="Arial"/>
-              </a:defRPr>
-            </a:pPr>
-            <a:endParaRPr lang="en-US"/>
-          </a:p>
-        </c:txPr>
-        <c:crossAx val="2094734554"/>
-        <c:crosses val="autoZero"/>
-        <c:crossBetween val="between"/>
-      </c:valAx>
-      <c:spPr>
-        <a:noFill/>
-        <a:ln>
-          <a:noFill/>
-        </a:ln>
-        <a:effectLst/>
-      </c:spPr>
-    </c:plotArea>
-    <c:plotVisOnly val="1"/>
-    <c:dispBlanksAs val="span"/>
-  </c:chart>
-  <c:spPr>
-    <a:noFill/>
-    <a:ln>
-      <a:noFill/>
-    </a:ln>
-    <a:effectLst/>
-  </c:spPr>
-  <c:externalData r:id="rId1">
-    <c:autoUpdate val="0"/>
-  </c:externalData>
-</c:chartSpace>
-</file>
-
-<file path=ppt/charts/chart2.xml><?xml version="1.0" encoding="utf-8"?>
-<c:chartSpace xmlns:c="http://schemas.openxmlformats.org/drawingml/2006/chart" xmlns:a="http://schemas.openxmlformats.org/drawingml/2006/main" xmlns:r="http://schemas.openxmlformats.org/officeDocument/2006/relationships">
-  <c:date1904 val="0"/>
-  <c:roundedCorners val="1"/>
-  <c:chart>
-    <c:title>
-      <c:tx>
-        <c:rich>
-          <a:bodyPr/>
-          <a:lstStyle/>
-          <a:p>
-            <a:pPr>
-              <a:defRPr sz="1300" b="0" i="0" u="none" strike="noStrike">
-                <a:solidFill>
-                  <a:srgbClr val="0F1A16"/>
-                </a:solidFill>
-                <a:latin typeface="+mn-lt"/>
-              </a:defRPr>
-            </a:pPr>
-            <a:r>
-              <a:rPr sz="1300" b="0" i="0" u="none" strike="noStrike">
-                <a:solidFill>
-                  <a:srgbClr val="0F1A16"/>
-                </a:solidFill>
-                <a:latin typeface="+mn-lt"/>
-              </a:rPr>
-              <a:t>Net revenue per month</a:t>
+              <a:t>Payment volume through Nelo, per month</a:t>
             </a:r>
           </a:p>
         </c:rich>
@@ -469,7 +219,7 @@
               <c:strCache>
                 <c:ptCount val="1"/>
                 <c:pt idx="0">
-                  <c:v>Monthly net revenue</c:v>
+                  <c:v>Volume through Nelo per month</c:v>
                 </c:pt>
               </c:strCache>
             </c:strRef>
@@ -482,13 +232,13 @@
           </c:spPr>
           <c:invertIfNegative val="0"/>
           <c:dLbls>
-            <c:numFmt formatCode="&quot;$&quot;#,##0&quot;k&quot;" sourceLinked="0"/>
+            <c:numFmt formatCode="&quot;$&quot;#,##0,&quot;k&quot;" sourceLinked="0"/>
             <c:txPr>
               <a:bodyPr/>
               <a:lstStyle/>
               <a:p>
                 <a:pPr>
-                  <a:defRPr b="0" i="0" strike="noStrike" sz="1300" u="none">
+                  <a:defRPr b="1" i="0" strike="noStrike" sz="1400" u="none">
                     <a:solidFill>
                       <a:srgbClr val="0F1A16"/>
                     </a:solidFill>
@@ -507,15 +257,18 @@
           </c:dLbls>
           <c:cat>
             <c:multiLvlStrRef>
-              <c:f>Sheet1!$A$2:$A$3</c:f>
+              <c:f>Sheet1!$A$2:$A$4</c:f>
               <c:multiLvlStrCache>
-                <c:ptCount val="2"/>
+                <c:ptCount val="3"/>
                 <c:lvl>
                   <c:pt idx="0">
-                    <c:v>1,000 merchants</c:v>
+                    <c:v>Month 1 · 25 businesses</c:v>
                   </c:pt>
                   <c:pt idx="1">
-                    <c:v>25,000 merchants</c:v>
+                    <c:v>Month 2 · 60 businesses</c:v>
+                  </c:pt>
+                  <c:pt idx="2">
+                    <c:v>Month 3 · 100 businesses</c:v>
                   </c:pt>
                 </c:lvl>
               </c:multiLvlStrCache>
@@ -523,28 +276,31 @@
           </c:cat>
           <c:val>
             <c:numRef>
-              <c:f>Sheet1!$B$2:$B$3</c:f>
+              <c:f>Sheet1!$B$2:$B$4</c:f>
               <c:numCache>
                 <c:formatCode>General</c:formatCode>
-                <c:ptCount val="2"/>
+                <c:ptCount val="3"/>
                 <c:pt idx="0">
-                  <c:v>7</c:v>
+                  <c:v>268500</c:v>
                 </c:pt>
                 <c:pt idx="1">
-                  <c:v>174</c:v>
+                  <c:v>644400</c:v>
+                </c:pt>
+                <c:pt idx="2">
+                  <c:v>1074000</c:v>
                 </c:pt>
               </c:numCache>
             </c:numRef>
           </c:val>
         </c:ser>
         <c:dLbls>
-          <c:numFmt formatCode="&quot;$&quot;#,##0&quot;k&quot;" sourceLinked="0"/>
+          <c:numFmt formatCode="&quot;$&quot;#,##0,&quot;k&quot;" sourceLinked="0"/>
           <c:txPr>
             <a:bodyPr/>
             <a:lstStyle/>
             <a:p>
               <a:pPr>
-                <a:defRPr b="0" i="0" strike="noStrike" sz="1300" u="none">
+                <a:defRPr b="1" i="0" strike="noStrike" sz="1400" u="none">
                   <a:solidFill>
                     <a:srgbClr val="0F1A16"/>
                   </a:solidFill>
@@ -1154,7 +910,7 @@
           <a:p>
             <a:r>
               <a:rPr lang="en-US" dirty="0"/>
-              <a:t/>
+              <a:t>The first three months are the ones we can see: a cluster at a time, 25, then 60, then 100 businesses. The ladder on the right is the same unit economics applied to more businesses, before any lending revenue.</a:t>
             </a:r>
             <a:endParaRPr lang="en-US" dirty="0"/>
           </a:p>
@@ -1330,7 +1086,7 @@
           <a:p>
             <a:r>
               <a:rPr lang="en-US" dirty="0"/>
-              <a:t>Judges punish a discovered stub far harder than a declared one. Keep this slide honest; update it if anything changes before submission.</a:t>
+              <a:t/>
             </a:r>
             <a:endParaRPr lang="en-US" dirty="0"/>
           </a:p>
@@ -1418,7 +1174,7 @@
           <a:p>
             <a:r>
               <a:rPr lang="en-US" dirty="0"/>
-              <a:t/>
+              <a:t>Judges punish a discovered stub far harder than a declared one. Keep this slide honest; update it if anything changes before submission.</a:t>
             </a:r>
             <a:endParaRPr lang="en-US" dirty="0"/>
           </a:p>
@@ -1548,6 +1304,94 @@
 </p:notes>
 </file>
 
+<file path=ppt/notesSlides/notesSlide15.xml><?xml version="1.0" encoding="utf-8"?>
+<p:notes xmlns:a="http://schemas.openxmlformats.org/drawingml/2006/main" xmlns:r="http://schemas.openxmlformats.org/officeDocument/2006/relationships" xmlns:p="http://schemas.openxmlformats.org/presentationml/2006/main">
+  <p:cSld>
+    <p:spTree>
+      <p:nvGrpSpPr>
+        <p:cNvPr id="1" name=""/>
+        <p:cNvGrpSpPr/>
+        <p:nvPr/>
+      </p:nvGrpSpPr>
+      <p:grpSpPr>
+        <a:xfrm>
+          <a:off x="0" y="0"/>
+          <a:ext cx="0" cy="0"/>
+          <a:chOff x="0" y="0"/>
+          <a:chExt cx="0" cy="0"/>
+        </a:xfrm>
+      </p:grpSpPr>
+      <p:sp>
+        <p:nvSpPr>
+          <p:cNvPr id="2" name="Slide Image Placeholder 1"/>
+          <p:cNvSpPr>
+            <a:spLocks noGrp="1" noRot="1" noChangeAspect="1"/>
+          </p:cNvSpPr>
+          <p:nvPr>
+            <p:ph type="sldImg"/>
+          </p:nvPr>
+        </p:nvSpPr>
+        <p:spPr/>
+      </p:sp>
+      <p:sp>
+        <p:nvSpPr>
+          <p:cNvPr id="3" name="Notes Placeholder 2"/>
+          <p:cNvSpPr>
+            <a:spLocks noGrp="1"/>
+          </p:cNvSpPr>
+          <p:nvPr>
+            <p:ph type="body" idx="1"/>
+          </p:nvPr>
+        </p:nvSpPr>
+        <p:spPr/>
+        <p:txBody>
+          <a:bodyPr/>
+          <a:lstStyle/>
+          <a:p>
+            <a:r>
+              <a:rPr lang="en-US" dirty="0"/>
+              <a:t/>
+            </a:r>
+            <a:endParaRPr lang="en-US" dirty="0"/>
+          </a:p>
+        </p:txBody>
+      </p:sp>
+      <p:sp>
+        <p:nvSpPr>
+          <p:cNvPr id="4" name="Slide Number Placeholder 3"/>
+          <p:cNvSpPr>
+            <a:spLocks noGrp="1"/>
+          </p:cNvSpPr>
+          <p:nvPr>
+            <p:ph type="sldNum" sz="quarter" idx="10"/>
+          </p:nvPr>
+        </p:nvSpPr>
+        <p:spPr/>
+        <p:txBody>
+          <a:bodyPr/>
+          <a:lstStyle/>
+          <a:p>
+            <a:fld id="{F7021451-1387-4CA6-816F-3879F97B5CBC}" type="slidenum">
+              <a:rPr lang="en-US"/>
+              <a:t>15</a:t>
+            </a:fld>
+            <a:endParaRPr lang="en-US"/>
+          </a:p>
+        </p:txBody>
+      </p:sp>
+    </p:spTree>
+    <p:extLst>
+      <p:ext uri="{BB962C8B-B14F-4D97-AF65-F5344CB8AC3E}">
+        <p14:creationId xmlns:p14="http://schemas.microsoft.com/office/powerpoint/2010/main" val="1024086991"/>
+      </p:ext>
+    </p:extLst>
+  </p:cSld>
+  <p:clrMapOvr>
+    <a:masterClrMapping/>
+  </p:clrMapOvr>
+</p:notes>
+</file>
+
 <file path=ppt/notesSlides/notesSlide2.xml><?xml version="1.0" encoding="utf-8"?>
 <p:notes xmlns:a="http://schemas.openxmlformats.org/drawingml/2006/main" xmlns:r="http://schemas.openxmlformats.org/officeDocument/2006/relationships" xmlns:p="http://schemas.openxmlformats.org/presentationml/2006/main">
   <p:cSld>
@@ -2122,7 +1966,7 @@
           <a:p>
             <a:r>
               <a:rPr lang="en-US" dirty="0"/>
-              <a:t/>
+              <a:t>TAM, SAM and SOM are all annual payment value. TAM is GSMA's mobile money value for Sub-Saharan Africa. SAM is our estimate of the in-person business payments a phone till can take in Nigeria and the next corridors. SOM is the first 100 businesses: average daily turnover $895 across the mix on the next slide, 40% of it through Nelo, for a year.</a:t>
             </a:r>
             <a:endParaRPr lang="en-US" dirty="0"/>
           </a:p>
@@ -3335,7 +3179,7 @@
                   <a:schemeClr val="accent1"/>
                 </a:solidFill>
               </a:rPr>
-              <a:t>SKR · TRUST STAKE</a:t>
+              <a:t>PROJECTION</a:t>
             </a:r>
             <a:endParaRPr lang="en-US" sz="1200" dirty="0"/>
           </a:p>
@@ -3373,26 +3217,118 @@
                   <a:schemeClr val="tx1"/>
                 </a:solidFill>
               </a:rPr>
-              <a:t>Stake raises the offline limit. Earning is a choice</a:t>
+              <a:t>From 25 to 100 businesses in 90 days, then the curve</a:t>
             </a:r>
             <a:endParaRPr lang="en-US" sz="3000" dirty="0"/>
           </a:p>
         </p:txBody>
       </p:sp>
-      <p:sp>
-        <p:nvSpPr>
-          <p:cNvPr id="4" name="collateral"/>
+      <p:graphicFrame>
+        <p:nvGraphicFramePr>
+          <p:cNvPr id="4" name="Chart 0" descr=""/>
+          <p:cNvGraphicFramePr/>
+          <p:nvPr/>
+        </p:nvGraphicFramePr>
+        <p:xfrm>
+          <a:off x="548640" y="1783080"/>
+          <a:ext cx="6035040" cy="3291840"/>
+        </p:xfrm>
+        <a:graphic xmlns:a="http://schemas.openxmlformats.org/drawingml/2006/main">
+          <a:graphicData uri="http://schemas.openxmlformats.org/drawingml/2006/chart">
+            <c:chart xmlns:c="http://schemas.openxmlformats.org/drawingml/2006/chart" r:id="rId1"/>
+          </a:graphicData>
+        </a:graphic>
+      </p:graphicFrame>
+      <p:sp>
+        <p:nvSpPr>
+          <p:cNvPr id="5" name="Text 2"/>
+          <p:cNvSpPr txBox="1"/>
+          <p:nvPr/>
+        </p:nvSpPr>
+        <p:spPr>
+          <a:xfrm>
+            <a:off x="548640" y="5166360"/>
+            <a:ext cx="6035040" cy="822960"/>
+          </a:xfrm>
+          <a:prstGeom prst="rect">
+            <a:avLst/>
+          </a:prstGeom>
+          <a:noFill/>
+          <a:ln/>
+        </p:spPr>
+        <p:txBody>
+          <a:bodyPr wrap="square" lIns="0" tIns="0" rIns="0" bIns="0" rtlCol="0" anchor="t"/>
+          <a:lstStyle/>
+          <a:p>
+            <a:pPr marL="342900" indent="-342900">
+              <a:spcAft>
+                <a:spcPts val="400"/>
+              </a:spcAft>
+              <a:buSzPct val="100000"/>
+              <a:buChar char="•"/>
+            </a:pPr>
+            <a:r>
+              <a:rPr lang="en-US" sz="1300" dirty="0">
+                <a:solidFill>
+                  <a:schemeClr val="tx1"/>
+                </a:solidFill>
+              </a:rPr>
+              <a:t>Month 1: $1.6k net revenue</a:t>
+            </a:r>
+            <a:endParaRPr lang="en-US" sz="1300" dirty="0"/>
+          </a:p>
+          <a:p>
+            <a:pPr marL="342900" indent="-342900">
+              <a:spcAft>
+                <a:spcPts val="400"/>
+              </a:spcAft>
+              <a:buSzPct val="100000"/>
+              <a:buChar char="•"/>
+            </a:pPr>
+            <a:r>
+              <a:rPr lang="en-US" sz="1300" dirty="0">
+                <a:solidFill>
+                  <a:schemeClr val="tx1"/>
+                </a:solidFill>
+              </a:rPr>
+              <a:t>Month 2: $3.9k net revenue</a:t>
+            </a:r>
+            <a:endParaRPr lang="en-US" sz="1300" dirty="0"/>
+          </a:p>
+          <a:p>
+            <a:pPr marL="342900" indent="-342900">
+              <a:spcAft>
+                <a:spcPts val="400"/>
+              </a:spcAft>
+              <a:buSzPct val="100000"/>
+              <a:buChar char="•"/>
+            </a:pPr>
+            <a:r>
+              <a:rPr lang="en-US" sz="1300" dirty="0">
+                <a:solidFill>
+                  <a:schemeClr val="tx1"/>
+                </a:solidFill>
+              </a:rPr>
+              <a:t>Month 3: $6.6k net revenue</a:t>
+            </a:r>
+            <a:endParaRPr lang="en-US" sz="1300" dirty="0"/>
+          </a:p>
+        </p:txBody>
+      </p:sp>
+      <p:sp>
+        <p:nvSpPr>
+          <p:cNvPr id="6" name="scale step"/>
           <p:cNvSpPr/>
           <p:nvPr/>
         </p:nvSpPr>
         <p:spPr>
           <a:xfrm>
-            <a:off x="548640" y="1920240"/>
-            <a:ext cx="5394960" cy="3108960"/>
+            <a:off x="6949440" y="1783080"/>
+            <a:ext cx="4663440" cy="1234440"/>
           </a:xfrm>
           <a:prstGeom prst="roundRect">
             <a:avLst>
-              <a:gd name="adj" fmla="val 3529"/>
+              <a:gd name="adj" fmla="val 8889"/>
             </a:avLst>
           </a:prstGeom>
           <a:solidFill>
@@ -3403,58 +3339,14 @@
       </p:sp>
       <p:sp>
         <p:nvSpPr>
-          <p:cNvPr id="5" name="Shape 3"/>
-          <p:cNvSpPr/>
-          <p:nvPr/>
-        </p:nvSpPr>
-        <p:spPr>
-          <a:xfrm>
-            <a:off x="868680" y="2194560"/>
-            <a:ext cx="566928" cy="566928"/>
-          </a:xfrm>
-          <a:prstGeom prst="ellipse">
-            <a:avLst/>
-          </a:prstGeom>
-          <a:solidFill>
-            <a:schemeClr val="accent1"/>
-          </a:solidFill>
-          <a:ln/>
-        </p:spPr>
-      </p:sp>
-      <p:pic>
-        <p:nvPicPr>
-          <p:cNvPr id="6" name="Image 0" descr="preencoded.png">    </p:cNvPr>
-          <p:cNvPicPr>
-            <a:picLocks noChangeAspect="1"/>
-          </p:cNvPicPr>
-          <p:nvPr/>
-        </p:nvPicPr>
-        <p:blipFill>
-          <a:blip r:embed="rId1"/>
-          <a:stretch>
-            <a:fillRect/>
-          </a:stretch>
-        </p:blipFill>
-        <p:spPr>
-          <a:xfrm>
-            <a:off x="1004743" y="2330623"/>
-            <a:ext cx="294803" cy="294803"/>
-          </a:xfrm>
-          <a:prstGeom prst="rect">
-            <a:avLst/>
-          </a:prstGeom>
-        </p:spPr>
-      </p:pic>
-      <p:sp>
-        <p:nvSpPr>
           <p:cNvPr id="7" name="Text 4"/>
           <p:cNvSpPr txBox="1"/>
           <p:nvPr/>
         </p:nvSpPr>
         <p:spPr>
           <a:xfrm>
-            <a:off x="1600200" y="2286000"/>
-            <a:ext cx="4114800" cy="457200"/>
+            <a:off x="7178040" y="1892808"/>
+            <a:ext cx="4297680" cy="274320"/>
           </a:xfrm>
           <a:prstGeom prst="rect">
             <a:avLst/>
@@ -3470,14 +3362,14 @@
               <a:buNone/>
             </a:pPr>
             <a:r>
-              <a:rPr lang="en-US" sz="2000" b="1" dirty="0">
-                <a:solidFill>
-                  <a:schemeClr val="tx1"/>
-                </a:solidFill>
-              </a:rPr>
-              <a:t>Collateral that saturates</a:t>
-            </a:r>
-            <a:endParaRPr lang="en-US" sz="2000" dirty="0"/>
+              <a:rPr lang="en-US" sz="1000" b="1" spc="100" kern="0" dirty="0">
+                <a:solidFill>
+                  <a:schemeClr val="accent1"/>
+                </a:solidFill>
+              </a:rPr>
+              <a:t>DAY 90 · 100 BUSINESSES · one market cluster</a:t>
+            </a:r>
+            <a:endParaRPr lang="en-US" sz="1000" dirty="0"/>
           </a:p>
         </p:txBody>
       </p:sp>
@@ -3489,8 +3381,8 @@
         </p:nvSpPr>
         <p:spPr>
           <a:xfrm>
-            <a:off x="868680" y="2971800"/>
-            <a:ext cx="4800600" cy="1920240"/>
+            <a:off x="7178040" y="2167128"/>
+            <a:ext cx="4297680" cy="457200"/>
           </a:xfrm>
           <a:prstGeom prst="rect">
             <a:avLst/>
@@ -3506,12 +3398,26 @@
               <a:buNone/>
             </a:pPr>
             <a:r>
-              <a:rPr lang="en-US" sz="1500" dirty="0">
+              <a:rPr lang="en-US" sz="2600" b="1" dirty="0">
                 <a:solidFill>
                   <a:schemeClr val="tx1"/>
                 </a:solidFill>
-              </a:rPr>
-              <a:t>Stake raises a merchant's offline limit on a sublinear, reputation-weighted, hard-capped curve, and is first-loss capital before the reserve. Past the largest realistic basket, more stake buys nothing. That is correct.</a:t>
+                <a:latin typeface="Arial" pitchFamily="34" charset="0"/>
+                <a:ea typeface="Arial" pitchFamily="34" charset="-122"/>
+                <a:cs typeface="Arial" pitchFamily="34" charset="-120"/>
+              </a:rPr>
+              <a:t>$12.9M</a:t>
+            </a:r>
+            <a:pPr indent="0" marL="0">
+              <a:buNone/>
+            </a:pPr>
+            <a:r>
+              <a:rPr lang="en-US" sz="1300" dirty="0">
+                <a:solidFill>
+                  <a:schemeClr val="tx1"/>
+                </a:solidFill>
+              </a:rPr>
+              <a:t>  volume a year</a:t>
             </a:r>
             <a:endParaRPr lang="en-US" sz="1500" dirty="0"/>
           </a:p>
@@ -3519,18 +3425,54 @@
       </p:sp>
       <p:sp>
         <p:nvSpPr>
-          <p:cNvPr id="9" name="earning"/>
+          <p:cNvPr id="9" name="Text 6"/>
+          <p:cNvSpPr txBox="1"/>
+          <p:nvPr/>
+        </p:nvSpPr>
+        <p:spPr>
+          <a:xfrm>
+            <a:off x="7178040" y="2606040"/>
+            <a:ext cx="4297680" cy="320040"/>
+          </a:xfrm>
+          <a:prstGeom prst="rect">
+            <a:avLst/>
+          </a:prstGeom>
+          <a:noFill/>
+          <a:ln/>
+        </p:spPr>
+        <p:txBody>
+          <a:bodyPr wrap="square" lIns="0" tIns="0" rIns="0" bIns="0" rtlCol="0" anchor="t"/>
+          <a:lstStyle/>
+          <a:p>
+            <a:pPr indent="0" marL="0">
+              <a:buNone/>
+            </a:pPr>
+            <a:r>
+              <a:rPr lang="en-US" sz="1300" b="1" dirty="0">
+                <a:solidFill>
+                  <a:schemeClr val="accent1"/>
+                </a:solidFill>
+              </a:rPr>
+              <a:t>$79k annual net revenue</a:t>
+            </a:r>
+            <a:endParaRPr lang="en-US" sz="1300" dirty="0"/>
+          </a:p>
+        </p:txBody>
+      </p:sp>
+      <p:sp>
+        <p:nvSpPr>
+          <p:cNvPr id="10" name="scale step"/>
           <p:cNvSpPr/>
           <p:nvPr/>
         </p:nvSpPr>
         <p:spPr>
           <a:xfrm>
-            <a:off x="6217920" y="1920240"/>
-            <a:ext cx="5394960" cy="3108960"/>
+            <a:off x="6949440" y="3200400"/>
+            <a:ext cx="4663440" cy="1234440"/>
           </a:xfrm>
           <a:prstGeom prst="roundRect">
             <a:avLst>
-              <a:gd name="adj" fmla="val 3529"/>
+              <a:gd name="adj" fmla="val 8889"/>
             </a:avLst>
           </a:prstGeom>
           <a:solidFill>
@@ -3541,58 +3483,158 @@
       </p:sp>
       <p:sp>
         <p:nvSpPr>
-          <p:cNvPr id="10" name="Shape 7"/>
+          <p:cNvPr id="11" name="Text 8"/>
+          <p:cNvSpPr txBox="1"/>
+          <p:nvPr/>
+        </p:nvSpPr>
+        <p:spPr>
+          <a:xfrm>
+            <a:off x="7178040" y="3310128"/>
+            <a:ext cx="4297680" cy="274320"/>
+          </a:xfrm>
+          <a:prstGeom prst="rect">
+            <a:avLst/>
+          </a:prstGeom>
+          <a:noFill/>
+          <a:ln/>
+        </p:spPr>
+        <p:txBody>
+          <a:bodyPr wrap="square" lIns="0" tIns="0" rIns="0" bIns="0" rtlCol="0" anchor="t"/>
+          <a:lstStyle/>
+          <a:p>
+            <a:pPr indent="0" marL="0">
+              <a:buNone/>
+            </a:pPr>
+            <a:r>
+              <a:rPr lang="en-US" sz="1000" b="1" spc="100" kern="0" dirty="0">
+                <a:solidFill>
+                  <a:schemeClr val="accent1"/>
+                </a:solidFill>
+              </a:rPr>
+              <a:t>MONTH 12 · 1,000 BUSINESSES · ten clusters</a:t>
+            </a:r>
+            <a:endParaRPr lang="en-US" sz="1000" dirty="0"/>
+          </a:p>
+        </p:txBody>
+      </p:sp>
+      <p:sp>
+        <p:nvSpPr>
+          <p:cNvPr id="12" name="Text 9"/>
+          <p:cNvSpPr txBox="1"/>
+          <p:nvPr/>
+        </p:nvSpPr>
+        <p:spPr>
+          <a:xfrm>
+            <a:off x="7178040" y="3584448"/>
+            <a:ext cx="4297680" cy="457200"/>
+          </a:xfrm>
+          <a:prstGeom prst="rect">
+            <a:avLst/>
+          </a:prstGeom>
+          <a:noFill/>
+          <a:ln/>
+        </p:spPr>
+        <p:txBody>
+          <a:bodyPr wrap="square" lIns="0" tIns="0" rIns="0" bIns="0" rtlCol="0" anchor="t"/>
+          <a:lstStyle/>
+          <a:p>
+            <a:pPr indent="0" marL="0">
+              <a:buNone/>
+            </a:pPr>
+            <a:r>
+              <a:rPr lang="en-US" sz="2600" b="1" dirty="0">
+                <a:solidFill>
+                  <a:schemeClr val="tx1"/>
+                </a:solidFill>
+                <a:latin typeface="Arial" pitchFamily="34" charset="0"/>
+                <a:ea typeface="Arial" pitchFamily="34" charset="-122"/>
+                <a:cs typeface="Arial" pitchFamily="34" charset="-120"/>
+              </a:rPr>
+              <a:t>$129M</a:t>
+            </a:r>
+            <a:pPr indent="0" marL="0">
+              <a:buNone/>
+            </a:pPr>
+            <a:r>
+              <a:rPr lang="en-US" sz="1300" dirty="0">
+                <a:solidFill>
+                  <a:schemeClr val="tx1"/>
+                </a:solidFill>
+              </a:rPr>
+              <a:t>  volume a year</a:t>
+            </a:r>
+            <a:endParaRPr lang="en-US" sz="1500" dirty="0"/>
+          </a:p>
+        </p:txBody>
+      </p:sp>
+      <p:sp>
+        <p:nvSpPr>
+          <p:cNvPr id="13" name="Text 10"/>
+          <p:cNvSpPr txBox="1"/>
+          <p:nvPr/>
+        </p:nvSpPr>
+        <p:spPr>
+          <a:xfrm>
+            <a:off x="7178040" y="4023360"/>
+            <a:ext cx="4297680" cy="320040"/>
+          </a:xfrm>
+          <a:prstGeom prst="rect">
+            <a:avLst/>
+          </a:prstGeom>
+          <a:noFill/>
+          <a:ln/>
+        </p:spPr>
+        <p:txBody>
+          <a:bodyPr wrap="square" lIns="0" tIns="0" rIns="0" bIns="0" rtlCol="0" anchor="t"/>
+          <a:lstStyle/>
+          <a:p>
+            <a:pPr indent="0" marL="0">
+              <a:buNone/>
+            </a:pPr>
+            <a:r>
+              <a:rPr lang="en-US" sz="1300" b="1" dirty="0">
+                <a:solidFill>
+                  <a:schemeClr val="accent1"/>
+                </a:solidFill>
+              </a:rPr>
+              <a:t>$786k annual net revenue</a:t>
+            </a:r>
+            <a:endParaRPr lang="en-US" sz="1300" dirty="0"/>
+          </a:p>
+        </p:txBody>
+      </p:sp>
+      <p:sp>
+        <p:nvSpPr>
+          <p:cNvPr id="14" name="scale step"/>
           <p:cNvSpPr/>
           <p:nvPr/>
         </p:nvSpPr>
         <p:spPr>
           <a:xfrm>
-            <a:off x="6537960" y="2194560"/>
-            <a:ext cx="566928" cy="566928"/>
-          </a:xfrm>
-          <a:prstGeom prst="ellipse">
-            <a:avLst/>
+            <a:off x="6949440" y="4617720"/>
+            <a:ext cx="4663440" cy="1234440"/>
+          </a:xfrm>
+          <a:prstGeom prst="roundRect">
+            <a:avLst>
+              <a:gd name="adj" fmla="val 8889"/>
+            </a:avLst>
           </a:prstGeom>
           <a:solidFill>
-            <a:schemeClr val="accent1"/>
+            <a:srgbClr val="0B2A20"/>
           </a:solidFill>
           <a:ln/>
         </p:spPr>
       </p:sp>
-      <p:pic>
-        <p:nvPicPr>
-          <p:cNvPr id="11" name="Image 1" descr="preencoded.png">    </p:cNvPr>
-          <p:cNvPicPr>
-            <a:picLocks noChangeAspect="1"/>
-          </p:cNvPicPr>
-          <p:nvPr/>
-        </p:nvPicPr>
-        <p:blipFill>
-          <a:blip r:embed="rId2"/>
-          <a:stretch>
-            <a:fillRect/>
-          </a:stretch>
-        </p:blipFill>
-        <p:spPr>
-          <a:xfrm>
-            <a:off x="6674023" y="2330623"/>
-            <a:ext cx="294803" cy="294803"/>
-          </a:xfrm>
-          <a:prstGeom prst="rect">
-            <a:avLst/>
-          </a:prstGeom>
-        </p:spPr>
-      </p:pic>
-      <p:sp>
-        <p:nvSpPr>
-          <p:cNvPr id="12" name="Text 8"/>
+      <p:sp>
+        <p:nvSpPr>
+          <p:cNvPr id="15" name="Text 12"/>
           <p:cNvSpPr txBox="1"/>
           <p:nvPr/>
         </p:nvSpPr>
         <p:spPr>
           <a:xfrm>
-            <a:off x="7269480" y="2286000"/>
-            <a:ext cx="4114800" cy="457200"/>
+            <a:off x="7178040" y="4727448"/>
+            <a:ext cx="4297680" cy="274320"/>
           </a:xfrm>
           <a:prstGeom prst="rect">
             <a:avLst/>
@@ -3608,27 +3650,27 @@
               <a:buNone/>
             </a:pPr>
             <a:r>
-              <a:rPr lang="en-US" sz="2000" b="1" dirty="0">
-                <a:solidFill>
-                  <a:schemeClr val="tx1"/>
-                </a:solidFill>
-              </a:rPr>
-              <a:t>Earning, and a real choice</a:t>
-            </a:r>
-            <a:endParaRPr lang="en-US" sz="2000" dirty="0"/>
-          </a:p>
-        </p:txBody>
-      </p:sp>
-      <p:sp>
-        <p:nvSpPr>
-          <p:cNvPr id="13" name="Text 9"/>
+              <a:rPr lang="en-US" sz="1000" b="1" spc="100" kern="0" dirty="0">
+                <a:solidFill>
+                  <a:schemeClr val="accent2"/>
+                </a:solidFill>
+              </a:rPr>
+              <a:t>YEAR 3 · 25,000 BUSINESSES · five corridors</a:t>
+            </a:r>
+            <a:endParaRPr lang="en-US" sz="1000" dirty="0"/>
+          </a:p>
+        </p:txBody>
+      </p:sp>
+      <p:sp>
+        <p:nvSpPr>
+          <p:cNvPr id="16" name="Text 13"/>
           <p:cNvSpPr txBox="1"/>
           <p:nvPr/>
         </p:nvSpPr>
         <p:spPr>
           <a:xfrm>
-            <a:off x="6537960" y="2971800"/>
-            <a:ext cx="4800600" cy="1920240"/>
+            <a:off x="7178040" y="5001768"/>
+            <a:ext cx="4297680" cy="457200"/>
           </a:xfrm>
           <a:prstGeom prst="rect">
             <a:avLst/>
@@ -3644,12 +3686,26 @@
               <a:buNone/>
             </a:pPr>
             <a:r>
-              <a:rPr lang="en-US" sz="1500" dirty="0">
-                <a:solidFill>
-                  <a:schemeClr val="tx1"/>
-                </a:solidFill>
-              </a:rPr>
-              <a:t>Each period the merchant chooses: the rebate as a lower fee in naira, or paid in SKR, already staked, at a premium priced from the reserve capital their stake saves. A choice made each month is an incentive; an automatic accrual is a discount.</a:t>
+              <a:rPr lang="en-US" sz="2600" b="1" dirty="0">
+                <a:solidFill>
+                  <a:schemeClr val="bg1"/>
+                </a:solidFill>
+                <a:latin typeface="Arial" pitchFamily="34" charset="0"/>
+                <a:ea typeface="Arial" pitchFamily="34" charset="-122"/>
+                <a:cs typeface="Arial" pitchFamily="34" charset="-120"/>
+              </a:rPr>
+              <a:t>$3.2B</a:t>
+            </a:r>
+            <a:pPr indent="0" marL="0">
+              <a:buNone/>
+            </a:pPr>
+            <a:r>
+              <a:rPr lang="en-US" sz="1300" dirty="0">
+                <a:solidFill>
+                  <a:schemeClr val="bg1"/>
+                </a:solidFill>
+              </a:rPr>
+              <a:t>  volume a year</a:t>
             </a:r>
             <a:endParaRPr lang="en-US" sz="1500" dirty="0"/>
           </a:p>
@@ -3657,14 +3713,14 @@
       </p:sp>
       <p:sp>
         <p:nvSpPr>
-          <p:cNvPr id="14" name="Text 10"/>
+          <p:cNvPr id="17" name="Text 14"/>
           <p:cNvSpPr txBox="1"/>
           <p:nvPr/>
         </p:nvSpPr>
         <p:spPr>
           <a:xfrm>
-            <a:off x="548640" y="5257800"/>
-            <a:ext cx="10972800" cy="548640"/>
+            <a:off x="7178040" y="5440680"/>
+            <a:ext cx="4297680" cy="320040"/>
           </a:xfrm>
           <a:prstGeom prst="rect">
             <a:avLst/>
@@ -3680,20 +3736,20 @@
               <a:buNone/>
             </a:pPr>
             <a:r>
-              <a:rPr lang="en-US" sz="1500" i="1" dirty="0">
-                <a:solidFill>
-                  <a:schemeClr val="accent1"/>
-                </a:solidFill>
-              </a:rPr>
-              <a:t>Honest number: the reserve model supports a premium of about 1.001×, not 1.5×. We say so rather than pick one.</a:t>
-            </a:r>
-            <a:endParaRPr lang="en-US" sz="1500" dirty="0"/>
-          </a:p>
-        </p:txBody>
-      </p:sp>
-      <p:sp>
-        <p:nvSpPr>
-          <p:cNvPr id="15" name="Text 11"/>
+              <a:rPr lang="en-US" sz="1300" b="1" dirty="0">
+                <a:solidFill>
+                  <a:schemeClr val="accent5"/>
+                </a:solidFill>
+              </a:rPr>
+              <a:t>$19.7M annual net revenue</a:t>
+            </a:r>
+            <a:endParaRPr lang="en-US" sz="1300" dirty="0"/>
+          </a:p>
+        </p:txBody>
+      </p:sp>
+      <p:sp>
+        <p:nvSpPr>
+          <p:cNvPr id="18" name="Text 15"/>
           <p:cNvSpPr txBox="1"/>
           <p:nvPr/>
         </p:nvSpPr>
@@ -3721,7 +3777,7 @@
                   <a:schemeClr val="accent6"/>
                 </a:solidFill>
               </a:rPr>
-              <a:t>docs/RESERVE.md · merchants electing SKR accept price risk, disclosed at the point of election</a:t>
+              <a:t>Same mix as the business model: $895 average daily takings, 40% through Nelo, 0.61% net. Before lending. Illustrative, not a forecast</a:t>
             </a:r>
             <a:endParaRPr lang="en-US" sz="1000" dirty="0"/>
           </a:p>
@@ -3829,7 +3885,7 @@
                   <a:schemeClr val="accent1"/>
                 </a:solidFill>
               </a:rPr>
-              <a:t>DISTRIBUTION</a:t>
+              <a:t>SKR · TRUST STAKE</a:t>
             </a:r>
             <a:endParaRPr lang="en-US" sz="1200" dirty="0"/>
           </a:p>
@@ -3867,7 +3923,7 @@
                   <a:schemeClr val="tx1"/>
                 </a:solidFill>
               </a:rPr>
-              <a:t>Fifty merchants on foot, then the network does the rest</a:t>
+              <a:t>Stake raises the offline limit. Earning is a choice</a:t>
             </a:r>
             <a:endParaRPr lang="en-US" sz="3000" dirty="0"/>
           </a:p>
@@ -3875,14 +3931,36 @@
       </p:sp>
       <p:sp>
         <p:nvSpPr>
-          <p:cNvPr id="4" name="Shape 2"/>
+          <p:cNvPr id="4" name="collateral"/>
           <p:cNvSpPr/>
           <p:nvPr/>
         </p:nvSpPr>
         <p:spPr>
           <a:xfrm>
             <a:off x="548640" y="1920240"/>
-            <a:ext cx="658368" cy="658368"/>
+            <a:ext cx="5394960" cy="3108960"/>
+          </a:xfrm>
+          <a:prstGeom prst="roundRect">
+            <a:avLst>
+              <a:gd name="adj" fmla="val 3529"/>
+            </a:avLst>
+          </a:prstGeom>
+          <a:solidFill>
+            <a:srgbClr val="EEF5F1"/>
+          </a:solidFill>
+          <a:ln/>
+        </p:spPr>
+      </p:sp>
+      <p:sp>
+        <p:nvSpPr>
+          <p:cNvPr id="5" name="Shape 3"/>
+          <p:cNvSpPr/>
+          <p:nvPr/>
+        </p:nvSpPr>
+        <p:spPr>
+          <a:xfrm>
+            <a:off x="868680" y="2194560"/>
+            <a:ext cx="566928" cy="566928"/>
           </a:xfrm>
           <a:prstGeom prst="ellipse">
             <a:avLst/>
@@ -3895,7 +3973,7 @@
       </p:sp>
       <p:pic>
         <p:nvPicPr>
-          <p:cNvPr id="5" name="Image 0" descr="preencoded.png">    </p:cNvPr>
+          <p:cNvPr id="6" name="Image 0" descr="preencoded.png">    </p:cNvPr>
           <p:cNvPicPr>
             <a:picLocks noChangeAspect="1"/>
           </p:cNvPicPr>
@@ -3909,50 +3987,14 @@
         </p:blipFill>
         <p:spPr>
           <a:xfrm>
-            <a:off x="706648" y="2078248"/>
-            <a:ext cx="342351" cy="342351"/>
+            <a:off x="1004743" y="2330623"/>
+            <a:ext cx="294803" cy="294803"/>
           </a:xfrm>
           <a:prstGeom prst="rect">
             <a:avLst/>
           </a:prstGeom>
         </p:spPr>
       </p:pic>
-      <p:sp>
-        <p:nvSpPr>
-          <p:cNvPr id="6" name="Text 3"/>
-          <p:cNvSpPr txBox="1"/>
-          <p:nvPr/>
-        </p:nvSpPr>
-        <p:spPr>
-          <a:xfrm>
-            <a:off x="1417320" y="1938528"/>
-            <a:ext cx="4480560" cy="411480"/>
-          </a:xfrm>
-          <a:prstGeom prst="rect">
-            <a:avLst/>
-          </a:prstGeom>
-          <a:noFill/>
-          <a:ln/>
-        </p:spPr>
-        <p:txBody>
-          <a:bodyPr wrap="square" lIns="0" tIns="0" rIns="0" bIns="0" rtlCol="0" anchor="t"/>
-          <a:lstStyle/>
-          <a:p>
-            <a:pPr indent="0" marL="0">
-              <a:buNone/>
-            </a:pPr>
-            <a:r>
-              <a:rPr lang="en-US" sz="1900" b="1" dirty="0">
-                <a:solidFill>
-                  <a:schemeClr val="tx1"/>
-                </a:solidFill>
-              </a:rPr>
-              <a:t>Cluster by cluster</a:t>
-            </a:r>
-            <a:endParaRPr lang="en-US" sz="1900" dirty="0"/>
-          </a:p>
-        </p:txBody>
-      </p:sp>
       <p:sp>
         <p:nvSpPr>
           <p:cNvPr id="7" name="Text 4"/>
@@ -3961,8 +4003,8 @@
         </p:nvSpPr>
         <p:spPr>
           <a:xfrm>
-            <a:off x="1417320" y="2395728"/>
-            <a:ext cx="4480560" cy="1005840"/>
+            <a:off x="1600200" y="2286000"/>
+            <a:ext cx="4114800" cy="457200"/>
           </a:xfrm>
           <a:prstGeom prst="rect">
             <a:avLst/>
@@ -3978,12 +4020,48 @@
               <a:buNone/>
             </a:pPr>
             <a:r>
+              <a:rPr lang="en-US" sz="2000" b="1" dirty="0">
+                <a:solidFill>
+                  <a:schemeClr val="tx1"/>
+                </a:solidFill>
+              </a:rPr>
+              <a:t>Collateral that saturates</a:t>
+            </a:r>
+            <a:endParaRPr lang="en-US" sz="2000" dirty="0"/>
+          </a:p>
+        </p:txBody>
+      </p:sp>
+      <p:sp>
+        <p:nvSpPr>
+          <p:cNvPr id="8" name="Text 5"/>
+          <p:cNvSpPr txBox="1"/>
+          <p:nvPr/>
+        </p:nvSpPr>
+        <p:spPr>
+          <a:xfrm>
+            <a:off x="868680" y="2971800"/>
+            <a:ext cx="4800600" cy="1920240"/>
+          </a:xfrm>
+          <a:prstGeom prst="rect">
+            <a:avLst/>
+          </a:prstGeom>
+          <a:noFill/>
+          <a:ln/>
+        </p:spPr>
+        <p:txBody>
+          <a:bodyPr wrap="square" lIns="0" tIns="0" rIns="0" bIns="0" rtlCol="0" anchor="t"/>
+          <a:lstStyle/>
+          <a:p>
+            <a:pPr indent="0" marL="0">
+              <a:buNone/>
+            </a:pPr>
+            <a:r>
               <a:rPr lang="en-US" sz="1500" dirty="0">
                 <a:solidFill>
                   <a:schemeClr val="tx1"/>
                 </a:solidFill>
               </a:rPr>
-              <a:t>Win one row of stalls completely before a second market. Traders talk constantly.</a:t>
+              <a:t>Stake raises a merchant's offline limit on a sublinear, reputation-weighted, hard-capped curve, and is first-loss capital before the reserve. Past the largest realistic basket, more stake buys nothing. That is correct.</a:t>
             </a:r>
             <a:endParaRPr lang="en-US" sz="1500" dirty="0"/>
           </a:p>
@@ -3991,14 +4069,36 @@
       </p:sp>
       <p:sp>
         <p:nvSpPr>
-          <p:cNvPr id="8" name="Shape 5"/>
+          <p:cNvPr id="9" name="earning"/>
           <p:cNvSpPr/>
           <p:nvPr/>
         </p:nvSpPr>
         <p:spPr>
           <a:xfrm>
             <a:off x="6217920" y="1920240"/>
-            <a:ext cx="658368" cy="658368"/>
+            <a:ext cx="5394960" cy="3108960"/>
+          </a:xfrm>
+          <a:prstGeom prst="roundRect">
+            <a:avLst>
+              <a:gd name="adj" fmla="val 3529"/>
+            </a:avLst>
+          </a:prstGeom>
+          <a:solidFill>
+            <a:srgbClr val="EEF5F1"/>
+          </a:solidFill>
+          <a:ln/>
+        </p:spPr>
+      </p:sp>
+      <p:sp>
+        <p:nvSpPr>
+          <p:cNvPr id="10" name="Shape 7"/>
+          <p:cNvSpPr/>
+          <p:nvPr/>
+        </p:nvSpPr>
+        <p:spPr>
+          <a:xfrm>
+            <a:off x="6537960" y="2194560"/>
+            <a:ext cx="566928" cy="566928"/>
           </a:xfrm>
           <a:prstGeom prst="ellipse">
             <a:avLst/>
@@ -4011,7 +4111,7 @@
       </p:sp>
       <p:pic>
         <p:nvPicPr>
-          <p:cNvPr id="9" name="Image 1" descr="preencoded.png">    </p:cNvPr>
+          <p:cNvPr id="11" name="Image 1" descr="preencoded.png">    </p:cNvPr>
           <p:cNvPicPr>
             <a:picLocks noChangeAspect="1"/>
           </p:cNvPicPr>
@@ -4025,8 +4125,8 @@
         </p:blipFill>
         <p:spPr>
           <a:xfrm>
-            <a:off x="6375928" y="2078248"/>
-            <a:ext cx="342351" cy="342351"/>
+            <a:off x="6674023" y="2330623"/>
+            <a:ext cx="294803" cy="294803"/>
           </a:xfrm>
           <a:prstGeom prst="rect">
             <a:avLst/>
@@ -4035,14 +4135,14 @@
       </p:pic>
       <p:sp>
         <p:nvSpPr>
-          <p:cNvPr id="10" name="Text 6"/>
+          <p:cNvPr id="12" name="Text 8"/>
           <p:cNvSpPr txBox="1"/>
           <p:nvPr/>
         </p:nvSpPr>
         <p:spPr>
           <a:xfrm>
-            <a:off x="7086600" y="1938528"/>
-            <a:ext cx="4480560" cy="411480"/>
+            <a:off x="7269480" y="2286000"/>
+            <a:ext cx="4114800" cy="457200"/>
           </a:xfrm>
           <a:prstGeom prst="rect">
             <a:avLst/>
@@ -4058,27 +4158,27 @@
               <a:buNone/>
             </a:pPr>
             <a:r>
-              <a:rPr lang="en-US" sz="1900" b="1" dirty="0">
+              <a:rPr lang="en-US" sz="2000" b="1" dirty="0">
                 <a:solidFill>
                   <a:schemeClr val="tx1"/>
                 </a:solidFill>
               </a:rPr>
-              <a:t>Payers spread it</a:t>
-            </a:r>
-            <a:endParaRPr lang="en-US" sz="1900" dirty="0"/>
-          </a:p>
-        </p:txBody>
-      </p:sp>
-      <p:sp>
-        <p:nvSpPr>
-          <p:cNvPr id="11" name="Text 7"/>
+              <a:t>Earning, and a real choice</a:t>
+            </a:r>
+            <a:endParaRPr lang="en-US" sz="2000" dirty="0"/>
+          </a:p>
+        </p:txBody>
+      </p:sp>
+      <p:sp>
+        <p:nvSpPr>
+          <p:cNvPr id="13" name="Text 9"/>
           <p:cNvSpPr txBox="1"/>
           <p:nvPr/>
         </p:nvSpPr>
         <p:spPr>
           <a:xfrm>
-            <a:off x="7086600" y="2395728"/>
-            <a:ext cx="4480560" cy="1005840"/>
+            <a:off x="6537960" y="2971800"/>
+            <a:ext cx="4800600" cy="1920240"/>
           </a:xfrm>
           <a:prstGeom prst="rect">
             <a:avLst/>
@@ -4099,7 +4199,7 @@
                   <a:schemeClr val="tx1"/>
                 </a:solidFill>
               </a:rPr>
-              <a:t>Every customer who pays offline has the app, and can pay a friend with it.</a:t>
+              <a:t>Each period the merchant chooses: the rebate as a lower fee in naira, or paid in SKR, already staked, at a premium priced from the reserve capital their stake saves. A choice made each month is an incentive; an automatic accrual is a discount.</a:t>
             </a:r>
             <a:endParaRPr lang="en-US" sz="1500" dirty="0"/>
           </a:p>
@@ -4107,58 +4207,14 @@
       </p:sp>
       <p:sp>
         <p:nvSpPr>
-          <p:cNvPr id="12" name="Shape 8"/>
-          <p:cNvSpPr/>
-          <p:nvPr/>
-        </p:nvSpPr>
-        <p:spPr>
-          <a:xfrm>
-            <a:off x="548640" y="3794760"/>
-            <a:ext cx="658368" cy="658368"/>
-          </a:xfrm>
-          <a:prstGeom prst="ellipse">
-            <a:avLst/>
-          </a:prstGeom>
-          <a:solidFill>
-            <a:schemeClr val="accent1"/>
-          </a:solidFill>
-          <a:ln/>
-        </p:spPr>
-      </p:sp>
-      <p:pic>
-        <p:nvPicPr>
-          <p:cNvPr id="13" name="Image 2" descr="preencoded.png">    </p:cNvPr>
-          <p:cNvPicPr>
-            <a:picLocks noChangeAspect="1"/>
-          </p:cNvPicPr>
-          <p:nvPr/>
-        </p:nvPicPr>
-        <p:blipFill>
-          <a:blip r:embed="rId3"/>
-          <a:stretch>
-            <a:fillRect/>
-          </a:stretch>
-        </p:blipFill>
-        <p:spPr>
-          <a:xfrm>
-            <a:off x="706648" y="3952768"/>
-            <a:ext cx="342351" cy="342351"/>
-          </a:xfrm>
-          <a:prstGeom prst="rect">
-            <a:avLst/>
-          </a:prstGeom>
-        </p:spPr>
-      </p:pic>
-      <p:sp>
-        <p:nvSpPr>
-          <p:cNvPr id="14" name="Text 9"/>
+          <p:cNvPr id="14" name="Text 10"/>
           <p:cNvSpPr txBox="1"/>
           <p:nvPr/>
         </p:nvSpPr>
         <p:spPr>
           <a:xfrm>
-            <a:off x="1417320" y="3813048"/>
-            <a:ext cx="4480560" cy="411480"/>
+            <a:off x="548640" y="5257800"/>
+            <a:ext cx="10972800" cy="548640"/>
           </a:xfrm>
           <a:prstGeom prst="rect">
             <a:avLst/>
@@ -4174,27 +4230,27 @@
               <a:buNone/>
             </a:pPr>
             <a:r>
-              <a:rPr lang="en-US" sz="1900" b="1" dirty="0">
-                <a:solidFill>
-                  <a:schemeClr val="tx1"/>
-                </a:solidFill>
-              </a:rPr>
-              <a:t>dApp Store</a:t>
-            </a:r>
-            <a:endParaRPr lang="en-US" sz="1900" dirty="0"/>
-          </a:p>
-        </p:txBody>
-      </p:sp>
-      <p:sp>
-        <p:nvSpPr>
-          <p:cNvPr id="15" name="Text 10"/>
+              <a:rPr lang="en-US" sz="1500" i="1" dirty="0">
+                <a:solidFill>
+                  <a:schemeClr val="accent1"/>
+                </a:solidFill>
+              </a:rPr>
+              <a:t>Honest number: the reserve model supports a premium of about 1.001×, not 1.5×. We say so rather than pick one.</a:t>
+            </a:r>
+            <a:endParaRPr lang="en-US" sz="1500" dirty="0"/>
+          </a:p>
+        </p:txBody>
+      </p:sp>
+      <p:sp>
+        <p:nvSpPr>
+          <p:cNvPr id="15" name="Text 11"/>
           <p:cNvSpPr txBox="1"/>
           <p:nvPr/>
         </p:nvSpPr>
         <p:spPr>
           <a:xfrm>
-            <a:off x="1417320" y="4270248"/>
-            <a:ext cx="4480560" cy="1005840"/>
+            <a:off x="548640" y="5989320"/>
+            <a:ext cx="10515600" cy="274320"/>
           </a:xfrm>
           <a:prstGeom prst="rect">
             <a:avLst/>
@@ -4210,130 +4266,14 @@
               <a:buNone/>
             </a:pPr>
             <a:r>
-              <a:rPr lang="en-US" sz="1500" dirty="0">
-                <a:solidFill>
-                  <a:schemeClr val="tx1"/>
-                </a:solidFill>
-              </a:rPr>
-              <a:t>Placement seeds the customer side with people who already hold wallets.</a:t>
-            </a:r>
-            <a:endParaRPr lang="en-US" sz="1500" dirty="0"/>
-          </a:p>
-        </p:txBody>
-      </p:sp>
-      <p:sp>
-        <p:nvSpPr>
-          <p:cNvPr id="16" name="Shape 11"/>
-          <p:cNvSpPr/>
-          <p:nvPr/>
-        </p:nvSpPr>
-        <p:spPr>
-          <a:xfrm>
-            <a:off x="6217920" y="3794760"/>
-            <a:ext cx="658368" cy="658368"/>
-          </a:xfrm>
-          <a:prstGeom prst="ellipse">
-            <a:avLst/>
-          </a:prstGeom>
-          <a:solidFill>
-            <a:schemeClr val="accent1"/>
-          </a:solidFill>
-          <a:ln/>
-        </p:spPr>
-      </p:sp>
-      <p:pic>
-        <p:nvPicPr>
-          <p:cNvPr id="17" name="Image 3" descr="preencoded.png">    </p:cNvPr>
-          <p:cNvPicPr>
-            <a:picLocks noChangeAspect="1"/>
-          </p:cNvPicPr>
-          <p:nvPr/>
-        </p:nvPicPr>
-        <p:blipFill>
-          <a:blip r:embed="rId4"/>
-          <a:stretch>
-            <a:fillRect/>
-          </a:stretch>
-        </p:blipFill>
-        <p:spPr>
-          <a:xfrm>
-            <a:off x="6375928" y="3952768"/>
-            <a:ext cx="342351" cy="342351"/>
-          </a:xfrm>
-          <a:prstGeom prst="rect">
-            <a:avLst/>
-          </a:prstGeom>
-        </p:spPr>
-      </p:pic>
-      <p:sp>
-        <p:nvSpPr>
-          <p:cNvPr id="18" name="Text 12"/>
-          <p:cNvSpPr txBox="1"/>
-          <p:nvPr/>
-        </p:nvSpPr>
-        <p:spPr>
-          <a:xfrm>
-            <a:off x="7086600" y="3813048"/>
-            <a:ext cx="4480560" cy="411480"/>
-          </a:xfrm>
-          <a:prstGeom prst="rect">
-            <a:avLst/>
-          </a:prstGeom>
-          <a:noFill/>
-          <a:ln/>
-        </p:spPr>
-        <p:txBody>
-          <a:bodyPr wrap="square" lIns="0" tIns="0" rIns="0" bIns="0" rtlCol="0" anchor="t"/>
-          <a:lstStyle/>
-          <a:p>
-            <a:pPr indent="0" marL="0">
-              <a:buNone/>
-            </a:pPr>
-            <a:r>
-              <a:rPr lang="en-US" sz="1900" b="1" dirty="0">
-                <a:solidFill>
-                  <a:schemeClr val="tx1"/>
-                </a:solidFill>
-              </a:rPr>
-              <a:t>Payout partners</a:t>
-            </a:r>
-            <a:endParaRPr lang="en-US" sz="1900" dirty="0"/>
-          </a:p>
-        </p:txBody>
-      </p:sp>
-      <p:sp>
-        <p:nvSpPr>
-          <p:cNvPr id="19" name="Text 13"/>
-          <p:cNvSpPr txBox="1"/>
-          <p:nvPr/>
-        </p:nvSpPr>
-        <p:spPr>
-          <a:xfrm>
-            <a:off x="7086600" y="4270248"/>
-            <a:ext cx="4480560" cy="1005840"/>
-          </a:xfrm>
-          <a:prstGeom prst="rect">
-            <a:avLst/>
-          </a:prstGeom>
-          <a:noFill/>
-          <a:ln/>
-        </p:spPr>
-        <p:txBody>
-          <a:bodyPr wrap="square" lIns="0" tIns="0" rIns="0" bIns="0" rtlCol="0" anchor="t"/>
-          <a:lstStyle/>
-          <a:p>
-            <a:pPr indent="0" marL="0">
-              <a:buNone/>
-            </a:pPr>
-            <a:r>
-              <a:rPr lang="en-US" sz="1500" dirty="0">
-                <a:solidFill>
-                  <a:schemeClr val="tx1"/>
-                </a:solidFill>
-              </a:rPr>
-              <a:t>paj.cash and its peers already have merchants and want volume.</a:t>
-            </a:r>
-            <a:endParaRPr lang="en-US" sz="1500" dirty="0"/>
+              <a:rPr lang="en-US" sz="1000" i="1" dirty="0">
+                <a:solidFill>
+                  <a:schemeClr val="accent6"/>
+                </a:solidFill>
+              </a:rPr>
+              <a:t>docs/RESERVE.md · merchants electing SKR accept price risk, disclosed at the point of election</a:t>
+            </a:r>
+            <a:endParaRPr lang="en-US" sz="1000" dirty="0"/>
           </a:p>
         </p:txBody>
       </p:sp>
@@ -4439,7 +4379,7 @@
                   <a:schemeClr val="accent1"/>
                 </a:solidFill>
               </a:rPr>
-              <a:t>WHAT ACTUALLY RAN</a:t>
+              <a:t>DISTRIBUTION</a:t>
             </a:r>
             <a:endParaRPr lang="en-US" sz="1200" dirty="0"/>
           </a:p>
@@ -4477,7 +4417,7 @@
                   <a:schemeClr val="tx1"/>
                 </a:solidFill>
               </a:rPr>
-              <a:t>What is live, what is on devnet, and what is declared</a:t>
+              <a:t>Fifty merchants on foot, then the network does the rest</a:t>
             </a:r>
             <a:endParaRPr lang="en-US" sz="3000" dirty="0"/>
           </a:p>
@@ -4485,36 +4425,58 @@
       </p:sp>
       <p:sp>
         <p:nvSpPr>
-          <p:cNvPr id="4" name="column"/>
+          <p:cNvPr id="4" name="Shape 2"/>
           <p:cNvSpPr/>
           <p:nvPr/>
         </p:nvSpPr>
         <p:spPr>
           <a:xfrm>
-            <a:off x="548640" y="1874520"/>
-            <a:ext cx="3474720" cy="3977640"/>
-          </a:xfrm>
-          <a:prstGeom prst="roundRect">
-            <a:avLst>
-              <a:gd name="adj" fmla="val 3158"/>
-            </a:avLst>
+            <a:off x="548640" y="1920240"/>
+            <a:ext cx="658368" cy="658368"/>
+          </a:xfrm>
+          <a:prstGeom prst="ellipse">
+            <a:avLst/>
           </a:prstGeom>
           <a:solidFill>
-            <a:srgbClr val="EEF5F1"/>
+            <a:schemeClr val="accent1"/>
           </a:solidFill>
           <a:ln/>
         </p:spPr>
       </p:sp>
-      <p:sp>
-        <p:nvSpPr>
-          <p:cNvPr id="5" name="Text 3"/>
+      <p:pic>
+        <p:nvPicPr>
+          <p:cNvPr id="5" name="Image 0" descr="preencoded.png">    </p:cNvPr>
+          <p:cNvPicPr>
+            <a:picLocks noChangeAspect="1"/>
+          </p:cNvPicPr>
+          <p:nvPr/>
+        </p:nvPicPr>
+        <p:blipFill>
+          <a:blip r:embed="rId1"/>
+          <a:stretch>
+            <a:fillRect/>
+          </a:stretch>
+        </p:blipFill>
+        <p:spPr>
+          <a:xfrm>
+            <a:off x="706648" y="2078248"/>
+            <a:ext cx="342351" cy="342351"/>
+          </a:xfrm>
+          <a:prstGeom prst="rect">
+            <a:avLst/>
+          </a:prstGeom>
+        </p:spPr>
+      </p:pic>
+      <p:sp>
+        <p:nvSpPr>
+          <p:cNvPr id="6" name="Text 3"/>
           <p:cNvSpPr txBox="1"/>
           <p:nvPr/>
         </p:nvSpPr>
         <p:spPr>
           <a:xfrm>
-            <a:off x="822960" y="2057400"/>
-            <a:ext cx="2926080" cy="457200"/>
+            <a:off x="1417320" y="1938528"/>
+            <a:ext cx="4480560" cy="411480"/>
           </a:xfrm>
           <a:prstGeom prst="rect">
             <a:avLst/>
@@ -4530,27 +4492,27 @@
               <a:buNone/>
             </a:pPr>
             <a:r>
-              <a:rPr lang="en-US" sz="2000" b="1" dirty="0">
-                <a:solidFill>
-                  <a:srgbClr val="1A6B4C"/>
-                </a:solidFill>
-              </a:rPr>
-              <a:t>Live</a:t>
-            </a:r>
-            <a:endParaRPr lang="en-US" sz="2000" dirty="0"/>
-          </a:p>
-        </p:txBody>
-      </p:sp>
-      <p:sp>
-        <p:nvSpPr>
-          <p:cNvPr id="6" name="Text 4"/>
+              <a:rPr lang="en-US" sz="1900" b="1" dirty="0">
+                <a:solidFill>
+                  <a:schemeClr val="tx1"/>
+                </a:solidFill>
+              </a:rPr>
+              <a:t>Cluster by cluster</a:t>
+            </a:r>
+            <a:endParaRPr lang="en-US" sz="1900" dirty="0"/>
+          </a:p>
+        </p:txBody>
+      </p:sp>
+      <p:sp>
+        <p:nvSpPr>
+          <p:cNvPr id="7" name="Text 4"/>
           <p:cNvSpPr txBox="1"/>
           <p:nvPr/>
         </p:nvSpPr>
         <p:spPr>
           <a:xfrm>
-            <a:off x="822960" y="2606040"/>
-            <a:ext cx="2971800" cy="3108960"/>
+            <a:off x="1417320" y="2395728"/>
+            <a:ext cx="4480560" cy="1005840"/>
           </a:xfrm>
           <a:prstGeom prst="rect">
             <a:avLst/>
@@ -4562,111 +4524,307 @@
           <a:bodyPr wrap="square" lIns="0" tIns="0" rIns="0" bIns="0" rtlCol="0" anchor="t"/>
           <a:lstStyle/>
           <a:p>
-            <a:pPr marL="342900" indent="-342900">
-              <a:spcAft>
-                <a:spcPts val="800"/>
-              </a:spcAft>
-              <a:buSzPct val="100000"/>
-              <a:buChar char="•"/>
-            </a:pPr>
-            <a:r>
-              <a:rPr lang="en-US" sz="1400" dirty="0">
+            <a:pPr indent="0" marL="0">
+              <a:buNone/>
+            </a:pPr>
+            <a:r>
+              <a:rPr lang="en-US" sz="1500" dirty="0">
                 <a:solidFill>
                   <a:schemeClr val="tx1"/>
                 </a:solidFill>
               </a:rPr>
-              <a:t>Cash-out on Solana mainnet, paid to a Nigerian bank by paj.cash</a:t>
-            </a:r>
-            <a:endParaRPr lang="en-US" sz="1400" dirty="0"/>
-          </a:p>
-          <a:p>
-            <a:pPr marL="342900" indent="-342900">
-              <a:spcAft>
-                <a:spcPts val="800"/>
-              </a:spcAft>
-              <a:buSzPct val="100000"/>
-              <a:buChar char="•"/>
-            </a:pPr>
-            <a:r>
-              <a:rPr lang="en-US" sz="1400" dirty="0">
+              <a:t>Win one row of stalls completely before a second market. Traders talk constantly.</a:t>
+            </a:r>
+            <a:endParaRPr lang="en-US" sz="1500" dirty="0"/>
+          </a:p>
+        </p:txBody>
+      </p:sp>
+      <p:sp>
+        <p:nvSpPr>
+          <p:cNvPr id="8" name="Shape 5"/>
+          <p:cNvSpPr/>
+          <p:nvPr/>
+        </p:nvSpPr>
+        <p:spPr>
+          <a:xfrm>
+            <a:off x="6217920" y="1920240"/>
+            <a:ext cx="658368" cy="658368"/>
+          </a:xfrm>
+          <a:prstGeom prst="ellipse">
+            <a:avLst/>
+          </a:prstGeom>
+          <a:solidFill>
+            <a:schemeClr val="accent1"/>
+          </a:solidFill>
+          <a:ln/>
+        </p:spPr>
+      </p:sp>
+      <p:pic>
+        <p:nvPicPr>
+          <p:cNvPr id="9" name="Image 1" descr="preencoded.png">    </p:cNvPr>
+          <p:cNvPicPr>
+            <a:picLocks noChangeAspect="1"/>
+          </p:cNvPicPr>
+          <p:nvPr/>
+        </p:nvPicPr>
+        <p:blipFill>
+          <a:blip r:embed="rId2"/>
+          <a:stretch>
+            <a:fillRect/>
+          </a:stretch>
+        </p:blipFill>
+        <p:spPr>
+          <a:xfrm>
+            <a:off x="6375928" y="2078248"/>
+            <a:ext cx="342351" cy="342351"/>
+          </a:xfrm>
+          <a:prstGeom prst="rect">
+            <a:avLst/>
+          </a:prstGeom>
+        </p:spPr>
+      </p:pic>
+      <p:sp>
+        <p:nvSpPr>
+          <p:cNvPr id="10" name="Text 6"/>
+          <p:cNvSpPr txBox="1"/>
+          <p:nvPr/>
+        </p:nvSpPr>
+        <p:spPr>
+          <a:xfrm>
+            <a:off x="7086600" y="1938528"/>
+            <a:ext cx="4480560" cy="411480"/>
+          </a:xfrm>
+          <a:prstGeom prst="rect">
+            <a:avLst/>
+          </a:prstGeom>
+          <a:noFill/>
+          <a:ln/>
+        </p:spPr>
+        <p:txBody>
+          <a:bodyPr wrap="square" lIns="0" tIns="0" rIns="0" bIns="0" rtlCol="0" anchor="t"/>
+          <a:lstStyle/>
+          <a:p>
+            <a:pPr indent="0" marL="0">
+              <a:buNone/>
+            </a:pPr>
+            <a:r>
+              <a:rPr lang="en-US" sz="1900" b="1" dirty="0">
                 <a:solidFill>
                   <a:schemeClr val="tx1"/>
                 </a:solidFill>
               </a:rPr>
-              <a:t>Signed release APKs for the till and the payer app</a:t>
-            </a:r>
-            <a:endParaRPr lang="en-US" sz="1400" dirty="0"/>
-          </a:p>
-          <a:p>
-            <a:pPr marL="342900" indent="-342900">
-              <a:spcAft>
-                <a:spcPts val="800"/>
-              </a:spcAft>
-              <a:buSzPct val="100000"/>
-              <a:buChar char="•"/>
-            </a:pPr>
-            <a:r>
-              <a:rPr lang="en-US" sz="1400" dirty="0">
+              <a:t>Payers spread it</a:t>
+            </a:r>
+            <a:endParaRPr lang="en-US" sz="1900" dirty="0"/>
+          </a:p>
+        </p:txBody>
+      </p:sp>
+      <p:sp>
+        <p:nvSpPr>
+          <p:cNvPr id="11" name="Text 7"/>
+          <p:cNvSpPr txBox="1"/>
+          <p:nvPr/>
+        </p:nvSpPr>
+        <p:spPr>
+          <a:xfrm>
+            <a:off x="7086600" y="2395728"/>
+            <a:ext cx="4480560" cy="1005840"/>
+          </a:xfrm>
+          <a:prstGeom prst="rect">
+            <a:avLst/>
+          </a:prstGeom>
+          <a:noFill/>
+          <a:ln/>
+        </p:spPr>
+        <p:txBody>
+          <a:bodyPr wrap="square" lIns="0" tIns="0" rIns="0" bIns="0" rtlCol="0" anchor="t"/>
+          <a:lstStyle/>
+          <a:p>
+            <a:pPr indent="0" marL="0">
+              <a:buNone/>
+            </a:pPr>
+            <a:r>
+              <a:rPr lang="en-US" sz="1500" dirty="0">
                 <a:solidFill>
                   <a:schemeClr val="tx1"/>
                 </a:solidFill>
               </a:rPr>
-              <a:t>Mobile Wallet Adapter for every merchant signature</a:t>
-            </a:r>
-            <a:endParaRPr lang="en-US" sz="1400" dirty="0"/>
-          </a:p>
-          <a:p>
-            <a:pPr marL="342900" indent="-342900">
-              <a:spcAft>
-                <a:spcPts val="800"/>
-              </a:spcAft>
-              <a:buSzPct val="100000"/>
-              <a:buChar char="•"/>
-            </a:pPr>
-            <a:r>
-              <a:rPr lang="en-US" sz="1400" dirty="0">
+              <a:t>Every customer who pays offline has the app, and can pay a friend with it.</a:t>
+            </a:r>
+            <a:endParaRPr lang="en-US" sz="1500" dirty="0"/>
+          </a:p>
+        </p:txBody>
+      </p:sp>
+      <p:sp>
+        <p:nvSpPr>
+          <p:cNvPr id="12" name="Shape 8"/>
+          <p:cNvSpPr/>
+          <p:nvPr/>
+        </p:nvSpPr>
+        <p:spPr>
+          <a:xfrm>
+            <a:off x="548640" y="3794760"/>
+            <a:ext cx="658368" cy="658368"/>
+          </a:xfrm>
+          <a:prstGeom prst="ellipse">
+            <a:avLst/>
+          </a:prstGeom>
+          <a:solidFill>
+            <a:schemeClr val="accent1"/>
+          </a:solidFill>
+          <a:ln/>
+        </p:spPr>
+      </p:sp>
+      <p:pic>
+        <p:nvPicPr>
+          <p:cNvPr id="13" name="Image 2" descr="preencoded.png">    </p:cNvPr>
+          <p:cNvPicPr>
+            <a:picLocks noChangeAspect="1"/>
+          </p:cNvPicPr>
+          <p:nvPr/>
+        </p:nvPicPr>
+        <p:blipFill>
+          <a:blip r:embed="rId3"/>
+          <a:stretch>
+            <a:fillRect/>
+          </a:stretch>
+        </p:blipFill>
+        <p:spPr>
+          <a:xfrm>
+            <a:off x="706648" y="3952768"/>
+            <a:ext cx="342351" cy="342351"/>
+          </a:xfrm>
+          <a:prstGeom prst="rect">
+            <a:avLst/>
+          </a:prstGeom>
+        </p:spPr>
+      </p:pic>
+      <p:sp>
+        <p:nvSpPr>
+          <p:cNvPr id="14" name="Text 9"/>
+          <p:cNvSpPr txBox="1"/>
+          <p:nvPr/>
+        </p:nvSpPr>
+        <p:spPr>
+          <a:xfrm>
+            <a:off x="1417320" y="3813048"/>
+            <a:ext cx="4480560" cy="411480"/>
+          </a:xfrm>
+          <a:prstGeom prst="rect">
+            <a:avLst/>
+          </a:prstGeom>
+          <a:noFill/>
+          <a:ln/>
+        </p:spPr>
+        <p:txBody>
+          <a:bodyPr wrap="square" lIns="0" tIns="0" rIns="0" bIns="0" rtlCol="0" anchor="t"/>
+          <a:lstStyle/>
+          <a:p>
+            <a:pPr indent="0" marL="0">
+              <a:buNone/>
+            </a:pPr>
+            <a:r>
+              <a:rPr lang="en-US" sz="1900" b="1" dirty="0">
                 <a:solidFill>
                   <a:schemeClr val="tx1"/>
                 </a:solidFill>
               </a:rPr>
-              <a:t>paj.cash's live naira rate on the till</a:t>
-            </a:r>
-            <a:endParaRPr lang="en-US" sz="1400" dirty="0"/>
-          </a:p>
-        </p:txBody>
-      </p:sp>
-      <p:sp>
-        <p:nvSpPr>
-          <p:cNvPr id="7" name="column"/>
+              <a:t>dApp Store</a:t>
+            </a:r>
+            <a:endParaRPr lang="en-US" sz="1900" dirty="0"/>
+          </a:p>
+        </p:txBody>
+      </p:sp>
+      <p:sp>
+        <p:nvSpPr>
+          <p:cNvPr id="15" name="Text 10"/>
+          <p:cNvSpPr txBox="1"/>
+          <p:nvPr/>
+        </p:nvSpPr>
+        <p:spPr>
+          <a:xfrm>
+            <a:off x="1417320" y="4270248"/>
+            <a:ext cx="4480560" cy="1005840"/>
+          </a:xfrm>
+          <a:prstGeom prst="rect">
+            <a:avLst/>
+          </a:prstGeom>
+          <a:noFill/>
+          <a:ln/>
+        </p:spPr>
+        <p:txBody>
+          <a:bodyPr wrap="square" lIns="0" tIns="0" rIns="0" bIns="0" rtlCol="0" anchor="t"/>
+          <a:lstStyle/>
+          <a:p>
+            <a:pPr indent="0" marL="0">
+              <a:buNone/>
+            </a:pPr>
+            <a:r>
+              <a:rPr lang="en-US" sz="1500" dirty="0">
+                <a:solidFill>
+                  <a:schemeClr val="tx1"/>
+                </a:solidFill>
+              </a:rPr>
+              <a:t>Placement seeds the customer side with people who already hold wallets.</a:t>
+            </a:r>
+            <a:endParaRPr lang="en-US" sz="1500" dirty="0"/>
+          </a:p>
+        </p:txBody>
+      </p:sp>
+      <p:sp>
+        <p:nvSpPr>
+          <p:cNvPr id="16" name="Shape 11"/>
           <p:cNvSpPr/>
           <p:nvPr/>
         </p:nvSpPr>
         <p:spPr>
           <a:xfrm>
-            <a:off x="4297680" y="1874520"/>
-            <a:ext cx="3474720" cy="3977640"/>
-          </a:xfrm>
-          <a:prstGeom prst="roundRect">
-            <a:avLst>
-              <a:gd name="adj" fmla="val 3158"/>
-            </a:avLst>
+            <a:off x="6217920" y="3794760"/>
+            <a:ext cx="658368" cy="658368"/>
+          </a:xfrm>
+          <a:prstGeom prst="ellipse">
+            <a:avLst/>
           </a:prstGeom>
           <a:solidFill>
-            <a:srgbClr val="EEF5F1"/>
+            <a:schemeClr val="accent1"/>
           </a:solidFill>
           <a:ln/>
         </p:spPr>
       </p:sp>
-      <p:sp>
-        <p:nvSpPr>
-          <p:cNvPr id="8" name="Text 6"/>
+      <p:pic>
+        <p:nvPicPr>
+          <p:cNvPr id="17" name="Image 3" descr="preencoded.png">    </p:cNvPr>
+          <p:cNvPicPr>
+            <a:picLocks noChangeAspect="1"/>
+          </p:cNvPicPr>
+          <p:nvPr/>
+        </p:nvPicPr>
+        <p:blipFill>
+          <a:blip r:embed="rId4"/>
+          <a:stretch>
+            <a:fillRect/>
+          </a:stretch>
+        </p:blipFill>
+        <p:spPr>
+          <a:xfrm>
+            <a:off x="6375928" y="3952768"/>
+            <a:ext cx="342351" cy="342351"/>
+          </a:xfrm>
+          <a:prstGeom prst="rect">
+            <a:avLst/>
+          </a:prstGeom>
+        </p:spPr>
+      </p:pic>
+      <p:sp>
+        <p:nvSpPr>
+          <p:cNvPr id="18" name="Text 12"/>
           <p:cNvSpPr txBox="1"/>
           <p:nvPr/>
         </p:nvSpPr>
         <p:spPr>
           <a:xfrm>
-            <a:off x="4572000" y="2057400"/>
-            <a:ext cx="2926080" cy="457200"/>
+            <a:off x="7086600" y="3813048"/>
+            <a:ext cx="4480560" cy="411480"/>
           </a:xfrm>
           <a:prstGeom prst="rect">
             <a:avLst/>
@@ -4682,27 +4840,27 @@
               <a:buNone/>
             </a:pPr>
             <a:r>
-              <a:rPr lang="en-US" sz="2000" b="1" dirty="0">
-                <a:solidFill>
-                  <a:srgbClr val="6B7A74"/>
-                </a:solidFill>
-              </a:rPr>
-              <a:t>On devnet</a:t>
-            </a:r>
-            <a:endParaRPr lang="en-US" sz="2000" dirty="0"/>
-          </a:p>
-        </p:txBody>
-      </p:sp>
-      <p:sp>
-        <p:nvSpPr>
-          <p:cNvPr id="9" name="Text 7"/>
+              <a:rPr lang="en-US" sz="1900" b="1" dirty="0">
+                <a:solidFill>
+                  <a:schemeClr val="tx1"/>
+                </a:solidFill>
+              </a:rPr>
+              <a:t>Payout partners</a:t>
+            </a:r>
+            <a:endParaRPr lang="en-US" sz="1900" dirty="0"/>
+          </a:p>
+        </p:txBody>
+      </p:sp>
+      <p:sp>
+        <p:nvSpPr>
+          <p:cNvPr id="19" name="Text 13"/>
           <p:cNvSpPr txBox="1"/>
           <p:nvPr/>
         </p:nvSpPr>
         <p:spPr>
           <a:xfrm>
-            <a:off x="4572000" y="2606040"/>
-            <a:ext cx="2971800" cy="3108960"/>
+            <a:off x="7086600" y="4270248"/>
+            <a:ext cx="4480560" cy="1005840"/>
           </a:xfrm>
           <a:prstGeom prst="rect">
             <a:avLst/>
@@ -4714,264 +4872,18 @@
           <a:bodyPr wrap="square" lIns="0" tIns="0" rIns="0" bIns="0" rtlCol="0" anchor="t"/>
           <a:lstStyle/>
           <a:p>
-            <a:pPr marL="342900" indent="-342900">
-              <a:spcAft>
-                <a:spcPts val="800"/>
-              </a:spcAft>
-              <a:buSzPct val="100000"/>
-              <a:buChar char="•"/>
-            </a:pPr>
-            <a:r>
-              <a:rPr lang="en-US" sz="1400" dirty="0">
+            <a:pPr indent="0" marL="0">
+              <a:buNone/>
+            </a:pPr>
+            <a:r>
+              <a:rPr lang="en-US" sz="1500" dirty="0">
                 <a:solidFill>
                   <a:schemeClr val="tx1"/>
                 </a:solidFill>
               </a:rPr>
-              <a:t>Vault program: secure-chip signatures verified on chain</a:t>
-            </a:r>
-            <a:endParaRPr lang="en-US" sz="1400" dirty="0"/>
-          </a:p>
-          <a:p>
-            <a:pPr marL="342900" indent="-342900">
-              <a:spcAft>
-                <a:spcPts val="800"/>
-              </a:spcAft>
-              <a:buSzPct val="100000"/>
-              <a:buChar char="•"/>
-            </a:pPr>
-            <a:r>
-              <a:rPr lang="en-US" sz="1400" dirty="0">
-                <a:solidFill>
-                  <a:schemeClr val="tx1"/>
-                </a:solidFill>
-              </a:rPr>
-              <a:t>Offline sale, both phones in airplane mode, settled on reconnect</a:t>
-            </a:r>
-            <a:endParaRPr lang="en-US" sz="1400" dirty="0"/>
-          </a:p>
-          <a:p>
-            <a:pPr marL="342900" indent="-342900">
-              <a:spcAft>
-                <a:spcPts val="800"/>
-              </a:spcAft>
-              <a:buSzPct val="100000"/>
-              <a:buChar char="•"/>
-            </a:pPr>
-            <a:r>
-              <a:rPr lang="en-US" sz="1400" dirty="0">
-                <a:solidFill>
-                  <a:schemeClr val="tx1"/>
-                </a:solidFill>
-              </a:rPr>
-              <a:t>Replay refused; forged double spend freezes the vault</a:t>
-            </a:r>
-            <a:endParaRPr lang="en-US" sz="1400" dirty="0"/>
-          </a:p>
-          <a:p>
-            <a:pPr marL="342900" indent="-342900">
-              <a:spcAft>
-                <a:spcPts val="800"/>
-              </a:spcAft>
-              <a:buSzPct val="100000"/>
-              <a:buChar char="•"/>
-            </a:pPr>
-            <a:r>
-              <a:rPr lang="en-US" sz="1400" dirty="0">
-                <a:solidFill>
-                  <a:schemeClr val="tx1"/>
-                </a:solidFill>
-              </a:rPr>
-              <a:t>anchor test green: 40 of 40</a:t>
-            </a:r>
-            <a:endParaRPr lang="en-US" sz="1400" dirty="0"/>
-          </a:p>
-        </p:txBody>
-      </p:sp>
-      <p:sp>
-        <p:nvSpPr>
-          <p:cNvPr id="10" name="column"/>
-          <p:cNvSpPr/>
-          <p:nvPr/>
-        </p:nvSpPr>
-        <p:spPr>
-          <a:xfrm>
-            <a:off x="8046720" y="1874520"/>
-            <a:ext cx="3474720" cy="3977640"/>
-          </a:xfrm>
-          <a:prstGeom prst="roundRect">
-            <a:avLst>
-              <a:gd name="adj" fmla="val 3158"/>
-            </a:avLst>
-          </a:prstGeom>
-          <a:solidFill>
-            <a:srgbClr val="EEF5F1"/>
-          </a:solidFill>
-          <a:ln/>
-        </p:spPr>
-      </p:sp>
-      <p:sp>
-        <p:nvSpPr>
-          <p:cNvPr id="11" name="Text 9"/>
-          <p:cNvSpPr txBox="1"/>
-          <p:nvPr/>
-        </p:nvSpPr>
-        <p:spPr>
-          <a:xfrm>
-            <a:off x="8321040" y="2057400"/>
-            <a:ext cx="2926080" cy="457200"/>
-          </a:xfrm>
-          <a:prstGeom prst="rect">
-            <a:avLst/>
-          </a:prstGeom>
-          <a:noFill/>
-          <a:ln/>
-        </p:spPr>
-        <p:txBody>
-          <a:bodyPr wrap="square" lIns="0" tIns="0" rIns="0" bIns="0" rtlCol="0" anchor="t"/>
-          <a:lstStyle/>
-          <a:p>
-            <a:pPr indent="0" marL="0">
-              <a:buNone/>
-            </a:pPr>
-            <a:r>
-              <a:rPr lang="en-US" sz="2000" b="1" dirty="0">
-                <a:solidFill>
-                  <a:srgbClr val="D4855E"/>
-                </a:solidFill>
-              </a:rPr>
-              <a:t>Declared stubs</a:t>
-            </a:r>
-            <a:endParaRPr lang="en-US" sz="2000" dirty="0"/>
-          </a:p>
-        </p:txBody>
-      </p:sp>
-      <p:sp>
-        <p:nvSpPr>
-          <p:cNvPr id="12" name="Text 10"/>
-          <p:cNvSpPr txBox="1"/>
-          <p:nvPr/>
-        </p:nvSpPr>
-        <p:spPr>
-          <a:xfrm>
-            <a:off x="8321040" y="2606040"/>
-            <a:ext cx="2971800" cy="3108960"/>
-          </a:xfrm>
-          <a:prstGeom prst="rect">
-            <a:avLst/>
-          </a:prstGeom>
-          <a:noFill/>
-          <a:ln/>
-        </p:spPr>
-        <p:txBody>
-          <a:bodyPr wrap="square" lIns="0" tIns="0" rIns="0" bIns="0" rtlCol="0" anchor="t"/>
-          <a:lstStyle/>
-          <a:p>
-            <a:pPr marL="342900" indent="-342900">
-              <a:spcAft>
-                <a:spcPts val="800"/>
-              </a:spcAft>
-              <a:buSzPct val="100000"/>
-              <a:buChar char="•"/>
-            </a:pPr>
-            <a:r>
-              <a:rPr lang="en-US" sz="1400" dirty="0">
-                <a:solidFill>
-                  <a:schemeClr val="tx1"/>
-                </a:solidFill>
-              </a:rPr>
-              <a:t>Rebate payout and the SKR premium (≈1.001×)</a:t>
-            </a:r>
-            <a:endParaRPr lang="en-US" sz="1400" dirty="0"/>
-          </a:p>
-          <a:p>
-            <a:pPr marL="342900" indent="-342900">
-              <a:spcAft>
-                <a:spcPts val="800"/>
-              </a:spcAft>
-              <a:buSzPct val="100000"/>
-              <a:buChar char="•"/>
-            </a:pPr>
-            <a:r>
-              <a:rPr lang="en-US" sz="1400" dirty="0">
-                <a:solidFill>
-                  <a:schemeClr val="tx1"/>
-                </a:solidFill>
-              </a:rPr>
-              <a:t>QR only; NFC not yet</a:t>
-            </a:r>
-            <a:endParaRPr lang="en-US" sz="1400" dirty="0"/>
-          </a:p>
-          <a:p>
-            <a:pPr marL="342900" indent="-342900">
-              <a:spcAft>
-                <a:spcPts val="800"/>
-              </a:spcAft>
-              <a:buSzPct val="100000"/>
-              <a:buChar char="•"/>
-            </a:pPr>
-            <a:r>
-              <a:rPr lang="en-US" sz="1400" dirty="0">
-                <a:solidFill>
-                  <a:schemeClr val="tx1"/>
-                </a:solidFill>
-              </a:rPr>
-              <a:t>Phone-number sign-up off (Privy SMS for Nigeria)</a:t>
-            </a:r>
-            <a:endParaRPr lang="en-US" sz="1400" dirty="0"/>
-          </a:p>
-          <a:p>
-            <a:pPr marL="342900" indent="-342900">
-              <a:spcAft>
-                <a:spcPts val="800"/>
-              </a:spcAft>
-              <a:buSzPct val="100000"/>
-              <a:buChar char="•"/>
-            </a:pPr>
-            <a:r>
-              <a:rPr lang="en-US" sz="1400" dirty="0">
-                <a:solidFill>
-                  <a:schemeClr val="tx1"/>
-                </a:solidFill>
-              </a:rPr>
-              <a:t>No naira price feed: paj.cash's rate, or a fixed one</a:t>
-            </a:r>
-            <a:endParaRPr lang="en-US" sz="1400" dirty="0"/>
-          </a:p>
-        </p:txBody>
-      </p:sp>
-      <p:sp>
-        <p:nvSpPr>
-          <p:cNvPr id="13" name="Text 11"/>
-          <p:cNvSpPr txBox="1"/>
-          <p:nvPr/>
-        </p:nvSpPr>
-        <p:spPr>
-          <a:xfrm>
-            <a:off x="548640" y="5943600"/>
-            <a:ext cx="10972800" cy="320040"/>
-          </a:xfrm>
-          <a:prstGeom prst="rect">
-            <a:avLst/>
-          </a:prstGeom>
-          <a:noFill/>
-          <a:ln/>
-        </p:spPr>
-        <p:txBody>
-          <a:bodyPr wrap="square" lIns="0" tIns="0" rIns="0" bIns="0" rtlCol="0" anchor="t"/>
-          <a:lstStyle/>
-          <a:p>
-            <a:pPr indent="0" marL="0">
-              <a:buNone/>
-            </a:pPr>
-            <a:r>
-              <a:rPr lang="en-US" sz="1200" b="1" dirty="0">
-                <a:solidFill>
-                  <a:schemeClr val="accent1"/>
-                </a:solidFill>
-              </a:rPr>
-              <a:t>Repo: github.com/Udoka-AM/nelo   ·   Video: [link]</a:t>
-            </a:r>
-            <a:endParaRPr lang="en-US" sz="1200" dirty="0"/>
+              <a:t>paj.cash and its peers already have merchants and want volume.</a:t>
+            </a:r>
+            <a:endParaRPr lang="en-US" sz="1500" dirty="0"/>
           </a:p>
         </p:txBody>
       </p:sp>
@@ -5077,7 +4989,7 @@
                   <a:schemeClr val="accent1"/>
                 </a:solidFill>
               </a:rPr>
-              <a:t>ROADMAP</a:t>
+              <a:t>WHAT ACTUALLY RAN</a:t>
             </a:r>
             <a:endParaRPr lang="en-US" sz="1200" dirty="0"/>
           </a:p>
@@ -5115,7 +5027,7 @@
                   <a:schemeClr val="tx1"/>
                 </a:solidFill>
               </a:rPr>
-              <a:t>Ninety days after the hackathon</a:t>
+              <a:t>What is live, what is on devnet, and what is declared</a:t>
             </a:r>
             <a:endParaRPr lang="en-US" sz="3000" dirty="0"/>
           </a:p>
@@ -5123,440 +5035,18 @@
       </p:sp>
       <p:sp>
         <p:nvSpPr>
-          <p:cNvPr id="4" name="Shape 2"/>
+          <p:cNvPr id="4" name="column"/>
           <p:cNvSpPr/>
           <p:nvPr/>
         </p:nvSpPr>
         <p:spPr>
           <a:xfrm>
-            <a:off x="868680" y="2377440"/>
-            <a:ext cx="10424160" cy="0"/>
-          </a:xfrm>
-          <a:prstGeom prst="line">
-            <a:avLst/>
-          </a:prstGeom>
-          <a:noFill/>
-          <a:ln w="25400">
-            <a:solidFill>
-              <a:srgbClr val="A9D8C2"/>
-            </a:solidFill>
-            <a:prstDash val="solid"/>
-          </a:ln>
-        </p:spPr>
-      </p:sp>
-      <p:sp>
-        <p:nvSpPr>
-          <p:cNvPr id="5" name="Shape 3"/>
-          <p:cNvSpPr/>
-          <p:nvPr/>
-        </p:nvSpPr>
-        <p:spPr>
-          <a:xfrm>
-            <a:off x="685800" y="2194560"/>
-            <a:ext cx="365760" cy="365760"/>
-          </a:xfrm>
-          <a:prstGeom prst="ellipse">
-            <a:avLst/>
-          </a:prstGeom>
-          <a:solidFill>
-            <a:schemeClr val="accent1"/>
-          </a:solidFill>
-          <a:ln w="38100">
-            <a:solidFill>
-              <a:srgbClr val="FFFFFF"/>
-            </a:solidFill>
-            <a:prstDash val="solid"/>
-          </a:ln>
-        </p:spPr>
-      </p:sp>
-      <p:sp>
-        <p:nvSpPr>
-          <p:cNvPr id="6" name="Text 4"/>
-          <p:cNvSpPr txBox="1"/>
-          <p:nvPr/>
-        </p:nvSpPr>
-        <p:spPr>
-          <a:xfrm>
-            <a:off x="548640" y="2788920"/>
-            <a:ext cx="3474720" cy="320040"/>
-          </a:xfrm>
-          <a:prstGeom prst="rect">
-            <a:avLst/>
-          </a:prstGeom>
-          <a:noFill/>
-          <a:ln/>
-        </p:spPr>
-        <p:txBody>
-          <a:bodyPr wrap="square" lIns="0" tIns="0" rIns="0" bIns="0" rtlCol="0" anchor="t"/>
-          <a:lstStyle/>
-          <a:p>
-            <a:pPr indent="0" marL="0">
-              <a:buNone/>
-            </a:pPr>
-            <a:r>
-              <a:rPr lang="en-US" sz="1200" b="1" spc="200" kern="0" dirty="0">
-                <a:solidFill>
-                  <a:schemeClr val="accent1"/>
-                </a:solidFill>
-              </a:rPr>
-              <a:t>DAYS 0–30</a:t>
-            </a:r>
-            <a:endParaRPr lang="en-US" sz="1200" dirty="0"/>
-          </a:p>
-        </p:txBody>
-      </p:sp>
-      <p:sp>
-        <p:nvSpPr>
-          <p:cNvPr id="7" name="Text 5"/>
-          <p:cNvSpPr txBox="1"/>
-          <p:nvPr/>
-        </p:nvSpPr>
-        <p:spPr>
-          <a:xfrm>
-            <a:off x="548640" y="3154680"/>
-            <a:ext cx="3474720" cy="457200"/>
-          </a:xfrm>
-          <a:prstGeom prst="rect">
-            <a:avLst/>
-          </a:prstGeom>
-          <a:noFill/>
-          <a:ln/>
-        </p:spPr>
-        <p:txBody>
-          <a:bodyPr wrap="square" lIns="0" tIns="0" rIns="0" bIns="0" rtlCol="0" anchor="t"/>
-          <a:lstStyle/>
-          <a:p>
-            <a:pPr indent="0" marL="0">
-              <a:buNone/>
-            </a:pPr>
-            <a:r>
-              <a:rPr lang="en-US" sz="2100" b="1" dirty="0">
-                <a:solidFill>
-                  <a:schemeClr val="tx1"/>
-                </a:solidFill>
-              </a:rPr>
-              <a:t>Go live in one market</a:t>
-            </a:r>
-            <a:endParaRPr lang="en-US" sz="2100" dirty="0"/>
-          </a:p>
-        </p:txBody>
-      </p:sp>
-      <p:sp>
-        <p:nvSpPr>
-          <p:cNvPr id="8" name="Text 6"/>
-          <p:cNvSpPr txBox="1"/>
-          <p:nvPr/>
-        </p:nvSpPr>
-        <p:spPr>
-          <a:xfrm>
-            <a:off x="548640" y="3657600"/>
-            <a:ext cx="3291840" cy="1463040"/>
-          </a:xfrm>
-          <a:prstGeom prst="rect">
-            <a:avLst/>
-          </a:prstGeom>
-          <a:noFill/>
-          <a:ln/>
-        </p:spPr>
-        <p:txBody>
-          <a:bodyPr wrap="square" lIns="0" tIns="0" rIns="0" bIns="0" rtlCol="0" anchor="t"/>
-          <a:lstStyle/>
-          <a:p>
-            <a:pPr indent="0" marL="0">
-              <a:buNone/>
-            </a:pPr>
-            <a:r>
-              <a:rPr lang="en-US" sz="1500" dirty="0">
-                <a:solidFill>
-                  <a:schemeClr val="tx1"/>
-                </a:solidFill>
-              </a:rPr>
-              <a:t>dApp Store listing. Fifty merchants trading daily in one cluster, cashing out through paj.cash.</a:t>
-            </a:r>
-            <a:endParaRPr lang="en-US" sz="1500" dirty="0"/>
-          </a:p>
-        </p:txBody>
-      </p:sp>
-      <p:sp>
-        <p:nvSpPr>
-          <p:cNvPr id="9" name="Shape 7"/>
-          <p:cNvSpPr/>
-          <p:nvPr/>
-        </p:nvSpPr>
-        <p:spPr>
-          <a:xfrm>
-            <a:off x="4434840" y="2194560"/>
-            <a:ext cx="365760" cy="365760"/>
-          </a:xfrm>
-          <a:prstGeom prst="ellipse">
-            <a:avLst/>
-          </a:prstGeom>
-          <a:solidFill>
-            <a:schemeClr val="accent1"/>
-          </a:solidFill>
-          <a:ln w="38100">
-            <a:solidFill>
-              <a:srgbClr val="FFFFFF"/>
-            </a:solidFill>
-            <a:prstDash val="solid"/>
-          </a:ln>
-        </p:spPr>
-      </p:sp>
-      <p:sp>
-        <p:nvSpPr>
-          <p:cNvPr id="10" name="Text 8"/>
-          <p:cNvSpPr txBox="1"/>
-          <p:nvPr/>
-        </p:nvSpPr>
-        <p:spPr>
-          <a:xfrm>
-            <a:off x="4297680" y="2788920"/>
-            <a:ext cx="3474720" cy="320040"/>
-          </a:xfrm>
-          <a:prstGeom prst="rect">
-            <a:avLst/>
-          </a:prstGeom>
-          <a:noFill/>
-          <a:ln/>
-        </p:spPr>
-        <p:txBody>
-          <a:bodyPr wrap="square" lIns="0" tIns="0" rIns="0" bIns="0" rtlCol="0" anchor="t"/>
-          <a:lstStyle/>
-          <a:p>
-            <a:pPr indent="0" marL="0">
-              <a:buNone/>
-            </a:pPr>
-            <a:r>
-              <a:rPr lang="en-US" sz="1200" b="1" spc="200" kern="0" dirty="0">
-                <a:solidFill>
-                  <a:schemeClr val="accent1"/>
-                </a:solidFill>
-              </a:rPr>
-              <a:t>DAYS 30–60</a:t>
-            </a:r>
-            <a:endParaRPr lang="en-US" sz="1200" dirty="0"/>
-          </a:p>
-        </p:txBody>
-      </p:sp>
-      <p:sp>
-        <p:nvSpPr>
-          <p:cNvPr id="11" name="Text 9"/>
-          <p:cNvSpPr txBox="1"/>
-          <p:nvPr/>
-        </p:nvSpPr>
-        <p:spPr>
-          <a:xfrm>
-            <a:off x="4297680" y="3154680"/>
-            <a:ext cx="3474720" cy="457200"/>
-          </a:xfrm>
-          <a:prstGeom prst="rect">
-            <a:avLst/>
-          </a:prstGeom>
-          <a:noFill/>
-          <a:ln/>
-        </p:spPr>
-        <p:txBody>
-          <a:bodyPr wrap="square" lIns="0" tIns="0" rIns="0" bIns="0" rtlCol="0" anchor="t"/>
-          <a:lstStyle/>
-          <a:p>
-            <a:pPr indent="0" marL="0">
-              <a:buNone/>
-            </a:pPr>
-            <a:r>
-              <a:rPr lang="en-US" sz="2100" b="1" dirty="0">
-                <a:solidFill>
-                  <a:schemeClr val="tx1"/>
-                </a:solidFill>
-              </a:rPr>
-              <a:t>Harden and measure</a:t>
-            </a:r>
-            <a:endParaRPr lang="en-US" sz="2100" dirty="0"/>
-          </a:p>
-        </p:txBody>
-      </p:sp>
-      <p:sp>
-        <p:nvSpPr>
-          <p:cNvPr id="12" name="Text 10"/>
-          <p:cNvSpPr txBox="1"/>
-          <p:nvPr/>
-        </p:nvSpPr>
-        <p:spPr>
-          <a:xfrm>
-            <a:off x="4297680" y="3657600"/>
-            <a:ext cx="3291840" cy="1463040"/>
-          </a:xfrm>
-          <a:prstGeom prst="rect">
-            <a:avLst/>
-          </a:prstGeom>
-          <a:noFill/>
-          <a:ln/>
-        </p:spPr>
-        <p:txBody>
-          <a:bodyPr wrap="square" lIns="0" tIns="0" rIns="0" bIns="0" rtlCol="0" anchor="t"/>
-          <a:lstStyle/>
-          <a:p>
-            <a:pPr indent="0" marL="0">
-              <a:buNone/>
-            </a:pPr>
-            <a:r>
-              <a:rPr lang="en-US" sz="1500" dirty="0">
-                <a:solidFill>
-                  <a:schemeClr val="tx1"/>
-                </a:solidFill>
-              </a:rPr>
-              <a:t>Independent audit of the vault program. Move offline payments to mainnet. Reserve model against observed loss.</a:t>
-            </a:r>
-            <a:endParaRPr lang="en-US" sz="1500" dirty="0"/>
-          </a:p>
-        </p:txBody>
-      </p:sp>
-      <p:sp>
-        <p:nvSpPr>
-          <p:cNvPr id="13" name="Shape 11"/>
-          <p:cNvSpPr/>
-          <p:nvPr/>
-        </p:nvSpPr>
-        <p:spPr>
-          <a:xfrm>
-            <a:off x="8183880" y="2194560"/>
-            <a:ext cx="365760" cy="365760"/>
-          </a:xfrm>
-          <a:prstGeom prst="ellipse">
-            <a:avLst/>
-          </a:prstGeom>
-          <a:solidFill>
-            <a:schemeClr val="accent1"/>
-          </a:solidFill>
-          <a:ln w="38100">
-            <a:solidFill>
-              <a:srgbClr val="FFFFFF"/>
-            </a:solidFill>
-            <a:prstDash val="solid"/>
-          </a:ln>
-        </p:spPr>
-      </p:sp>
-      <p:sp>
-        <p:nvSpPr>
-          <p:cNvPr id="14" name="Text 12"/>
-          <p:cNvSpPr txBox="1"/>
-          <p:nvPr/>
-        </p:nvSpPr>
-        <p:spPr>
-          <a:xfrm>
-            <a:off x="8046720" y="2788920"/>
-            <a:ext cx="3474720" cy="320040"/>
-          </a:xfrm>
-          <a:prstGeom prst="rect">
-            <a:avLst/>
-          </a:prstGeom>
-          <a:noFill/>
-          <a:ln/>
-        </p:spPr>
-        <p:txBody>
-          <a:bodyPr wrap="square" lIns="0" tIns="0" rIns="0" bIns="0" rtlCol="0" anchor="t"/>
-          <a:lstStyle/>
-          <a:p>
-            <a:pPr indent="0" marL="0">
-              <a:buNone/>
-            </a:pPr>
-            <a:r>
-              <a:rPr lang="en-US" sz="1200" b="1" spc="200" kern="0" dirty="0">
-                <a:solidFill>
-                  <a:schemeClr val="accent1"/>
-                </a:solidFill>
-              </a:rPr>
-              <a:t>DAYS 60–90</a:t>
-            </a:r>
-            <a:endParaRPr lang="en-US" sz="1200" dirty="0"/>
-          </a:p>
-        </p:txBody>
-      </p:sp>
-      <p:sp>
-        <p:nvSpPr>
-          <p:cNvPr id="15" name="Text 13"/>
-          <p:cNvSpPr txBox="1"/>
-          <p:nvPr/>
-        </p:nvSpPr>
-        <p:spPr>
-          <a:xfrm>
-            <a:off x="8046720" y="3154680"/>
-            <a:ext cx="3474720" cy="457200"/>
-          </a:xfrm>
-          <a:prstGeom prst="rect">
-            <a:avLst/>
-          </a:prstGeom>
-          <a:noFill/>
-          <a:ln/>
-        </p:spPr>
-        <p:txBody>
-          <a:bodyPr wrap="square" lIns="0" tIns="0" rIns="0" bIns="0" rtlCol="0" anchor="t"/>
-          <a:lstStyle/>
-          <a:p>
-            <a:pPr indent="0" marL="0">
-              <a:buNone/>
-            </a:pPr>
-            <a:r>
-              <a:rPr lang="en-US" sz="2100" b="1" dirty="0">
-                <a:solidFill>
-                  <a:schemeClr val="tx1"/>
-                </a:solidFill>
-              </a:rPr>
-              <a:t>Second market</a:t>
-            </a:r>
-            <a:endParaRPr lang="en-US" sz="2100" dirty="0"/>
-          </a:p>
-        </p:txBody>
-      </p:sp>
-      <p:sp>
-        <p:nvSpPr>
-          <p:cNvPr id="16" name="Text 14"/>
-          <p:cNvSpPr txBox="1"/>
-          <p:nvPr/>
-        </p:nvSpPr>
-        <p:spPr>
-          <a:xfrm>
-            <a:off x="8046720" y="3657600"/>
-            <a:ext cx="3291840" cy="1463040"/>
-          </a:xfrm>
-          <a:prstGeom prst="rect">
-            <a:avLst/>
-          </a:prstGeom>
-          <a:noFill/>
-          <a:ln/>
-        </p:spPr>
-        <p:txBody>
-          <a:bodyPr wrap="square" lIns="0" tIns="0" rIns="0" bIns="0" rtlCol="0" anchor="t"/>
-          <a:lstStyle/>
-          <a:p>
-            <a:pPr indent="0" marL="0">
-              <a:buNone/>
-            </a:pPr>
-            <a:r>
-              <a:rPr lang="en-US" sz="1500" dirty="0">
-                <a:solidFill>
-                  <a:schemeClr val="tx1"/>
-                </a:solidFill>
-              </a:rPr>
-              <a:t>A second currency, to prove a new country is a payout partner and a price feed, not a rebuild.</a:t>
-            </a:r>
-            <a:endParaRPr lang="en-US" sz="1500" dirty="0"/>
-          </a:p>
-        </p:txBody>
-      </p:sp>
-      <p:sp>
-        <p:nvSpPr>
-          <p:cNvPr id="17" name="dependency"/>
-          <p:cNvSpPr/>
-          <p:nvPr/>
-        </p:nvSpPr>
-        <p:spPr>
-          <a:xfrm>
-            <a:off x="548640" y="5166360"/>
-            <a:ext cx="11064240" cy="731520"/>
+            <a:off x="548640" y="1874520"/>
+            <a:ext cx="3474720" cy="3977640"/>
           </a:xfrm>
           <a:prstGeom prst="roundRect">
             <a:avLst>
-              <a:gd name="adj" fmla="val 15000"/>
+              <a:gd name="adj" fmla="val 3158"/>
             </a:avLst>
           </a:prstGeom>
           <a:solidFill>
@@ -5567,37 +5057,471 @@
       </p:sp>
       <p:sp>
         <p:nvSpPr>
-          <p:cNvPr id="18" name="Text 16"/>
+          <p:cNvPr id="5" name="Text 3"/>
           <p:cNvSpPr txBox="1"/>
           <p:nvPr/>
         </p:nvSpPr>
         <p:spPr>
           <a:xfrm>
-            <a:off x="822960" y="5257800"/>
-            <a:ext cx="10515600" cy="548640"/>
-          </a:xfrm>
-          <a:prstGeom prst="rect">
-            <a:avLst/>
-          </a:prstGeom>
-          <a:noFill/>
-          <a:ln/>
-        </p:spPr>
-        <p:txBody>
-          <a:bodyPr wrap="square" lIns="0" tIns="0" rIns="0" bIns="0" rtlCol="0" anchor="ctr"/>
+            <a:off x="822960" y="2057400"/>
+            <a:ext cx="2926080" cy="457200"/>
+          </a:xfrm>
+          <a:prstGeom prst="rect">
+            <a:avLst/>
+          </a:prstGeom>
+          <a:noFill/>
+          <a:ln/>
+        </p:spPr>
+        <p:txBody>
+          <a:bodyPr wrap="square" lIns="0" tIns="0" rIns="0" bIns="0" rtlCol="0" anchor="t"/>
           <a:lstStyle/>
           <a:p>
             <a:pPr indent="0" marL="0">
               <a:buNone/>
             </a:pPr>
             <a:r>
-              <a:rPr lang="en-US" sz="1500" b="1" dirty="0">
+              <a:rPr lang="en-US" sz="2000" b="1" dirty="0">
+                <a:solidFill>
+                  <a:srgbClr val="1A6B4C"/>
+                </a:solidFill>
+              </a:rPr>
+              <a:t>Live</a:t>
+            </a:r>
+            <a:endParaRPr lang="en-US" sz="2000" dirty="0"/>
+          </a:p>
+        </p:txBody>
+      </p:sp>
+      <p:sp>
+        <p:nvSpPr>
+          <p:cNvPr id="6" name="Text 4"/>
+          <p:cNvSpPr txBox="1"/>
+          <p:nvPr/>
+        </p:nvSpPr>
+        <p:spPr>
+          <a:xfrm>
+            <a:off x="822960" y="2606040"/>
+            <a:ext cx="2971800" cy="3108960"/>
+          </a:xfrm>
+          <a:prstGeom prst="rect">
+            <a:avLst/>
+          </a:prstGeom>
+          <a:noFill/>
+          <a:ln/>
+        </p:spPr>
+        <p:txBody>
+          <a:bodyPr wrap="square" lIns="0" tIns="0" rIns="0" bIns="0" rtlCol="0" anchor="t"/>
+          <a:lstStyle/>
+          <a:p>
+            <a:pPr marL="342900" indent="-342900">
+              <a:spcAft>
+                <a:spcPts val="800"/>
+              </a:spcAft>
+              <a:buSzPct val="100000"/>
+              <a:buChar char="•"/>
+            </a:pPr>
+            <a:r>
+              <a:rPr lang="en-US" sz="1400" dirty="0">
+                <a:solidFill>
+                  <a:schemeClr val="tx1"/>
+                </a:solidFill>
+              </a:rPr>
+              <a:t>Cash-out on Solana mainnet, paid to a Nigerian bank by paj.cash</a:t>
+            </a:r>
+            <a:endParaRPr lang="en-US" sz="1400" dirty="0"/>
+          </a:p>
+          <a:p>
+            <a:pPr marL="342900" indent="-342900">
+              <a:spcAft>
+                <a:spcPts val="800"/>
+              </a:spcAft>
+              <a:buSzPct val="100000"/>
+              <a:buChar char="•"/>
+            </a:pPr>
+            <a:r>
+              <a:rPr lang="en-US" sz="1400" dirty="0">
+                <a:solidFill>
+                  <a:schemeClr val="tx1"/>
+                </a:solidFill>
+              </a:rPr>
+              <a:t>Signed release APKs for the till and the payer app</a:t>
+            </a:r>
+            <a:endParaRPr lang="en-US" sz="1400" dirty="0"/>
+          </a:p>
+          <a:p>
+            <a:pPr marL="342900" indent="-342900">
+              <a:spcAft>
+                <a:spcPts val="800"/>
+              </a:spcAft>
+              <a:buSzPct val="100000"/>
+              <a:buChar char="•"/>
+            </a:pPr>
+            <a:r>
+              <a:rPr lang="en-US" sz="1400" dirty="0">
+                <a:solidFill>
+                  <a:schemeClr val="tx1"/>
+                </a:solidFill>
+              </a:rPr>
+              <a:t>Mobile Wallet Adapter for every merchant signature</a:t>
+            </a:r>
+            <a:endParaRPr lang="en-US" sz="1400" dirty="0"/>
+          </a:p>
+          <a:p>
+            <a:pPr marL="342900" indent="-342900">
+              <a:spcAft>
+                <a:spcPts val="800"/>
+              </a:spcAft>
+              <a:buSzPct val="100000"/>
+              <a:buChar char="•"/>
+            </a:pPr>
+            <a:r>
+              <a:rPr lang="en-US" sz="1400" dirty="0">
+                <a:solidFill>
+                  <a:schemeClr val="tx1"/>
+                </a:solidFill>
+              </a:rPr>
+              <a:t>paj.cash's live naira rate on the till</a:t>
+            </a:r>
+            <a:endParaRPr lang="en-US" sz="1400" dirty="0"/>
+          </a:p>
+        </p:txBody>
+      </p:sp>
+      <p:sp>
+        <p:nvSpPr>
+          <p:cNvPr id="7" name="column"/>
+          <p:cNvSpPr/>
+          <p:nvPr/>
+        </p:nvSpPr>
+        <p:spPr>
+          <a:xfrm>
+            <a:off x="4297680" y="1874520"/>
+            <a:ext cx="3474720" cy="3977640"/>
+          </a:xfrm>
+          <a:prstGeom prst="roundRect">
+            <a:avLst>
+              <a:gd name="adj" fmla="val 3158"/>
+            </a:avLst>
+          </a:prstGeom>
+          <a:solidFill>
+            <a:srgbClr val="EEF5F1"/>
+          </a:solidFill>
+          <a:ln/>
+        </p:spPr>
+      </p:sp>
+      <p:sp>
+        <p:nvSpPr>
+          <p:cNvPr id="8" name="Text 6"/>
+          <p:cNvSpPr txBox="1"/>
+          <p:nvPr/>
+        </p:nvSpPr>
+        <p:spPr>
+          <a:xfrm>
+            <a:off x="4572000" y="2057400"/>
+            <a:ext cx="2926080" cy="457200"/>
+          </a:xfrm>
+          <a:prstGeom prst="rect">
+            <a:avLst/>
+          </a:prstGeom>
+          <a:noFill/>
+          <a:ln/>
+        </p:spPr>
+        <p:txBody>
+          <a:bodyPr wrap="square" lIns="0" tIns="0" rIns="0" bIns="0" rtlCol="0" anchor="t"/>
+          <a:lstStyle/>
+          <a:p>
+            <a:pPr indent="0" marL="0">
+              <a:buNone/>
+            </a:pPr>
+            <a:r>
+              <a:rPr lang="en-US" sz="2000" b="1" dirty="0">
+                <a:solidFill>
+                  <a:srgbClr val="6B7A74"/>
+                </a:solidFill>
+              </a:rPr>
+              <a:t>On devnet</a:t>
+            </a:r>
+            <a:endParaRPr lang="en-US" sz="2000" dirty="0"/>
+          </a:p>
+        </p:txBody>
+      </p:sp>
+      <p:sp>
+        <p:nvSpPr>
+          <p:cNvPr id="9" name="Text 7"/>
+          <p:cNvSpPr txBox="1"/>
+          <p:nvPr/>
+        </p:nvSpPr>
+        <p:spPr>
+          <a:xfrm>
+            <a:off x="4572000" y="2606040"/>
+            <a:ext cx="2971800" cy="3108960"/>
+          </a:xfrm>
+          <a:prstGeom prst="rect">
+            <a:avLst/>
+          </a:prstGeom>
+          <a:noFill/>
+          <a:ln/>
+        </p:spPr>
+        <p:txBody>
+          <a:bodyPr wrap="square" lIns="0" tIns="0" rIns="0" bIns="0" rtlCol="0" anchor="t"/>
+          <a:lstStyle/>
+          <a:p>
+            <a:pPr marL="342900" indent="-342900">
+              <a:spcAft>
+                <a:spcPts val="800"/>
+              </a:spcAft>
+              <a:buSzPct val="100000"/>
+              <a:buChar char="•"/>
+            </a:pPr>
+            <a:r>
+              <a:rPr lang="en-US" sz="1400" dirty="0">
+                <a:solidFill>
+                  <a:schemeClr val="tx1"/>
+                </a:solidFill>
+              </a:rPr>
+              <a:t>Vault program: secure-chip signatures verified on chain</a:t>
+            </a:r>
+            <a:endParaRPr lang="en-US" sz="1400" dirty="0"/>
+          </a:p>
+          <a:p>
+            <a:pPr marL="342900" indent="-342900">
+              <a:spcAft>
+                <a:spcPts val="800"/>
+              </a:spcAft>
+              <a:buSzPct val="100000"/>
+              <a:buChar char="•"/>
+            </a:pPr>
+            <a:r>
+              <a:rPr lang="en-US" sz="1400" dirty="0">
+                <a:solidFill>
+                  <a:schemeClr val="tx1"/>
+                </a:solidFill>
+              </a:rPr>
+              <a:t>Offline sale, both phones in airplane mode, settled on reconnect</a:t>
+            </a:r>
+            <a:endParaRPr lang="en-US" sz="1400" dirty="0"/>
+          </a:p>
+          <a:p>
+            <a:pPr marL="342900" indent="-342900">
+              <a:spcAft>
+                <a:spcPts val="800"/>
+              </a:spcAft>
+              <a:buSzPct val="100000"/>
+              <a:buChar char="•"/>
+            </a:pPr>
+            <a:r>
+              <a:rPr lang="en-US" sz="1400" dirty="0">
+                <a:solidFill>
+                  <a:schemeClr val="tx1"/>
+                </a:solidFill>
+              </a:rPr>
+              <a:t>Replay refused; forged double spend freezes the vault</a:t>
+            </a:r>
+            <a:endParaRPr lang="en-US" sz="1400" dirty="0"/>
+          </a:p>
+          <a:p>
+            <a:pPr marL="342900" indent="-342900">
+              <a:spcAft>
+                <a:spcPts val="800"/>
+              </a:spcAft>
+              <a:buSzPct val="100000"/>
+              <a:buChar char="•"/>
+            </a:pPr>
+            <a:r>
+              <a:rPr lang="en-US" sz="1400" dirty="0">
+                <a:solidFill>
+                  <a:schemeClr val="tx1"/>
+                </a:solidFill>
+              </a:rPr>
+              <a:t>anchor test green: 40 of 40</a:t>
+            </a:r>
+            <a:endParaRPr lang="en-US" sz="1400" dirty="0"/>
+          </a:p>
+        </p:txBody>
+      </p:sp>
+      <p:sp>
+        <p:nvSpPr>
+          <p:cNvPr id="10" name="column"/>
+          <p:cNvSpPr/>
+          <p:nvPr/>
+        </p:nvSpPr>
+        <p:spPr>
+          <a:xfrm>
+            <a:off x="8046720" y="1874520"/>
+            <a:ext cx="3474720" cy="3977640"/>
+          </a:xfrm>
+          <a:prstGeom prst="roundRect">
+            <a:avLst>
+              <a:gd name="adj" fmla="val 3158"/>
+            </a:avLst>
+          </a:prstGeom>
+          <a:solidFill>
+            <a:srgbClr val="EEF5F1"/>
+          </a:solidFill>
+          <a:ln/>
+        </p:spPr>
+      </p:sp>
+      <p:sp>
+        <p:nvSpPr>
+          <p:cNvPr id="11" name="Text 9"/>
+          <p:cNvSpPr txBox="1"/>
+          <p:nvPr/>
+        </p:nvSpPr>
+        <p:spPr>
+          <a:xfrm>
+            <a:off x="8321040" y="2057400"/>
+            <a:ext cx="2926080" cy="457200"/>
+          </a:xfrm>
+          <a:prstGeom prst="rect">
+            <a:avLst/>
+          </a:prstGeom>
+          <a:noFill/>
+          <a:ln/>
+        </p:spPr>
+        <p:txBody>
+          <a:bodyPr wrap="square" lIns="0" tIns="0" rIns="0" bIns="0" rtlCol="0" anchor="t"/>
+          <a:lstStyle/>
+          <a:p>
+            <a:pPr indent="0" marL="0">
+              <a:buNone/>
+            </a:pPr>
+            <a:r>
+              <a:rPr lang="en-US" sz="2000" b="1" dirty="0">
+                <a:solidFill>
+                  <a:srgbClr val="D4855E"/>
+                </a:solidFill>
+              </a:rPr>
+              <a:t>Declared stubs</a:t>
+            </a:r>
+            <a:endParaRPr lang="en-US" sz="2000" dirty="0"/>
+          </a:p>
+        </p:txBody>
+      </p:sp>
+      <p:sp>
+        <p:nvSpPr>
+          <p:cNvPr id="12" name="Text 10"/>
+          <p:cNvSpPr txBox="1"/>
+          <p:nvPr/>
+        </p:nvSpPr>
+        <p:spPr>
+          <a:xfrm>
+            <a:off x="8321040" y="2606040"/>
+            <a:ext cx="2971800" cy="3108960"/>
+          </a:xfrm>
+          <a:prstGeom prst="rect">
+            <a:avLst/>
+          </a:prstGeom>
+          <a:noFill/>
+          <a:ln/>
+        </p:spPr>
+        <p:txBody>
+          <a:bodyPr wrap="square" lIns="0" tIns="0" rIns="0" bIns="0" rtlCol="0" anchor="t"/>
+          <a:lstStyle/>
+          <a:p>
+            <a:pPr marL="342900" indent="-342900">
+              <a:spcAft>
+                <a:spcPts val="800"/>
+              </a:spcAft>
+              <a:buSzPct val="100000"/>
+              <a:buChar char="•"/>
+            </a:pPr>
+            <a:r>
+              <a:rPr lang="en-US" sz="1400" dirty="0">
+                <a:solidFill>
+                  <a:schemeClr val="tx1"/>
+                </a:solidFill>
+              </a:rPr>
+              <a:t>Rebate payout and the SKR premium (≈1.001×)</a:t>
+            </a:r>
+            <a:endParaRPr lang="en-US" sz="1400" dirty="0"/>
+          </a:p>
+          <a:p>
+            <a:pPr marL="342900" indent="-342900">
+              <a:spcAft>
+                <a:spcPts val="800"/>
+              </a:spcAft>
+              <a:buSzPct val="100000"/>
+              <a:buChar char="•"/>
+            </a:pPr>
+            <a:r>
+              <a:rPr lang="en-US" sz="1400" dirty="0">
+                <a:solidFill>
+                  <a:schemeClr val="tx1"/>
+                </a:solidFill>
+              </a:rPr>
+              <a:t>QR only; NFC not yet</a:t>
+            </a:r>
+            <a:endParaRPr lang="en-US" sz="1400" dirty="0"/>
+          </a:p>
+          <a:p>
+            <a:pPr marL="342900" indent="-342900">
+              <a:spcAft>
+                <a:spcPts val="800"/>
+              </a:spcAft>
+              <a:buSzPct val="100000"/>
+              <a:buChar char="•"/>
+            </a:pPr>
+            <a:r>
+              <a:rPr lang="en-US" sz="1400" dirty="0">
+                <a:solidFill>
+                  <a:schemeClr val="tx1"/>
+                </a:solidFill>
+              </a:rPr>
+              <a:t>Phone-number sign-up off (Privy SMS for Nigeria)</a:t>
+            </a:r>
+            <a:endParaRPr lang="en-US" sz="1400" dirty="0"/>
+          </a:p>
+          <a:p>
+            <a:pPr marL="342900" indent="-342900">
+              <a:spcAft>
+                <a:spcPts val="800"/>
+              </a:spcAft>
+              <a:buSzPct val="100000"/>
+              <a:buChar char="•"/>
+            </a:pPr>
+            <a:r>
+              <a:rPr lang="en-US" sz="1400" dirty="0">
+                <a:solidFill>
+                  <a:schemeClr val="tx1"/>
+                </a:solidFill>
+              </a:rPr>
+              <a:t>No naira price feed: paj.cash's rate, or a fixed one</a:t>
+            </a:r>
+            <a:endParaRPr lang="en-US" sz="1400" dirty="0"/>
+          </a:p>
+        </p:txBody>
+      </p:sp>
+      <p:sp>
+        <p:nvSpPr>
+          <p:cNvPr id="13" name="Text 11"/>
+          <p:cNvSpPr txBox="1"/>
+          <p:nvPr/>
+        </p:nvSpPr>
+        <p:spPr>
+          <a:xfrm>
+            <a:off x="548640" y="5943600"/>
+            <a:ext cx="10972800" cy="320040"/>
+          </a:xfrm>
+          <a:prstGeom prst="rect">
+            <a:avLst/>
+          </a:prstGeom>
+          <a:noFill/>
+          <a:ln/>
+        </p:spPr>
+        <p:txBody>
+          <a:bodyPr wrap="square" lIns="0" tIns="0" rIns="0" bIns="0" rtlCol="0" anchor="t"/>
+          <a:lstStyle/>
+          <a:p>
+            <a:pPr indent="0" marL="0">
+              <a:buNone/>
+            </a:pPr>
+            <a:r>
+              <a:rPr lang="en-US" sz="1200" b="1" dirty="0">
                 <a:solidFill>
                   <a:schemeClr val="accent1"/>
                 </a:solidFill>
               </a:rPr>
-              <a:t>The payout partner was the one blocking dependency. With paj.cash live, the rest of the stack is open or self-serve.</a:t>
-            </a:r>
-            <a:endParaRPr lang="en-US" sz="1500" dirty="0"/>
+              <a:t>Repo: github.com/Udoka-AM/nelo   ·   Video: [link]</a:t>
+            </a:r>
+            <a:endParaRPr lang="en-US" sz="1200" dirty="0"/>
           </a:p>
         </p:txBody>
       </p:sp>
@@ -5700,6 +5624,632 @@
             <a:r>
               <a:rPr lang="en-US" sz="1200" b="1" spc="300" kern="0" dirty="0">
                 <a:solidFill>
+                  <a:schemeClr val="accent1"/>
+                </a:solidFill>
+              </a:rPr>
+              <a:t>ROADMAP</a:t>
+            </a:r>
+            <a:endParaRPr lang="en-US" sz="1200" dirty="0"/>
+          </a:p>
+        </p:txBody>
+      </p:sp>
+      <p:sp>
+        <p:nvSpPr>
+          <p:cNvPr id="3" name="Text 0"/>
+          <p:cNvSpPr/>
+          <p:nvPr>
+            <p:ph idx="101" type="title" hasCustomPrompt="1"/>
+          </p:nvPr>
+        </p:nvSpPr>
+        <p:spPr>
+          <a:xfrm>
+            <a:off x="548640" y="777240"/>
+            <a:ext cx="11064240" cy="914400"/>
+          </a:xfrm>
+          <a:prstGeom prst="rect">
+            <a:avLst/>
+          </a:prstGeom>
+          <a:noFill/>
+          <a:ln/>
+        </p:spPr>
+        <p:txBody>
+          <a:bodyPr wrap="square" lIns="0" tIns="0" rIns="0" bIns="0" rtlCol="0" anchor="t"/>
+          <a:lstStyle/>
+          <a:p>
+            <a:pPr algn="l" indent="0" marL="0">
+              <a:buNone/>
+            </a:pPr>
+            <a:r>
+              <a:rPr lang="en-US" sz="3000" b="1" dirty="0">
+                <a:solidFill>
+                  <a:schemeClr val="tx1"/>
+                </a:solidFill>
+              </a:rPr>
+              <a:t>Ninety days after the hackathon</a:t>
+            </a:r>
+            <a:endParaRPr lang="en-US" sz="3000" dirty="0"/>
+          </a:p>
+        </p:txBody>
+      </p:sp>
+      <p:sp>
+        <p:nvSpPr>
+          <p:cNvPr id="4" name="Shape 2"/>
+          <p:cNvSpPr/>
+          <p:nvPr/>
+        </p:nvSpPr>
+        <p:spPr>
+          <a:xfrm>
+            <a:off x="868680" y="2377440"/>
+            <a:ext cx="10424160" cy="0"/>
+          </a:xfrm>
+          <a:prstGeom prst="line">
+            <a:avLst/>
+          </a:prstGeom>
+          <a:noFill/>
+          <a:ln w="25400">
+            <a:solidFill>
+              <a:srgbClr val="A9D8C2"/>
+            </a:solidFill>
+            <a:prstDash val="solid"/>
+          </a:ln>
+        </p:spPr>
+      </p:sp>
+      <p:sp>
+        <p:nvSpPr>
+          <p:cNvPr id="5" name="Shape 3"/>
+          <p:cNvSpPr/>
+          <p:nvPr/>
+        </p:nvSpPr>
+        <p:spPr>
+          <a:xfrm>
+            <a:off x="685800" y="2194560"/>
+            <a:ext cx="365760" cy="365760"/>
+          </a:xfrm>
+          <a:prstGeom prst="ellipse">
+            <a:avLst/>
+          </a:prstGeom>
+          <a:solidFill>
+            <a:schemeClr val="accent1"/>
+          </a:solidFill>
+          <a:ln w="38100">
+            <a:solidFill>
+              <a:srgbClr val="FFFFFF"/>
+            </a:solidFill>
+            <a:prstDash val="solid"/>
+          </a:ln>
+        </p:spPr>
+      </p:sp>
+      <p:sp>
+        <p:nvSpPr>
+          <p:cNvPr id="6" name="Text 4"/>
+          <p:cNvSpPr txBox="1"/>
+          <p:nvPr/>
+        </p:nvSpPr>
+        <p:spPr>
+          <a:xfrm>
+            <a:off x="548640" y="2788920"/>
+            <a:ext cx="3474720" cy="320040"/>
+          </a:xfrm>
+          <a:prstGeom prst="rect">
+            <a:avLst/>
+          </a:prstGeom>
+          <a:noFill/>
+          <a:ln/>
+        </p:spPr>
+        <p:txBody>
+          <a:bodyPr wrap="square" lIns="0" tIns="0" rIns="0" bIns="0" rtlCol="0" anchor="t"/>
+          <a:lstStyle/>
+          <a:p>
+            <a:pPr indent="0" marL="0">
+              <a:buNone/>
+            </a:pPr>
+            <a:r>
+              <a:rPr lang="en-US" sz="1200" b="1" spc="200" kern="0" dirty="0">
+                <a:solidFill>
+                  <a:schemeClr val="accent1"/>
+                </a:solidFill>
+              </a:rPr>
+              <a:t>DAYS 0–30</a:t>
+            </a:r>
+            <a:endParaRPr lang="en-US" sz="1200" dirty="0"/>
+          </a:p>
+        </p:txBody>
+      </p:sp>
+      <p:sp>
+        <p:nvSpPr>
+          <p:cNvPr id="7" name="Text 5"/>
+          <p:cNvSpPr txBox="1"/>
+          <p:nvPr/>
+        </p:nvSpPr>
+        <p:spPr>
+          <a:xfrm>
+            <a:off x="548640" y="3154680"/>
+            <a:ext cx="3474720" cy="457200"/>
+          </a:xfrm>
+          <a:prstGeom prst="rect">
+            <a:avLst/>
+          </a:prstGeom>
+          <a:noFill/>
+          <a:ln/>
+        </p:spPr>
+        <p:txBody>
+          <a:bodyPr wrap="square" lIns="0" tIns="0" rIns="0" bIns="0" rtlCol="0" anchor="t"/>
+          <a:lstStyle/>
+          <a:p>
+            <a:pPr indent="0" marL="0">
+              <a:buNone/>
+            </a:pPr>
+            <a:r>
+              <a:rPr lang="en-US" sz="2100" b="1" dirty="0">
+                <a:solidFill>
+                  <a:schemeClr val="tx1"/>
+                </a:solidFill>
+              </a:rPr>
+              <a:t>Go live in one market</a:t>
+            </a:r>
+            <a:endParaRPr lang="en-US" sz="2100" dirty="0"/>
+          </a:p>
+        </p:txBody>
+      </p:sp>
+      <p:sp>
+        <p:nvSpPr>
+          <p:cNvPr id="8" name="Text 6"/>
+          <p:cNvSpPr txBox="1"/>
+          <p:nvPr/>
+        </p:nvSpPr>
+        <p:spPr>
+          <a:xfrm>
+            <a:off x="548640" y="3657600"/>
+            <a:ext cx="3291840" cy="1463040"/>
+          </a:xfrm>
+          <a:prstGeom prst="rect">
+            <a:avLst/>
+          </a:prstGeom>
+          <a:noFill/>
+          <a:ln/>
+        </p:spPr>
+        <p:txBody>
+          <a:bodyPr wrap="square" lIns="0" tIns="0" rIns="0" bIns="0" rtlCol="0" anchor="t"/>
+          <a:lstStyle/>
+          <a:p>
+            <a:pPr indent="0" marL="0">
+              <a:buNone/>
+            </a:pPr>
+            <a:r>
+              <a:rPr lang="en-US" sz="1500" dirty="0">
+                <a:solidFill>
+                  <a:schemeClr val="tx1"/>
+                </a:solidFill>
+              </a:rPr>
+              <a:t>dApp Store listing. Fifty merchants trading daily in one cluster, cashing out through paj.cash.</a:t>
+            </a:r>
+            <a:endParaRPr lang="en-US" sz="1500" dirty="0"/>
+          </a:p>
+        </p:txBody>
+      </p:sp>
+      <p:sp>
+        <p:nvSpPr>
+          <p:cNvPr id="9" name="Shape 7"/>
+          <p:cNvSpPr/>
+          <p:nvPr/>
+        </p:nvSpPr>
+        <p:spPr>
+          <a:xfrm>
+            <a:off x="4434840" y="2194560"/>
+            <a:ext cx="365760" cy="365760"/>
+          </a:xfrm>
+          <a:prstGeom prst="ellipse">
+            <a:avLst/>
+          </a:prstGeom>
+          <a:solidFill>
+            <a:schemeClr val="accent1"/>
+          </a:solidFill>
+          <a:ln w="38100">
+            <a:solidFill>
+              <a:srgbClr val="FFFFFF"/>
+            </a:solidFill>
+            <a:prstDash val="solid"/>
+          </a:ln>
+        </p:spPr>
+      </p:sp>
+      <p:sp>
+        <p:nvSpPr>
+          <p:cNvPr id="10" name="Text 8"/>
+          <p:cNvSpPr txBox="1"/>
+          <p:nvPr/>
+        </p:nvSpPr>
+        <p:spPr>
+          <a:xfrm>
+            <a:off x="4297680" y="2788920"/>
+            <a:ext cx="3474720" cy="320040"/>
+          </a:xfrm>
+          <a:prstGeom prst="rect">
+            <a:avLst/>
+          </a:prstGeom>
+          <a:noFill/>
+          <a:ln/>
+        </p:spPr>
+        <p:txBody>
+          <a:bodyPr wrap="square" lIns="0" tIns="0" rIns="0" bIns="0" rtlCol="0" anchor="t"/>
+          <a:lstStyle/>
+          <a:p>
+            <a:pPr indent="0" marL="0">
+              <a:buNone/>
+            </a:pPr>
+            <a:r>
+              <a:rPr lang="en-US" sz="1200" b="1" spc="200" kern="0" dirty="0">
+                <a:solidFill>
+                  <a:schemeClr val="accent1"/>
+                </a:solidFill>
+              </a:rPr>
+              <a:t>DAYS 30–60</a:t>
+            </a:r>
+            <a:endParaRPr lang="en-US" sz="1200" dirty="0"/>
+          </a:p>
+        </p:txBody>
+      </p:sp>
+      <p:sp>
+        <p:nvSpPr>
+          <p:cNvPr id="11" name="Text 9"/>
+          <p:cNvSpPr txBox="1"/>
+          <p:nvPr/>
+        </p:nvSpPr>
+        <p:spPr>
+          <a:xfrm>
+            <a:off x="4297680" y="3154680"/>
+            <a:ext cx="3474720" cy="457200"/>
+          </a:xfrm>
+          <a:prstGeom prst="rect">
+            <a:avLst/>
+          </a:prstGeom>
+          <a:noFill/>
+          <a:ln/>
+        </p:spPr>
+        <p:txBody>
+          <a:bodyPr wrap="square" lIns="0" tIns="0" rIns="0" bIns="0" rtlCol="0" anchor="t"/>
+          <a:lstStyle/>
+          <a:p>
+            <a:pPr indent="0" marL="0">
+              <a:buNone/>
+            </a:pPr>
+            <a:r>
+              <a:rPr lang="en-US" sz="2100" b="1" dirty="0">
+                <a:solidFill>
+                  <a:schemeClr val="tx1"/>
+                </a:solidFill>
+              </a:rPr>
+              <a:t>Harden and measure</a:t>
+            </a:r>
+            <a:endParaRPr lang="en-US" sz="2100" dirty="0"/>
+          </a:p>
+        </p:txBody>
+      </p:sp>
+      <p:sp>
+        <p:nvSpPr>
+          <p:cNvPr id="12" name="Text 10"/>
+          <p:cNvSpPr txBox="1"/>
+          <p:nvPr/>
+        </p:nvSpPr>
+        <p:spPr>
+          <a:xfrm>
+            <a:off x="4297680" y="3657600"/>
+            <a:ext cx="3291840" cy="1463040"/>
+          </a:xfrm>
+          <a:prstGeom prst="rect">
+            <a:avLst/>
+          </a:prstGeom>
+          <a:noFill/>
+          <a:ln/>
+        </p:spPr>
+        <p:txBody>
+          <a:bodyPr wrap="square" lIns="0" tIns="0" rIns="0" bIns="0" rtlCol="0" anchor="t"/>
+          <a:lstStyle/>
+          <a:p>
+            <a:pPr indent="0" marL="0">
+              <a:buNone/>
+            </a:pPr>
+            <a:r>
+              <a:rPr lang="en-US" sz="1500" dirty="0">
+                <a:solidFill>
+                  <a:schemeClr val="tx1"/>
+                </a:solidFill>
+              </a:rPr>
+              <a:t>Independent audit of the vault program. Move offline payments to mainnet. Reserve model against observed loss.</a:t>
+            </a:r>
+            <a:endParaRPr lang="en-US" sz="1500" dirty="0"/>
+          </a:p>
+        </p:txBody>
+      </p:sp>
+      <p:sp>
+        <p:nvSpPr>
+          <p:cNvPr id="13" name="Shape 11"/>
+          <p:cNvSpPr/>
+          <p:nvPr/>
+        </p:nvSpPr>
+        <p:spPr>
+          <a:xfrm>
+            <a:off x="8183880" y="2194560"/>
+            <a:ext cx="365760" cy="365760"/>
+          </a:xfrm>
+          <a:prstGeom prst="ellipse">
+            <a:avLst/>
+          </a:prstGeom>
+          <a:solidFill>
+            <a:schemeClr val="accent1"/>
+          </a:solidFill>
+          <a:ln w="38100">
+            <a:solidFill>
+              <a:srgbClr val="FFFFFF"/>
+            </a:solidFill>
+            <a:prstDash val="solid"/>
+          </a:ln>
+        </p:spPr>
+      </p:sp>
+      <p:sp>
+        <p:nvSpPr>
+          <p:cNvPr id="14" name="Text 12"/>
+          <p:cNvSpPr txBox="1"/>
+          <p:nvPr/>
+        </p:nvSpPr>
+        <p:spPr>
+          <a:xfrm>
+            <a:off x="8046720" y="2788920"/>
+            <a:ext cx="3474720" cy="320040"/>
+          </a:xfrm>
+          <a:prstGeom prst="rect">
+            <a:avLst/>
+          </a:prstGeom>
+          <a:noFill/>
+          <a:ln/>
+        </p:spPr>
+        <p:txBody>
+          <a:bodyPr wrap="square" lIns="0" tIns="0" rIns="0" bIns="0" rtlCol="0" anchor="t"/>
+          <a:lstStyle/>
+          <a:p>
+            <a:pPr indent="0" marL="0">
+              <a:buNone/>
+            </a:pPr>
+            <a:r>
+              <a:rPr lang="en-US" sz="1200" b="1" spc="200" kern="0" dirty="0">
+                <a:solidFill>
+                  <a:schemeClr val="accent1"/>
+                </a:solidFill>
+              </a:rPr>
+              <a:t>DAYS 60–90</a:t>
+            </a:r>
+            <a:endParaRPr lang="en-US" sz="1200" dirty="0"/>
+          </a:p>
+        </p:txBody>
+      </p:sp>
+      <p:sp>
+        <p:nvSpPr>
+          <p:cNvPr id="15" name="Text 13"/>
+          <p:cNvSpPr txBox="1"/>
+          <p:nvPr/>
+        </p:nvSpPr>
+        <p:spPr>
+          <a:xfrm>
+            <a:off x="8046720" y="3154680"/>
+            <a:ext cx="3474720" cy="457200"/>
+          </a:xfrm>
+          <a:prstGeom prst="rect">
+            <a:avLst/>
+          </a:prstGeom>
+          <a:noFill/>
+          <a:ln/>
+        </p:spPr>
+        <p:txBody>
+          <a:bodyPr wrap="square" lIns="0" tIns="0" rIns="0" bIns="0" rtlCol="0" anchor="t"/>
+          <a:lstStyle/>
+          <a:p>
+            <a:pPr indent="0" marL="0">
+              <a:buNone/>
+            </a:pPr>
+            <a:r>
+              <a:rPr lang="en-US" sz="2100" b="1" dirty="0">
+                <a:solidFill>
+                  <a:schemeClr val="tx1"/>
+                </a:solidFill>
+              </a:rPr>
+              <a:t>Second market</a:t>
+            </a:r>
+            <a:endParaRPr lang="en-US" sz="2100" dirty="0"/>
+          </a:p>
+        </p:txBody>
+      </p:sp>
+      <p:sp>
+        <p:nvSpPr>
+          <p:cNvPr id="16" name="Text 14"/>
+          <p:cNvSpPr txBox="1"/>
+          <p:nvPr/>
+        </p:nvSpPr>
+        <p:spPr>
+          <a:xfrm>
+            <a:off x="8046720" y="3657600"/>
+            <a:ext cx="3291840" cy="1463040"/>
+          </a:xfrm>
+          <a:prstGeom prst="rect">
+            <a:avLst/>
+          </a:prstGeom>
+          <a:noFill/>
+          <a:ln/>
+        </p:spPr>
+        <p:txBody>
+          <a:bodyPr wrap="square" lIns="0" tIns="0" rIns="0" bIns="0" rtlCol="0" anchor="t"/>
+          <a:lstStyle/>
+          <a:p>
+            <a:pPr indent="0" marL="0">
+              <a:buNone/>
+            </a:pPr>
+            <a:r>
+              <a:rPr lang="en-US" sz="1500" dirty="0">
+                <a:solidFill>
+                  <a:schemeClr val="tx1"/>
+                </a:solidFill>
+              </a:rPr>
+              <a:t>A second currency, to prove a new country is a payout partner and a price feed, not a rebuild.</a:t>
+            </a:r>
+            <a:endParaRPr lang="en-US" sz="1500" dirty="0"/>
+          </a:p>
+        </p:txBody>
+      </p:sp>
+      <p:sp>
+        <p:nvSpPr>
+          <p:cNvPr id="17" name="dependency"/>
+          <p:cNvSpPr/>
+          <p:nvPr/>
+        </p:nvSpPr>
+        <p:spPr>
+          <a:xfrm>
+            <a:off x="548640" y="5166360"/>
+            <a:ext cx="11064240" cy="731520"/>
+          </a:xfrm>
+          <a:prstGeom prst="roundRect">
+            <a:avLst>
+              <a:gd name="adj" fmla="val 15000"/>
+            </a:avLst>
+          </a:prstGeom>
+          <a:solidFill>
+            <a:srgbClr val="EEF5F1"/>
+          </a:solidFill>
+          <a:ln/>
+        </p:spPr>
+      </p:sp>
+      <p:sp>
+        <p:nvSpPr>
+          <p:cNvPr id="18" name="Text 16"/>
+          <p:cNvSpPr txBox="1"/>
+          <p:nvPr/>
+        </p:nvSpPr>
+        <p:spPr>
+          <a:xfrm>
+            <a:off x="822960" y="5257800"/>
+            <a:ext cx="10515600" cy="548640"/>
+          </a:xfrm>
+          <a:prstGeom prst="rect">
+            <a:avLst/>
+          </a:prstGeom>
+          <a:noFill/>
+          <a:ln/>
+        </p:spPr>
+        <p:txBody>
+          <a:bodyPr wrap="square" lIns="0" tIns="0" rIns="0" bIns="0" rtlCol="0" anchor="ctr"/>
+          <a:lstStyle/>
+          <a:p>
+            <a:pPr indent="0" marL="0">
+              <a:buNone/>
+            </a:pPr>
+            <a:r>
+              <a:rPr lang="en-US" sz="1500" b="1" dirty="0">
+                <a:solidFill>
+                  <a:schemeClr val="accent1"/>
+                </a:solidFill>
+              </a:rPr>
+              <a:t>The payout partner was the one blocking dependency. With paj.cash live, the rest of the stack is open or self-serve.</a:t>
+            </a:r>
+            <a:endParaRPr lang="en-US" sz="1500" dirty="0"/>
+          </a:p>
+        </p:txBody>
+      </p:sp>
+      <p:sp>
+        <p:nvSpPr>
+          <p:cNvPr id="25" name="Slide Number Placeholder 0"/>
+          <p:cNvSpPr>
+            <a:spLocks noGrp="1"/>
+          </p:cNvSpPr>
+          <p:nvPr>
+            <p:ph type="sldNum" sz="quarter" idx="4294967295"/>
+          </p:nvPr>
+        </p:nvSpPr>
+        <p:spPr>
+          <a:xfrm>
+            <a:off x="11155680" y="6400800"/>
+            <a:ext cx="548640" cy="274320"/>
+          </a:xfrm>
+          <a:prstGeom prst="rect">
+            <a:avLst/>
+          </a:prstGeom>
+          <a:extLst>
+            <a:ext uri="{C572A759-6A51-4108-AA02-DFA0A04FC94B}">
+              <ma14:wrappingTextBoxFlag xmlns:ma14="http://schemas.microsoft.com/office/mac/drawingml/2011/main" val="0"/>
+            </a:ext>
+          </a:extLst>
+        </p:spPr>
+        <p:txBody>
+          <a:bodyPr/>
+          <a:lstStyle>
+            <a:lvl1pPr>
+              <a:defRPr sz="1000">
+                <a:solidFill>
+                  <a:schemeClr val="accent6"/>
+                </a:solidFill>
+              </a:defRPr>
+            </a:lvl1pPr>
+          </a:lstStyle>
+          <a:p>
+            <a:pPr algn="r"/>
+            <a:fld id="{F7021451-1387-4CA6-816F-3879F97B5CBC}" type="slidenum">
+              <a:rPr b="0" lang="en-US"/>
+              <a:t>14</a:t>
+            </a:fld>
+            <a:endParaRPr lang="en-US"/>
+          </a:p>
+        </p:txBody>
+      </p:sp>
+    </p:spTree>
+  </p:cSld>
+  <p:clrMapOvr>
+    <a:masterClrMapping/>
+  </p:clrMapOvr>
+</p:sld>
+</file>
+
+<file path=ppt/slides/slide15.xml><?xml version="1.0" encoding="utf-8"?>
+<p:sld xmlns:a="http://schemas.openxmlformats.org/drawingml/2006/main" xmlns:r="http://schemas.openxmlformats.org/officeDocument/2006/relationships" xmlns:p="http://schemas.openxmlformats.org/presentationml/2006/main">
+  <p:cSld name="Slide 15">
+    <p:spTree>
+      <p:nvGrpSpPr>
+        <p:cNvPr id="1" name=""/>
+        <p:cNvGrpSpPr/>
+        <p:nvPr/>
+      </p:nvGrpSpPr>
+      <p:grpSpPr>
+        <a:xfrm>
+          <a:off x="0" y="0"/>
+          <a:ext cx="0" cy="0"/>
+          <a:chOff x="0" y="0"/>
+          <a:chExt cx="0" cy="0"/>
+        </a:xfrm>
+      </p:grpSpPr>
+      <p:sp>
+        <p:nvSpPr>
+          <p:cNvPr id="2" name="Text 0"/>
+          <p:cNvSpPr/>
+          <p:nvPr>
+            <p:ph idx="100" type="body" hasCustomPrompt="1"/>
+          </p:nvPr>
+        </p:nvSpPr>
+        <p:spPr>
+          <a:xfrm>
+            <a:off x="548640" y="411480"/>
+            <a:ext cx="7315200" cy="320040"/>
+          </a:xfrm>
+          <a:prstGeom prst="rect">
+            <a:avLst/>
+          </a:prstGeom>
+          <a:noFill/>
+          <a:ln/>
+        </p:spPr>
+        <p:txBody>
+          <a:bodyPr wrap="square" lIns="0" tIns="0" rIns="0" bIns="0" rtlCol="0"/>
+          <a:lstStyle/>
+          <a:p>
+            <a:pPr indent="0" marL="0">
+              <a:buNone/>
+            </a:pPr>
+            <a:r>
+              <a:rPr lang="en-US" sz="1200" b="1" spc="300" kern="0" dirty="0">
+                <a:solidFill>
                   <a:schemeClr val="accent2"/>
                 </a:solidFill>
               </a:rPr>
@@ -6301,7 +6851,7 @@
             <a:pPr algn="r"/>
             <a:fld id="{F7021451-1387-4CA6-816F-3879F97B5CBC}" type="slidenum">
               <a:rPr b="0" lang="en-US"/>
-              <a:t>14</a:t>
+              <a:t>15</a:t>
             </a:fld>
             <a:endParaRPr lang="en-US"/>
           </a:p>
@@ -10154,7 +10704,7 @@
                   <a:schemeClr val="tx1"/>
                 </a:solidFill>
               </a:rPr>
-              <a:t>The behaviour already exists. The rails are unreliable</a:t>
+              <a:t>$1.4T moves on phones. Our start: 100 businesses</a:t>
             </a:r>
             <a:endParaRPr lang="en-US" sz="3000" dirty="0"/>
           </a:p>
@@ -10162,14 +10712,36 @@
       </p:sp>
       <p:sp>
         <p:nvSpPr>
-          <p:cNvPr id="4" name="Text 2"/>
+          <p:cNvPr id="4" name="TAM tier"/>
+          <p:cNvSpPr/>
+          <p:nvPr/>
+        </p:nvSpPr>
+        <p:spPr>
+          <a:xfrm>
+            <a:off x="548640" y="1874520"/>
+            <a:ext cx="5669280" cy="960120"/>
+          </a:xfrm>
+          <a:prstGeom prst="roundRect">
+            <a:avLst>
+              <a:gd name="adj" fmla="val 9524"/>
+            </a:avLst>
+          </a:prstGeom>
+          <a:solidFill>
+            <a:schemeClr val="accent1"/>
+          </a:solidFill>
+          <a:ln/>
+        </p:spPr>
+      </p:sp>
+      <p:sp>
+        <p:nvSpPr>
+          <p:cNvPr id="5" name="Text 3"/>
           <p:cNvSpPr txBox="1"/>
           <p:nvPr/>
         </p:nvSpPr>
         <p:spPr>
           <a:xfrm>
-            <a:off x="548640" y="1920240"/>
-            <a:ext cx="3474720" cy="914400"/>
+            <a:off x="777240" y="1947672"/>
+            <a:ext cx="5212080" cy="502920"/>
           </a:xfrm>
           <a:prstGeom prst="rect">
             <a:avLst/>
@@ -10181,57 +10753,32 @@
           <a:bodyPr wrap="square" lIns="0" tIns="0" rIns="0" bIns="0" rtlCol="0" anchor="t"/>
           <a:lstStyle/>
           <a:p>
-            <a:pPr indent="0" marL="0">
-              <a:buNone/>
-            </a:pPr>
-            <a:r>
-              <a:rPr lang="en-US" sz="5000" b="1" dirty="0">
-                <a:solidFill>
-                  <a:schemeClr val="accent1"/>
+            <a:pPr algn="ctr" indent="0" marL="0">
+              <a:buNone/>
+            </a:pPr>
+            <a:r>
+              <a:rPr lang="en-US" sz="1300" b="1" spc="200" kern="0" dirty="0">
+                <a:solidFill>
+                  <a:schemeClr val="bg1"/>
+                </a:solidFill>
+              </a:rPr>
+              <a:t>TAM  </a:t>
+            </a:r>
+            <a:pPr algn="ctr" indent="0" marL="0">
+              <a:buNone/>
+            </a:pPr>
+            <a:r>
+              <a:rPr lang="en-US" sz="3000" b="1" dirty="0">
+                <a:solidFill>
+                  <a:schemeClr val="bg1"/>
                 </a:solidFill>
                 <a:latin typeface="Arial" pitchFamily="34" charset="0"/>
                 <a:ea typeface="Arial" pitchFamily="34" charset="-122"/>
                 <a:cs typeface="Arial" pitchFamily="34" charset="-120"/>
               </a:rPr>
-              <a:t>$40.7B</a:t>
-            </a:r>
-            <a:endParaRPr lang="en-US" sz="5000" dirty="0"/>
-          </a:p>
-        </p:txBody>
-      </p:sp>
-      <p:sp>
-        <p:nvSpPr>
-          <p:cNvPr id="5" name="Text 3"/>
-          <p:cNvSpPr txBox="1"/>
-          <p:nvPr/>
-        </p:nvSpPr>
-        <p:spPr>
-          <a:xfrm>
-            <a:off x="548640" y="2880360"/>
-            <a:ext cx="3474720" cy="365760"/>
-          </a:xfrm>
-          <a:prstGeom prst="rect">
-            <a:avLst/>
-          </a:prstGeom>
-          <a:noFill/>
-          <a:ln/>
-        </p:spPr>
-        <p:txBody>
-          <a:bodyPr wrap="square" lIns="0" tIns="0" rIns="0" bIns="0" rtlCol="0" anchor="t"/>
-          <a:lstStyle/>
-          <a:p>
-            <a:pPr indent="0" marL="0">
-              <a:buNone/>
-            </a:pPr>
-            <a:r>
-              <a:rPr lang="en-US" sz="1600" b="1" dirty="0">
-                <a:solidFill>
-                  <a:schemeClr val="tx1"/>
-                </a:solidFill>
-              </a:rPr>
-              <a:t>TAM · mPOS terminals</a:t>
-            </a:r>
-            <a:endParaRPr lang="en-US" sz="1600" dirty="0"/>
+              <a:t>$1.4T</a:t>
+            </a:r>
+            <a:endParaRPr lang="en-US" sz="1500" dirty="0"/>
           </a:p>
         </p:txBody>
       </p:sp>
@@ -10243,8 +10790,8 @@
         </p:nvSpPr>
         <p:spPr>
           <a:xfrm>
-            <a:off x="548640" y="3246120"/>
-            <a:ext cx="3291840" cy="640080"/>
+            <a:off x="731520" y="2404872"/>
+            <a:ext cx="5303520" cy="402336"/>
           </a:xfrm>
           <a:prstGeom prst="rect">
             <a:avLst/>
@@ -10256,31 +10803,53 @@
           <a:bodyPr wrap="square" lIns="0" tIns="0" rIns="0" bIns="0" rtlCol="0" anchor="t"/>
           <a:lstStyle/>
           <a:p>
-            <a:pPr indent="0" marL="0">
-              <a:buNone/>
-            </a:pPr>
-            <a:r>
-              <a:rPr lang="en-US" sz="1400" dirty="0">
-                <a:solidFill>
-                  <a:schemeClr val="accent6"/>
-                </a:solidFill>
-              </a:rPr>
-              <a:t>2026 forecast, fastest growth in Asia-Pacific</a:t>
-            </a:r>
-            <a:endParaRPr lang="en-US" sz="1400" dirty="0"/>
-          </a:p>
-        </p:txBody>
-      </p:sp>
-      <p:sp>
-        <p:nvSpPr>
-          <p:cNvPr id="7" name="Text 5"/>
+            <a:pPr algn="ctr" indent="0" marL="0">
+              <a:buNone/>
+            </a:pPr>
+            <a:r>
+              <a:rPr lang="en-US" sz="1100" dirty="0">
+                <a:solidFill>
+                  <a:schemeClr val="bg1"/>
+                </a:solidFill>
+              </a:rPr>
+              <a:t>Mobile money transaction value in Sub-Saharan Africa, 2025</a:t>
+            </a:r>
+            <a:endParaRPr lang="en-US" sz="1100" dirty="0"/>
+          </a:p>
+        </p:txBody>
+      </p:sp>
+      <p:sp>
+        <p:nvSpPr>
+          <p:cNvPr id="7" name="SAM tier"/>
+          <p:cNvSpPr/>
+          <p:nvPr/>
+        </p:nvSpPr>
+        <p:spPr>
+          <a:xfrm>
+            <a:off x="1097280" y="2944368"/>
+            <a:ext cx="4572000" cy="960120"/>
+          </a:xfrm>
+          <a:prstGeom prst="roundRect">
+            <a:avLst>
+              <a:gd name="adj" fmla="val 9524"/>
+            </a:avLst>
+          </a:prstGeom>
+          <a:solidFill>
+            <a:schemeClr val="accent4"/>
+          </a:solidFill>
+          <a:ln/>
+        </p:spPr>
+      </p:sp>
+      <p:sp>
+        <p:nvSpPr>
+          <p:cNvPr id="8" name="Text 6"/>
           <p:cNvSpPr txBox="1"/>
           <p:nvPr/>
         </p:nvSpPr>
         <p:spPr>
           <a:xfrm>
-            <a:off x="4297680" y="1920240"/>
-            <a:ext cx="3474720" cy="914400"/>
+            <a:off x="1325880" y="3017520"/>
+            <a:ext cx="4114800" cy="502920"/>
           </a:xfrm>
           <a:prstGeom prst="rect">
             <a:avLst/>
@@ -10292,57 +10861,32 @@
           <a:bodyPr wrap="square" lIns="0" tIns="0" rIns="0" bIns="0" rtlCol="0" anchor="t"/>
           <a:lstStyle/>
           <a:p>
-            <a:pPr indent="0" marL="0">
-              <a:buNone/>
-            </a:pPr>
-            <a:r>
-              <a:rPr lang="en-US" sz="5000" b="1" dirty="0">
-                <a:solidFill>
-                  <a:schemeClr val="accent1"/>
+            <a:pPr algn="ctr" indent="0" marL="0">
+              <a:buNone/>
+            </a:pPr>
+            <a:r>
+              <a:rPr lang="en-US" sz="1300" b="1" spc="200" kern="0" dirty="0">
+                <a:solidFill>
+                  <a:schemeClr val="bg1"/>
+                </a:solidFill>
+              </a:rPr>
+              <a:t>SAM  </a:t>
+            </a:r>
+            <a:pPr algn="ctr" indent="0" marL="0">
+              <a:buNone/>
+            </a:pPr>
+            <a:r>
+              <a:rPr lang="en-US" sz="3000" b="1" dirty="0">
+                <a:solidFill>
+                  <a:schemeClr val="bg1"/>
                 </a:solidFill>
                 <a:latin typeface="Arial" pitchFamily="34" charset="0"/>
                 <a:ea typeface="Arial" pitchFamily="34" charset="-122"/>
                 <a:cs typeface="Arial" pitchFamily="34" charset="-120"/>
               </a:rPr>
-              <a:t>$730B</a:t>
-            </a:r>
-            <a:endParaRPr lang="en-US" sz="5000" dirty="0"/>
-          </a:p>
-        </p:txBody>
-      </p:sp>
-      <p:sp>
-        <p:nvSpPr>
-          <p:cNvPr id="8" name="Text 6"/>
-          <p:cNvSpPr txBox="1"/>
-          <p:nvPr/>
-        </p:nvSpPr>
-        <p:spPr>
-          <a:xfrm>
-            <a:off x="4297680" y="2880360"/>
-            <a:ext cx="3474720" cy="365760"/>
-          </a:xfrm>
-          <a:prstGeom prst="rect">
-            <a:avLst/>
-          </a:prstGeom>
-          <a:noFill/>
-          <a:ln/>
-        </p:spPr>
-        <p:txBody>
-          <a:bodyPr wrap="square" lIns="0" tIns="0" rIns="0" bIns="0" rtlCol="0" anchor="t"/>
-          <a:lstStyle/>
-          <a:p>
-            <a:pPr indent="0" marL="0">
-              <a:buNone/>
-            </a:pPr>
-            <a:r>
-              <a:rPr lang="en-US" sz="1600" b="1" dirty="0">
-                <a:solidFill>
-                  <a:schemeClr val="tx1"/>
-                </a:solidFill>
-              </a:rPr>
-              <a:t>SAM · stablecoin markets</a:t>
-            </a:r>
-            <a:endParaRPr lang="en-US" sz="1600" dirty="0"/>
+              <a:t>$42B</a:t>
+            </a:r>
+            <a:endParaRPr lang="en-US" sz="1500" dirty="0"/>
           </a:p>
         </p:txBody>
       </p:sp>
@@ -10354,8 +10898,8 @@
         </p:nvSpPr>
         <p:spPr>
           <a:xfrm>
-            <a:off x="4297680" y="3246120"/>
-            <a:ext cx="3291840" cy="640080"/>
+            <a:off x="1280160" y="3474720"/>
+            <a:ext cx="4206240" cy="402336"/>
           </a:xfrm>
           <a:prstGeom prst="rect">
             <a:avLst/>
@@ -10367,31 +10911,53 @@
           <a:bodyPr wrap="square" lIns="0" tIns="0" rIns="0" bIns="0" rtlCol="0" anchor="t"/>
           <a:lstStyle/>
           <a:p>
-            <a:pPr indent="0" marL="0">
-              <a:buNone/>
-            </a:pPr>
-            <a:r>
-              <a:rPr lang="en-US" sz="1400" dirty="0">
-                <a:solidFill>
-                  <a:schemeClr val="accent6"/>
-                </a:solidFill>
-              </a:rPr>
-              <a:t>USD stablecoin holdings across 45 emerging markets</a:t>
-            </a:r>
-            <a:endParaRPr lang="en-US" sz="1400" dirty="0"/>
-          </a:p>
-        </p:txBody>
-      </p:sp>
-      <p:sp>
-        <p:nvSpPr>
-          <p:cNvPr id="10" name="Text 8"/>
+            <a:pPr algn="ctr" indent="0" marL="0">
+              <a:buNone/>
+            </a:pPr>
+            <a:r>
+              <a:rPr lang="en-US" sz="1100" dirty="0">
+                <a:solidFill>
+                  <a:schemeClr val="bg1"/>
+                </a:solidFill>
+              </a:rPr>
+              <a:t>≈3% of TAM: in-person business payments in Nigeria and the next corridors our payout partners serve</a:t>
+            </a:r>
+            <a:endParaRPr lang="en-US" sz="1100" dirty="0"/>
+          </a:p>
+        </p:txBody>
+      </p:sp>
+      <p:sp>
+        <p:nvSpPr>
+          <p:cNvPr id="10" name="SOM tier"/>
+          <p:cNvSpPr/>
+          <p:nvPr/>
+        </p:nvSpPr>
+        <p:spPr>
+          <a:xfrm>
+            <a:off x="1645920" y="4014216"/>
+            <a:ext cx="3474720" cy="960120"/>
+          </a:xfrm>
+          <a:prstGeom prst="roundRect">
+            <a:avLst>
+              <a:gd name="adj" fmla="val 9524"/>
+            </a:avLst>
+          </a:prstGeom>
+          <a:solidFill>
+            <a:schemeClr val="accent2"/>
+          </a:solidFill>
+          <a:ln/>
+        </p:spPr>
+      </p:sp>
+      <p:sp>
+        <p:nvSpPr>
+          <p:cNvPr id="11" name="Text 9"/>
           <p:cNvSpPr txBox="1"/>
           <p:nvPr/>
         </p:nvSpPr>
         <p:spPr>
           <a:xfrm>
-            <a:off x="8046720" y="1920240"/>
-            <a:ext cx="3474720" cy="914400"/>
+            <a:off x="1874520" y="4087368"/>
+            <a:ext cx="3017520" cy="502920"/>
           </a:xfrm>
           <a:prstGeom prst="rect">
             <a:avLst/>
@@ -10403,57 +10969,32 @@
           <a:bodyPr wrap="square" lIns="0" tIns="0" rIns="0" bIns="0" rtlCol="0" anchor="t"/>
           <a:lstStyle/>
           <a:p>
-            <a:pPr indent="0" marL="0">
-              <a:buNone/>
-            </a:pPr>
-            <a:r>
-              <a:rPr lang="en-US" sz="5000" b="1" dirty="0">
-                <a:solidFill>
-                  <a:schemeClr val="accent1"/>
+            <a:pPr algn="ctr" indent="0" marL="0">
+              <a:buNone/>
+            </a:pPr>
+            <a:r>
+              <a:rPr lang="en-US" sz="1300" b="1" spc="200" kern="0" dirty="0">
+                <a:solidFill>
+                  <a:schemeClr val="tx1"/>
+                </a:solidFill>
+              </a:rPr>
+              <a:t>SOM  </a:t>
+            </a:r>
+            <a:pPr algn="ctr" indent="0" marL="0">
+              <a:buNone/>
+            </a:pPr>
+            <a:r>
+              <a:rPr lang="en-US" sz="3000" b="1" dirty="0">
+                <a:solidFill>
+                  <a:schemeClr val="tx1"/>
                 </a:solidFill>
                 <a:latin typeface="Arial" pitchFamily="34" charset="0"/>
                 <a:ea typeface="Arial" pitchFamily="34" charset="-122"/>
                 <a:cs typeface="Arial" pitchFamily="34" charset="-120"/>
               </a:rPr>
-              <a:t>50</a:t>
-            </a:r>
-            <a:endParaRPr lang="en-US" sz="5000" dirty="0"/>
-          </a:p>
-        </p:txBody>
-      </p:sp>
-      <p:sp>
-        <p:nvSpPr>
-          <p:cNvPr id="11" name="Text 9"/>
-          <p:cNvSpPr txBox="1"/>
-          <p:nvPr/>
-        </p:nvSpPr>
-        <p:spPr>
-          <a:xfrm>
-            <a:off x="8046720" y="2880360"/>
-            <a:ext cx="3474720" cy="365760"/>
-          </a:xfrm>
-          <a:prstGeom prst="rect">
-            <a:avLst/>
-          </a:prstGeom>
-          <a:noFill/>
-          <a:ln/>
-        </p:spPr>
-        <p:txBody>
-          <a:bodyPr wrap="square" lIns="0" tIns="0" rIns="0" bIns="0" rtlCol="0" anchor="t"/>
-          <a:lstStyle/>
-          <a:p>
-            <a:pPr indent="0" marL="0">
-              <a:buNone/>
-            </a:pPr>
-            <a:r>
-              <a:rPr lang="en-US" sz="1600" b="1" dirty="0">
-                <a:solidFill>
-                  <a:schemeClr val="tx1"/>
-                </a:solidFill>
-              </a:rPr>
-              <a:t>SOM · the beachhead</a:t>
-            </a:r>
-            <a:endParaRPr lang="en-US" sz="1600" dirty="0"/>
+              <a:t>$13.1M</a:t>
+            </a:r>
+            <a:endParaRPr lang="en-US" sz="1500" dirty="0"/>
           </a:p>
         </p:txBody>
       </p:sp>
@@ -10465,8 +11006,8 @@
         </p:nvSpPr>
         <p:spPr>
           <a:xfrm>
-            <a:off x="8046720" y="3246120"/>
-            <a:ext cx="3291840" cy="640080"/>
+            <a:off x="1828800" y="4544568"/>
+            <a:ext cx="3108960" cy="402336"/>
           </a:xfrm>
           <a:prstGeom prst="rect">
             <a:avLst/>
@@ -10478,95 +11019,101 @@
           <a:bodyPr wrap="square" lIns="0" tIns="0" rIns="0" bIns="0" rtlCol="0" anchor="t"/>
           <a:lstStyle/>
           <a:p>
+            <a:pPr algn="ctr" indent="0" marL="0">
+              <a:buNone/>
+            </a:pPr>
+            <a:r>
+              <a:rPr lang="en-US" sz="1100" dirty="0">
+                <a:solidFill>
+                  <a:schemeClr val="tx1"/>
+                </a:solidFill>
+              </a:rPr>
+              <a:t>Year one: 100 businesses, 40% of their takings through Nelo</a:t>
+            </a:r>
+            <a:endParaRPr lang="en-US" sz="1100" dirty="0"/>
+          </a:p>
+        </p:txBody>
+      </p:sp>
+      <p:sp>
+        <p:nvSpPr>
+          <p:cNvPr id="13" name="Text 11"/>
+          <p:cNvSpPr txBox="1"/>
+          <p:nvPr/>
+        </p:nvSpPr>
+        <p:spPr>
+          <a:xfrm>
+            <a:off x="6675120" y="1828800"/>
+            <a:ext cx="4937760" cy="365760"/>
+          </a:xfrm>
+          <a:prstGeom prst="rect">
+            <a:avLst/>
+          </a:prstGeom>
+          <a:noFill/>
+          <a:ln/>
+        </p:spPr>
+        <p:txBody>
+          <a:bodyPr wrap="square" lIns="0" tIns="0" rIns="0" bIns="0" rtlCol="0" anchor="t"/>
+          <a:lstStyle/>
+          <a:p>
             <a:pPr indent="0" marL="0">
               <a:buNone/>
             </a:pPr>
             <a:r>
-              <a:rPr lang="en-US" sz="1400" dirty="0">
-                <a:solidFill>
-                  <a:schemeClr val="accent6"/>
-                </a:solidFill>
-              </a:rPr>
-              <a:t>Merchants in one trading market, recruited on foot</a:t>
-            </a:r>
-            <a:endParaRPr lang="en-US" sz="1400" dirty="0"/>
-          </a:p>
-        </p:txBody>
-      </p:sp>
-      <p:graphicFrame>
-        <p:nvGraphicFramePr>
-          <p:cNvPr id="13" name="Chart 0" descr=""/>
-          <p:cNvGraphicFramePr/>
-          <p:nvPr/>
-        </p:nvGraphicFramePr>
-        <p:xfrm>
-          <a:off x="548640" y="3977640"/>
-          <a:ext cx="6766560" cy="1920240"/>
-        </p:xfrm>
-        <a:graphic xmlns:a="http://schemas.openxmlformats.org/drawingml/2006/main">
-          <a:graphicData uri="http://schemas.openxmlformats.org/drawingml/2006/chart">
-            <c:chart xmlns:c="http://schemas.openxmlformats.org/drawingml/2006/chart" r:id="rId1"/>
-          </a:graphicData>
-        </a:graphic>
-      </p:graphicFrame>
-      <p:sp>
-        <p:nvSpPr>
-          <p:cNvPr id="14" name="insight"/>
+              <a:rPr lang="en-US" sz="1800" b="1" dirty="0">
+                <a:solidFill>
+                  <a:schemeClr val="tx1"/>
+                </a:solidFill>
+              </a:rPr>
+              <a:t>Who we serve</a:t>
+            </a:r>
+            <a:endParaRPr lang="en-US" sz="1800" dirty="0"/>
+          </a:p>
+        </p:txBody>
+      </p:sp>
+      <p:sp>
+        <p:nvSpPr>
+          <p:cNvPr id="14" name="Shape 12"/>
           <p:cNvSpPr/>
           <p:nvPr/>
         </p:nvSpPr>
         <p:spPr>
           <a:xfrm>
-            <a:off x="7680960" y="4023360"/>
-            <a:ext cx="3931920" cy="1828800"/>
-          </a:xfrm>
-          <a:prstGeom prst="roundRect">
-            <a:avLst>
-              <a:gd name="adj" fmla="val 6000"/>
-            </a:avLst>
+            <a:off x="6675120" y="2286000"/>
+            <a:ext cx="411480" cy="411480"/>
+          </a:xfrm>
+          <a:prstGeom prst="ellipse">
+            <a:avLst/>
           </a:prstGeom>
           <a:solidFill>
-            <a:srgbClr val="EEF5F1"/>
+            <a:schemeClr val="accent1"/>
           </a:solidFill>
           <a:ln/>
         </p:spPr>
       </p:sp>
-      <p:sp>
-        <p:nvSpPr>
-          <p:cNvPr id="15" name="Text 12"/>
-          <p:cNvSpPr txBox="1"/>
-          <p:nvPr/>
-        </p:nvSpPr>
-        <p:spPr>
-          <a:xfrm>
-            <a:off x="7955280" y="4206240"/>
-            <a:ext cx="3474720" cy="1463040"/>
-          </a:xfrm>
-          <a:prstGeom prst="rect">
-            <a:avLst/>
-          </a:prstGeom>
-          <a:noFill/>
-          <a:ln/>
-        </p:spPr>
-        <p:txBody>
-          <a:bodyPr wrap="square" lIns="0" tIns="0" rIns="0" bIns="0" rtlCol="0" anchor="t"/>
-          <a:lstStyle/>
-          <a:p>
-            <a:pPr indent="0" marL="0">
-              <a:buNone/>
-            </a:pPr>
-            <a:r>
-              <a:rPr lang="en-US" sz="1600" b="1" dirty="0">
-                <a:solidFill>
-                  <a:schemeClr val="accent1"/>
-                </a:solidFill>
-              </a:rPr>
-              <a:t>Currency is a setting, not a market. A new country is a payout partner and a price feed, not a rebuild.</a:t>
-            </a:r>
-            <a:endParaRPr lang="en-US" sz="1600" dirty="0"/>
-          </a:p>
-        </p:txBody>
-      </p:sp>
+      <p:pic>
+        <p:nvPicPr>
+          <p:cNvPr id="15" name="Image 0" descr="preencoded.png">    </p:cNvPr>
+          <p:cNvPicPr>
+            <a:picLocks noChangeAspect="1"/>
+          </p:cNvPicPr>
+          <p:nvPr/>
+        </p:nvPicPr>
+        <p:blipFill>
+          <a:blip r:embed="rId1"/>
+          <a:stretch>
+            <a:fillRect/>
+          </a:stretch>
+        </p:blipFill>
+        <p:spPr>
+          <a:xfrm>
+            <a:off x="6773875" y="2384755"/>
+            <a:ext cx="213970" cy="213970"/>
+          </a:xfrm>
+          <a:prstGeom prst="rect">
+            <a:avLst/>
+          </a:prstGeom>
+        </p:spPr>
+      </p:pic>
       <p:sp>
         <p:nvSpPr>
           <p:cNvPr id="16" name="Text 13"/>
@@ -10575,6 +11122,667 @@
         </p:nvSpPr>
         <p:spPr>
           <a:xfrm>
+            <a:off x="7223760" y="2350008"/>
+            <a:ext cx="4389120" cy="320040"/>
+          </a:xfrm>
+          <a:prstGeom prst="rect">
+            <a:avLst/>
+          </a:prstGeom>
+          <a:noFill/>
+          <a:ln/>
+        </p:spPr>
+        <p:txBody>
+          <a:bodyPr wrap="square" lIns="0" tIns="0" rIns="0" bIns="0" rtlCol="0" anchor="t"/>
+          <a:lstStyle/>
+          <a:p>
+            <a:pPr indent="0" marL="0">
+              <a:buNone/>
+            </a:pPr>
+            <a:r>
+              <a:rPr lang="en-US" sz="1500" dirty="0">
+                <a:solidFill>
+                  <a:schemeClr val="tx1"/>
+                </a:solidFill>
+              </a:rPr>
+              <a:t>Market traders and shops</a:t>
+            </a:r>
+            <a:endParaRPr lang="en-US" sz="1500" dirty="0"/>
+          </a:p>
+        </p:txBody>
+      </p:sp>
+      <p:sp>
+        <p:nvSpPr>
+          <p:cNvPr id="17" name="Shape 14"/>
+          <p:cNvSpPr/>
+          <p:nvPr/>
+        </p:nvSpPr>
+        <p:spPr>
+          <a:xfrm>
+            <a:off x="6675120" y="2743200"/>
+            <a:ext cx="411480" cy="411480"/>
+          </a:xfrm>
+          <a:prstGeom prst="ellipse">
+            <a:avLst/>
+          </a:prstGeom>
+          <a:solidFill>
+            <a:schemeClr val="accent1"/>
+          </a:solidFill>
+          <a:ln/>
+        </p:spPr>
+      </p:sp>
+      <p:pic>
+        <p:nvPicPr>
+          <p:cNvPr id="18" name="Image 1" descr="preencoded.png">    </p:cNvPr>
+          <p:cNvPicPr>
+            <a:picLocks noChangeAspect="1"/>
+          </p:cNvPicPr>
+          <p:nvPr/>
+        </p:nvPicPr>
+        <p:blipFill>
+          <a:blip r:embed="rId2"/>
+          <a:stretch>
+            <a:fillRect/>
+          </a:stretch>
+        </p:blipFill>
+        <p:spPr>
+          <a:xfrm>
+            <a:off x="6773875" y="2841955"/>
+            <a:ext cx="213970" cy="213970"/>
+          </a:xfrm>
+          <a:prstGeom prst="rect">
+            <a:avLst/>
+          </a:prstGeom>
+        </p:spPr>
+      </p:pic>
+      <p:sp>
+        <p:nvSpPr>
+          <p:cNvPr id="19" name="Text 15"/>
+          <p:cNvSpPr txBox="1"/>
+          <p:nvPr/>
+        </p:nvSpPr>
+        <p:spPr>
+          <a:xfrm>
+            <a:off x="7223760" y="2807208"/>
+            <a:ext cx="4389120" cy="320040"/>
+          </a:xfrm>
+          <a:prstGeom prst="rect">
+            <a:avLst/>
+          </a:prstGeom>
+          <a:noFill/>
+          <a:ln/>
+        </p:spPr>
+        <p:txBody>
+          <a:bodyPr wrap="square" lIns="0" tIns="0" rIns="0" bIns="0" rtlCol="0" anchor="t"/>
+          <a:lstStyle/>
+          <a:p>
+            <a:pPr indent="0" marL="0">
+              <a:buNone/>
+            </a:pPr>
+            <a:r>
+              <a:rPr lang="en-US" sz="1500" dirty="0">
+                <a:solidFill>
+                  <a:schemeClr val="tx1"/>
+                </a:solidFill>
+              </a:rPr>
+              <a:t>Restaurants, food and beverage</a:t>
+            </a:r>
+            <a:endParaRPr lang="en-US" sz="1500" dirty="0"/>
+          </a:p>
+        </p:txBody>
+      </p:sp>
+      <p:sp>
+        <p:nvSpPr>
+          <p:cNvPr id="20" name="Shape 16"/>
+          <p:cNvSpPr/>
+          <p:nvPr/>
+        </p:nvSpPr>
+        <p:spPr>
+          <a:xfrm>
+            <a:off x="6675120" y="3200400"/>
+            <a:ext cx="411480" cy="411480"/>
+          </a:xfrm>
+          <a:prstGeom prst="ellipse">
+            <a:avLst/>
+          </a:prstGeom>
+          <a:solidFill>
+            <a:schemeClr val="accent1"/>
+          </a:solidFill>
+          <a:ln/>
+        </p:spPr>
+      </p:sp>
+      <p:pic>
+        <p:nvPicPr>
+          <p:cNvPr id="21" name="Image 2" descr="preencoded.png">    </p:cNvPr>
+          <p:cNvPicPr>
+            <a:picLocks noChangeAspect="1"/>
+          </p:cNvPicPr>
+          <p:nvPr/>
+        </p:nvPicPr>
+        <p:blipFill>
+          <a:blip r:embed="rId3"/>
+          <a:stretch>
+            <a:fillRect/>
+          </a:stretch>
+        </p:blipFill>
+        <p:spPr>
+          <a:xfrm>
+            <a:off x="6773875" y="3299155"/>
+            <a:ext cx="213970" cy="213970"/>
+          </a:xfrm>
+          <a:prstGeom prst="rect">
+            <a:avLst/>
+          </a:prstGeom>
+        </p:spPr>
+      </p:pic>
+      <p:sp>
+        <p:nvSpPr>
+          <p:cNvPr id="22" name="Text 17"/>
+          <p:cNvSpPr txBox="1"/>
+          <p:nvPr/>
+        </p:nvSpPr>
+        <p:spPr>
+          <a:xfrm>
+            <a:off x="7223760" y="3264408"/>
+            <a:ext cx="4389120" cy="320040"/>
+          </a:xfrm>
+          <a:prstGeom prst="rect">
+            <a:avLst/>
+          </a:prstGeom>
+          <a:noFill/>
+          <a:ln/>
+        </p:spPr>
+        <p:txBody>
+          <a:bodyPr wrap="square" lIns="0" tIns="0" rIns="0" bIns="0" rtlCol="0" anchor="t"/>
+          <a:lstStyle/>
+          <a:p>
+            <a:pPr indent="0" marL="0">
+              <a:buNone/>
+            </a:pPr>
+            <a:r>
+              <a:rPr lang="en-US" sz="1500" dirty="0">
+                <a:solidFill>
+                  <a:schemeClr val="tx1"/>
+                </a:solidFill>
+              </a:rPr>
+              <a:t>Logistics, couriers and taxis</a:t>
+            </a:r>
+            <a:endParaRPr lang="en-US" sz="1500" dirty="0"/>
+          </a:p>
+        </p:txBody>
+      </p:sp>
+      <p:sp>
+        <p:nvSpPr>
+          <p:cNvPr id="23" name="Shape 18"/>
+          <p:cNvSpPr/>
+          <p:nvPr/>
+        </p:nvSpPr>
+        <p:spPr>
+          <a:xfrm>
+            <a:off x="6675120" y="3657600"/>
+            <a:ext cx="411480" cy="411480"/>
+          </a:xfrm>
+          <a:prstGeom prst="ellipse">
+            <a:avLst/>
+          </a:prstGeom>
+          <a:solidFill>
+            <a:schemeClr val="accent1"/>
+          </a:solidFill>
+          <a:ln/>
+        </p:spPr>
+      </p:sp>
+      <p:pic>
+        <p:nvPicPr>
+          <p:cNvPr id="24" name="Image 3" descr="preencoded.png">    </p:cNvPr>
+          <p:cNvPicPr>
+            <a:picLocks noChangeAspect="1"/>
+          </p:cNvPicPr>
+          <p:nvPr/>
+        </p:nvPicPr>
+        <p:blipFill>
+          <a:blip r:embed="rId4"/>
+          <a:stretch>
+            <a:fillRect/>
+          </a:stretch>
+        </p:blipFill>
+        <p:spPr>
+          <a:xfrm>
+            <a:off x="6773875" y="3756355"/>
+            <a:ext cx="213970" cy="213970"/>
+          </a:xfrm>
+          <a:prstGeom prst="rect">
+            <a:avLst/>
+          </a:prstGeom>
+        </p:spPr>
+      </p:pic>
+      <p:sp>
+        <p:nvSpPr>
+          <p:cNvPr id="25" name="Text 19"/>
+          <p:cNvSpPr txBox="1"/>
+          <p:nvPr/>
+        </p:nvSpPr>
+        <p:spPr>
+          <a:xfrm>
+            <a:off x="7223760" y="3721608"/>
+            <a:ext cx="4389120" cy="320040"/>
+          </a:xfrm>
+          <a:prstGeom prst="rect">
+            <a:avLst/>
+          </a:prstGeom>
+          <a:noFill/>
+          <a:ln/>
+        </p:spPr>
+        <p:txBody>
+          <a:bodyPr wrap="square" lIns="0" tIns="0" rIns="0" bIns="0" rtlCol="0" anchor="t"/>
+          <a:lstStyle/>
+          <a:p>
+            <a:pPr indent="0" marL="0">
+              <a:buNone/>
+            </a:pPr>
+            <a:r>
+              <a:rPr lang="en-US" sz="1500" dirty="0">
+                <a:solidFill>
+                  <a:schemeClr val="tx1"/>
+                </a:solidFill>
+              </a:rPr>
+              <a:t>Field services and on-site pros</a:t>
+            </a:r>
+            <a:endParaRPr lang="en-US" sz="1500" dirty="0"/>
+          </a:p>
+        </p:txBody>
+      </p:sp>
+      <p:sp>
+        <p:nvSpPr>
+          <p:cNvPr id="26" name="Shape 20"/>
+          <p:cNvSpPr/>
+          <p:nvPr/>
+        </p:nvSpPr>
+        <p:spPr>
+          <a:xfrm>
+            <a:off x="6675120" y="4114800"/>
+            <a:ext cx="411480" cy="411480"/>
+          </a:xfrm>
+          <a:prstGeom prst="ellipse">
+            <a:avLst/>
+          </a:prstGeom>
+          <a:solidFill>
+            <a:schemeClr val="accent1"/>
+          </a:solidFill>
+          <a:ln/>
+        </p:spPr>
+      </p:sp>
+      <p:pic>
+        <p:nvPicPr>
+          <p:cNvPr id="27" name="Image 4" descr="preencoded.png">    </p:cNvPr>
+          <p:cNvPicPr>
+            <a:picLocks noChangeAspect="1"/>
+          </p:cNvPicPr>
+          <p:nvPr/>
+        </p:nvPicPr>
+        <p:blipFill>
+          <a:blip r:embed="rId5"/>
+          <a:stretch>
+            <a:fillRect/>
+          </a:stretch>
+        </p:blipFill>
+        <p:spPr>
+          <a:xfrm>
+            <a:off x="6773875" y="4213555"/>
+            <a:ext cx="213970" cy="213970"/>
+          </a:xfrm>
+          <a:prstGeom prst="rect">
+            <a:avLst/>
+          </a:prstGeom>
+        </p:spPr>
+      </p:pic>
+      <p:sp>
+        <p:nvSpPr>
+          <p:cNvPr id="28" name="Text 21"/>
+          <p:cNvSpPr txBox="1"/>
+          <p:nvPr/>
+        </p:nvSpPr>
+        <p:spPr>
+          <a:xfrm>
+            <a:off x="7223760" y="4178808"/>
+            <a:ext cx="4389120" cy="320040"/>
+          </a:xfrm>
+          <a:prstGeom prst="rect">
+            <a:avLst/>
+          </a:prstGeom>
+          <a:noFill/>
+          <a:ln/>
+        </p:spPr>
+        <p:txBody>
+          <a:bodyPr wrap="square" lIns="0" tIns="0" rIns="0" bIns="0" rtlCol="0" anchor="t"/>
+          <a:lstStyle/>
+          <a:p>
+            <a:pPr indent="0" marL="0">
+              <a:buNone/>
+            </a:pPr>
+            <a:r>
+              <a:rPr lang="en-US" sz="1500" dirty="0">
+                <a:solidFill>
+                  <a:schemeClr val="tx1"/>
+                </a:solidFill>
+              </a:rPr>
+              <a:t>Fashion and luxury jewellery</a:t>
+            </a:r>
+            <a:endParaRPr lang="en-US" sz="1500" dirty="0"/>
+          </a:p>
+        </p:txBody>
+      </p:sp>
+      <p:sp>
+        <p:nvSpPr>
+          <p:cNvPr id="29" name="Shape 22"/>
+          <p:cNvSpPr/>
+          <p:nvPr/>
+        </p:nvSpPr>
+        <p:spPr>
+          <a:xfrm>
+            <a:off x="6675120" y="4572000"/>
+            <a:ext cx="411480" cy="411480"/>
+          </a:xfrm>
+          <a:prstGeom prst="ellipse">
+            <a:avLst/>
+          </a:prstGeom>
+          <a:solidFill>
+            <a:schemeClr val="accent1"/>
+          </a:solidFill>
+          <a:ln/>
+        </p:spPr>
+      </p:sp>
+      <p:pic>
+        <p:nvPicPr>
+          <p:cNvPr id="30" name="Image 5" descr="preencoded.png">    </p:cNvPr>
+          <p:cNvPicPr>
+            <a:picLocks noChangeAspect="1"/>
+          </p:cNvPicPr>
+          <p:nvPr/>
+        </p:nvPicPr>
+        <p:blipFill>
+          <a:blip r:embed="rId6"/>
+          <a:stretch>
+            <a:fillRect/>
+          </a:stretch>
+        </p:blipFill>
+        <p:spPr>
+          <a:xfrm>
+            <a:off x="6773875" y="4670755"/>
+            <a:ext cx="213970" cy="213970"/>
+          </a:xfrm>
+          <a:prstGeom prst="rect">
+            <a:avLst/>
+          </a:prstGeom>
+        </p:spPr>
+      </p:pic>
+      <p:sp>
+        <p:nvSpPr>
+          <p:cNvPr id="31" name="Text 23"/>
+          <p:cNvSpPr txBox="1"/>
+          <p:nvPr/>
+        </p:nvSpPr>
+        <p:spPr>
+          <a:xfrm>
+            <a:off x="7223760" y="4636008"/>
+            <a:ext cx="4389120" cy="320040"/>
+          </a:xfrm>
+          <a:prstGeom prst="rect">
+            <a:avLst/>
+          </a:prstGeom>
+          <a:noFill/>
+          <a:ln/>
+        </p:spPr>
+        <p:txBody>
+          <a:bodyPr wrap="square" lIns="0" tIns="0" rIns="0" bIns="0" rtlCol="0" anchor="t"/>
+          <a:lstStyle/>
+          <a:p>
+            <a:pPr indent="0" marL="0">
+              <a:buNone/>
+            </a:pPr>
+            <a:r>
+              <a:rPr lang="en-US" sz="1500" dirty="0">
+                <a:solidFill>
+                  <a:schemeClr val="tx1"/>
+                </a:solidFill>
+              </a:rPr>
+              <a:t>Supermarkets, superstores, malls</a:t>
+            </a:r>
+            <a:endParaRPr lang="en-US" sz="1500" dirty="0"/>
+          </a:p>
+        </p:txBody>
+      </p:sp>
+      <p:sp>
+        <p:nvSpPr>
+          <p:cNvPr id="32" name="Text 24"/>
+          <p:cNvSpPr txBox="1"/>
+          <p:nvPr/>
+        </p:nvSpPr>
+        <p:spPr>
+          <a:xfrm>
+            <a:off x="548640" y="5120640"/>
+            <a:ext cx="3566160" cy="384048"/>
+          </a:xfrm>
+          <a:prstGeom prst="rect">
+            <a:avLst/>
+          </a:prstGeom>
+          <a:noFill/>
+          <a:ln/>
+        </p:spPr>
+        <p:txBody>
+          <a:bodyPr wrap="square" lIns="0" tIns="0" rIns="0" bIns="0" rtlCol="0" anchor="t"/>
+          <a:lstStyle/>
+          <a:p>
+            <a:pPr indent="0" marL="0">
+              <a:buNone/>
+            </a:pPr>
+            <a:r>
+              <a:rPr lang="en-US" sz="2200" b="1" dirty="0">
+                <a:solidFill>
+                  <a:schemeClr val="accent1"/>
+                </a:solidFill>
+                <a:latin typeface="Arial" pitchFamily="34" charset="0"/>
+                <a:ea typeface="Arial" pitchFamily="34" charset="-122"/>
+                <a:cs typeface="Arial" pitchFamily="34" charset="-120"/>
+              </a:rPr>
+              <a:t>347M</a:t>
+            </a:r>
+            <a:endParaRPr lang="en-US" sz="2200" dirty="0"/>
+          </a:p>
+        </p:txBody>
+      </p:sp>
+      <p:sp>
+        <p:nvSpPr>
+          <p:cNvPr id="33" name="Text 25"/>
+          <p:cNvSpPr txBox="1"/>
+          <p:nvPr/>
+        </p:nvSpPr>
+        <p:spPr>
+          <a:xfrm>
+            <a:off x="548640" y="5504688"/>
+            <a:ext cx="3474720" cy="365760"/>
+          </a:xfrm>
+          <a:prstGeom prst="rect">
+            <a:avLst/>
+          </a:prstGeom>
+          <a:noFill/>
+          <a:ln/>
+        </p:spPr>
+        <p:txBody>
+          <a:bodyPr wrap="square" lIns="0" tIns="0" rIns="0" bIns="0" rtlCol="0" anchor="t"/>
+          <a:lstStyle/>
+          <a:p>
+            <a:pPr indent="0" marL="0">
+              <a:buNone/>
+            </a:pPr>
+            <a:r>
+              <a:rPr lang="en-US" sz="1100" dirty="0">
+                <a:solidFill>
+                  <a:schemeClr val="accent6"/>
+                </a:solidFill>
+              </a:rPr>
+              <a:t>active mobile money accounts in Sub-Saharan Africa</a:t>
+            </a:r>
+            <a:endParaRPr lang="en-US" sz="1100" dirty="0"/>
+          </a:p>
+        </p:txBody>
+      </p:sp>
+      <p:sp>
+        <p:nvSpPr>
+          <p:cNvPr id="34" name="Text 26"/>
+          <p:cNvSpPr txBox="1"/>
+          <p:nvPr/>
+        </p:nvSpPr>
+        <p:spPr>
+          <a:xfrm>
+            <a:off x="4297680" y="5120640"/>
+            <a:ext cx="3566160" cy="384048"/>
+          </a:xfrm>
+          <a:prstGeom prst="rect">
+            <a:avLst/>
+          </a:prstGeom>
+          <a:noFill/>
+          <a:ln/>
+        </p:spPr>
+        <p:txBody>
+          <a:bodyPr wrap="square" lIns="0" tIns="0" rIns="0" bIns="0" rtlCol="0" anchor="t"/>
+          <a:lstStyle/>
+          <a:p>
+            <a:pPr indent="0" marL="0">
+              <a:buNone/>
+            </a:pPr>
+            <a:r>
+              <a:rPr lang="en-US" sz="2200" b="1" dirty="0">
+                <a:solidFill>
+                  <a:schemeClr val="accent1"/>
+                </a:solidFill>
+                <a:latin typeface="Arial" pitchFamily="34" charset="0"/>
+                <a:ea typeface="Arial" pitchFamily="34" charset="-122"/>
+                <a:cs typeface="Arial" pitchFamily="34" charset="-120"/>
+              </a:rPr>
+              <a:t>$650B</a:t>
+            </a:r>
+            <a:endParaRPr lang="en-US" sz="2200" dirty="0"/>
+          </a:p>
+        </p:txBody>
+      </p:sp>
+      <p:sp>
+        <p:nvSpPr>
+          <p:cNvPr id="35" name="Text 27"/>
+          <p:cNvSpPr txBox="1"/>
+          <p:nvPr/>
+        </p:nvSpPr>
+        <p:spPr>
+          <a:xfrm>
+            <a:off x="4297680" y="5504688"/>
+            <a:ext cx="3474720" cy="365760"/>
+          </a:xfrm>
+          <a:prstGeom prst="rect">
+            <a:avLst/>
+          </a:prstGeom>
+          <a:noFill/>
+          <a:ln/>
+        </p:spPr>
+        <p:txBody>
+          <a:bodyPr wrap="square" lIns="0" tIns="0" rIns="0" bIns="0" rtlCol="0" anchor="t"/>
+          <a:lstStyle/>
+          <a:p>
+            <a:pPr indent="0" marL="0">
+              <a:buNone/>
+            </a:pPr>
+            <a:r>
+              <a:rPr lang="en-US" sz="1100" dirty="0">
+                <a:solidFill>
+                  <a:schemeClr val="accent6"/>
+                </a:solidFill>
+              </a:rPr>
+              <a:t>stablecoin volume on Solana in one month, Feb 2026</a:t>
+            </a:r>
+            <a:endParaRPr lang="en-US" sz="1100" dirty="0"/>
+          </a:p>
+        </p:txBody>
+      </p:sp>
+      <p:sp>
+        <p:nvSpPr>
+          <p:cNvPr id="36" name="Text 28"/>
+          <p:cNvSpPr txBox="1"/>
+          <p:nvPr/>
+        </p:nvSpPr>
+        <p:spPr>
+          <a:xfrm>
+            <a:off x="8046720" y="5120640"/>
+            <a:ext cx="3566160" cy="384048"/>
+          </a:xfrm>
+          <a:prstGeom prst="rect">
+            <a:avLst/>
+          </a:prstGeom>
+          <a:noFill/>
+          <a:ln/>
+        </p:spPr>
+        <p:txBody>
+          <a:bodyPr wrap="square" lIns="0" tIns="0" rIns="0" bIns="0" rtlCol="0" anchor="t"/>
+          <a:lstStyle/>
+          <a:p>
+            <a:pPr indent="0" marL="0">
+              <a:buNone/>
+            </a:pPr>
+            <a:r>
+              <a:rPr lang="en-US" sz="2200" b="1" dirty="0">
+                <a:solidFill>
+                  <a:schemeClr val="accent1"/>
+                </a:solidFill>
+                <a:latin typeface="Arial" pitchFamily="34" charset="0"/>
+                <a:ea typeface="Arial" pitchFamily="34" charset="-122"/>
+                <a:cs typeface="Arial" pitchFamily="34" charset="-120"/>
+              </a:rPr>
+              <a:t>75%</a:t>
+            </a:r>
+            <a:endParaRPr lang="en-US" sz="2200" dirty="0"/>
+          </a:p>
+        </p:txBody>
+      </p:sp>
+      <p:sp>
+        <p:nvSpPr>
+          <p:cNvPr id="37" name="Text 29"/>
+          <p:cNvSpPr txBox="1"/>
+          <p:nvPr/>
+        </p:nvSpPr>
+        <p:spPr>
+          <a:xfrm>
+            <a:off x="8046720" y="5504688"/>
+            <a:ext cx="3474720" cy="365760"/>
+          </a:xfrm>
+          <a:prstGeom prst="rect">
+            <a:avLst/>
+          </a:prstGeom>
+          <a:noFill/>
+          <a:ln/>
+        </p:spPr>
+        <p:txBody>
+          <a:bodyPr wrap="square" lIns="0" tIns="0" rIns="0" bIns="0" rtlCol="0" anchor="t"/>
+          <a:lstStyle/>
+          <a:p>
+            <a:pPr indent="0" marL="0">
+              <a:buNone/>
+            </a:pPr>
+            <a:r>
+              <a:rPr lang="en-US" sz="1100" dirty="0">
+                <a:solidFill>
+                  <a:schemeClr val="accent6"/>
+                </a:solidFill>
+              </a:rPr>
+              <a:t>of merchants planning crypto acceptance prefer stablecoins</a:t>
+            </a:r>
+            <a:endParaRPr lang="en-US" sz="1100" dirty="0"/>
+          </a:p>
+        </p:txBody>
+      </p:sp>
+      <p:sp>
+        <p:nvSpPr>
+          <p:cNvPr id="38" name="Text 30"/>
+          <p:cNvSpPr txBox="1"/>
+          <p:nvPr/>
+        </p:nvSpPr>
+        <p:spPr>
+          <a:xfrm>
             <a:off x="548640" y="5989320"/>
             <a:ext cx="10515600" cy="274320"/>
           </a:xfrm>
@@ -10597,7 +11805,7 @@
                   <a:schemeClr val="accent6"/>
                 </a:solidFill>
               </a:rPr>
-              <a:t>GSMA State of the Industry 2026 · S&amp;P Global · 2026 Solana stablecoin reporting</a:t>
+              <a:t>GSMA State of the Industry 2026 · 2026 Solana stablecoin reporting · Deloitte 2025 merchant survey · SAM and SOM are Nelo estimates</a:t>
             </a:r>
             <a:endParaRPr lang="en-US" sz="1000" dirty="0"/>
           </a:p>
@@ -10743,7 +11951,7 @@
                   <a:schemeClr val="tx1"/>
                 </a:solidFill>
               </a:rPr>
-              <a:t>Basis points on volume, spread on payout, then lending</a:t>
+              <a:t>We earn on every payment, across six kinds of business</a:t>
             </a:r>
             <a:endParaRPr lang="en-US" sz="3000" dirty="0"/>
           </a:p>
@@ -10765,27 +11973,29 @@
         </p:nvGraphicFramePr>
         <p:xfrm>
           <a:off x="548640" y="1828800"/>
-          <a:ext cx="5120640" cy="914400"/>
+          <a:ext cx="6949440" cy="914400"/>
         </p:xfrm>
         <a:graphic>
           <a:graphicData uri="http://schemas.openxmlformats.org/drawingml/2006/table">
             <a:tbl>
               <a:tblPr/>
               <a:tblGrid>
-                <a:gridCol w="3657600"/>
+                <a:gridCol w="3017520"/>
+                <a:gridCol w="1097280"/>
                 <a:gridCol w="1463040"/>
+                <a:gridCol w="1371600"/>
               </a:tblGrid>
-              <a:tr h="411480">
+              <a:tr h="384048">
                 <a:tc>
                   <a:txBody>
                     <a:bodyPr/>
                     <a:lstStyle/>
                     <a:p>
-                      <a:pPr indent="0" marL="0">
+                      <a:pPr algn="l" indent="0" marL="0">
                         <a:buNone/>
                       </a:pPr>
                       <a:r>
-                        <a:rPr lang="en-US" sz="1400" b="1" dirty="0">
+                        <a:rPr lang="en-US" sz="1300" b="1" dirty="0">
                           <a:solidFill>
                             <a:schemeClr val="bg1"/>
                           </a:solidFill>
@@ -10793,9 +12003,9 @@
                           <a:ea typeface="Calibri" pitchFamily="34" charset="-122"/>
                           <a:cs typeface="Calibri" pitchFamily="34" charset="-120"/>
                         </a:rPr>
-                        <a:t>Assumption</a:t>
+                        <a:t>Category</a:t>
                       </a:r>
-                      <a:endParaRPr lang="en-US" sz="1400" dirty="0">
+                      <a:endParaRPr lang="en-US" sz="1300" dirty="0">
                         <a:latin typeface="Calibri" charset="0"/>
                         <a:ea typeface="Calibri" charset="0"/>
                         <a:cs typeface="Calibri" charset="0"/>
@@ -10853,7 +12063,7 @@
                         <a:buNone/>
                       </a:pPr>
                       <a:r>
-                        <a:rPr lang="en-US" sz="1400" b="1" dirty="0">
+                        <a:rPr lang="en-US" sz="1300" b="1" dirty="0">
                           <a:solidFill>
                             <a:schemeClr val="bg1"/>
                           </a:solidFill>
@@ -10861,9 +12071,145 @@
                           <a:ea typeface="Calibri" pitchFamily="34" charset="-122"/>
                           <a:cs typeface="Calibri" pitchFamily="34" charset="-120"/>
                         </a:rPr>
-                        <a:t>Value</a:t>
+                        <a:t>Of first 100</a:t>
                       </a:r>
-                      <a:endParaRPr lang="en-US" sz="1400" dirty="0">
+                      <a:endParaRPr lang="en-US" sz="1300" dirty="0">
+                        <a:latin typeface="Calibri" charset="0"/>
+                        <a:ea typeface="Calibri" charset="0"/>
+                        <a:cs typeface="Calibri" charset="0"/>
+                      </a:endParaRPr>
+                    </a:p>
+                  </a:txBody>
+                  <a:tcPr marL="91440" marR="91440" marT="45720" marB="45720">
+                    <a:lnL w="6350" cap="flat" cmpd="sng" algn="ctr">
+                      <a:solidFill>
+                        <a:srgbClr val="A9D8C2"/>
+                      </a:solidFill>
+                      <a:prstDash val="solid"/>
+                      <a:round/>
+                      <a:headEnd type="none" w="med" len="med"/>
+                      <a:tailEnd type="none" w="med" len="med"/>
+                    </a:lnL>
+                    <a:lnR w="6350" cap="flat" cmpd="sng" algn="ctr">
+                      <a:solidFill>
+                        <a:srgbClr val="A9D8C2"/>
+                      </a:solidFill>
+                      <a:prstDash val="solid"/>
+                      <a:round/>
+                      <a:headEnd type="none" w="med" len="med"/>
+                      <a:tailEnd type="none" w="med" len="med"/>
+                    </a:lnR>
+                    <a:lnT w="6350" cap="flat" cmpd="sng" algn="ctr">
+                      <a:solidFill>
+                        <a:srgbClr val="A9D8C2"/>
+                      </a:solidFill>
+                      <a:prstDash val="solid"/>
+                      <a:round/>
+                      <a:headEnd type="none" w="med" len="med"/>
+                      <a:tailEnd type="none" w="med" len="med"/>
+                    </a:lnT>
+                    <a:lnB w="6350" cap="flat" cmpd="sng" algn="ctr">
+                      <a:solidFill>
+                        <a:srgbClr val="A9D8C2"/>
+                      </a:solidFill>
+                      <a:prstDash val="solid"/>
+                      <a:round/>
+                      <a:headEnd type="none" w="med" len="med"/>
+                      <a:tailEnd type="none" w="med" len="med"/>
+                    </a:lnB>
+                    <a:solidFill>
+                      <a:schemeClr val="accent1"/>
+                    </a:solidFill>
+                  </a:tcPr>
+                </a:tc>
+                <a:tc>
+                  <a:txBody>
+                    <a:bodyPr/>
+                    <a:lstStyle/>
+                    <a:p>
+                      <a:pPr algn="r" indent="0" marL="0">
+                        <a:buNone/>
+                      </a:pPr>
+                      <a:r>
+                        <a:rPr lang="en-US" sz="1300" b="1" dirty="0">
+                          <a:solidFill>
+                            <a:schemeClr val="bg1"/>
+                          </a:solidFill>
+                          <a:latin typeface="Calibri" pitchFamily="34" charset="0"/>
+                          <a:ea typeface="Calibri" pitchFamily="34" charset="-122"/>
+                          <a:cs typeface="Calibri" pitchFamily="34" charset="-120"/>
+                        </a:rPr>
+                        <a:t>Avg daily takings</a:t>
+                      </a:r>
+                      <a:endParaRPr lang="en-US" sz="1300" dirty="0">
+                        <a:latin typeface="Calibri" charset="0"/>
+                        <a:ea typeface="Calibri" charset="0"/>
+                        <a:cs typeface="Calibri" charset="0"/>
+                      </a:endParaRPr>
+                    </a:p>
+                  </a:txBody>
+                  <a:tcPr marL="91440" marR="91440" marT="45720" marB="45720">
+                    <a:lnL w="6350" cap="flat" cmpd="sng" algn="ctr">
+                      <a:solidFill>
+                        <a:srgbClr val="A9D8C2"/>
+                      </a:solidFill>
+                      <a:prstDash val="solid"/>
+                      <a:round/>
+                      <a:headEnd type="none" w="med" len="med"/>
+                      <a:tailEnd type="none" w="med" len="med"/>
+                    </a:lnL>
+                    <a:lnR w="6350" cap="flat" cmpd="sng" algn="ctr">
+                      <a:solidFill>
+                        <a:srgbClr val="A9D8C2"/>
+                      </a:solidFill>
+                      <a:prstDash val="solid"/>
+                      <a:round/>
+                      <a:headEnd type="none" w="med" len="med"/>
+                      <a:tailEnd type="none" w="med" len="med"/>
+                    </a:lnR>
+                    <a:lnT w="6350" cap="flat" cmpd="sng" algn="ctr">
+                      <a:solidFill>
+                        <a:srgbClr val="A9D8C2"/>
+                      </a:solidFill>
+                      <a:prstDash val="solid"/>
+                      <a:round/>
+                      <a:headEnd type="none" w="med" len="med"/>
+                      <a:tailEnd type="none" w="med" len="med"/>
+                    </a:lnT>
+                    <a:lnB w="6350" cap="flat" cmpd="sng" algn="ctr">
+                      <a:solidFill>
+                        <a:srgbClr val="A9D8C2"/>
+                      </a:solidFill>
+                      <a:prstDash val="solid"/>
+                      <a:round/>
+                      <a:headEnd type="none" w="med" len="med"/>
+                      <a:tailEnd type="none" w="med" len="med"/>
+                    </a:lnB>
+                    <a:solidFill>
+                      <a:schemeClr val="accent1"/>
+                    </a:solidFill>
+                  </a:tcPr>
+                </a:tc>
+                <a:tc>
+                  <a:txBody>
+                    <a:bodyPr/>
+                    <a:lstStyle/>
+                    <a:p>
+                      <a:pPr algn="r" indent="0" marL="0">
+                        <a:buNone/>
+                      </a:pPr>
+                      <a:r>
+                        <a:rPr lang="en-US" sz="1300" b="1" dirty="0">
+                          <a:solidFill>
+                            <a:schemeClr val="bg1"/>
+                          </a:solidFill>
+                          <a:latin typeface="Calibri" pitchFamily="34" charset="0"/>
+                          <a:ea typeface="Calibri" pitchFamily="34" charset="-122"/>
+                          <a:cs typeface="Calibri" pitchFamily="34" charset="-120"/>
+                        </a:rPr>
+                        <a:t>Daily via Nelo</a:t>
+                      </a:r>
+                      <a:endParaRPr lang="en-US" sz="1300" dirty="0">
                         <a:latin typeface="Calibri" charset="0"/>
                         <a:ea typeface="Calibri" charset="0"/>
                         <a:cs typeface="Calibri" charset="0"/>
@@ -10913,7 +12259,7 @@
                   </a:tcPr>
                 </a:tc>
               </a:tr>
-              <a:tr h="411480">
+              <a:tr h="384048">
                 <a:tc>
                   <a:txBody>
                     <a:bodyPr/>
@@ -10923,7 +12269,7 @@
                         <a:buNone/>
                       </a:pPr>
                       <a:r>
-                        <a:rPr lang="en-US" sz="1400" dirty="0">
+                        <a:rPr lang="en-US" sz="1300" dirty="0">
                           <a:solidFill>
                             <a:schemeClr val="tx1"/>
                           </a:solidFill>
@@ -10931,9 +12277,9 @@
                           <a:ea typeface="Calibri" pitchFamily="34" charset="-122"/>
                           <a:cs typeface="Calibri" pitchFamily="34" charset="-120"/>
                         </a:rPr>
-                        <a:t>Merchant daily turnover</a:t>
+                        <a:t>Market traders and shops</a:t>
                       </a:r>
-                      <a:endParaRPr lang="en-US" sz="1400" dirty="0">
+                      <a:endParaRPr lang="en-US" sz="1300" dirty="0">
                         <a:latin typeface="Calibri" charset="0"/>
                         <a:ea typeface="Calibri" charset="0"/>
                         <a:cs typeface="Calibri" charset="0"/>
@@ -10988,7 +12334,7 @@
                         <a:buNone/>
                       </a:pPr>
                       <a:r>
-                        <a:rPr lang="en-US" sz="1400" dirty="0">
+                        <a:rPr lang="en-US" sz="1300" dirty="0">
                           <a:solidFill>
                             <a:schemeClr val="tx1"/>
                           </a:solidFill>
@@ -10996,76 +12342,9 @@
                           <a:ea typeface="Calibri" pitchFamily="34" charset="-122"/>
                           <a:cs typeface="Calibri" pitchFamily="34" charset="-120"/>
                         </a:rPr>
-                        <a:t>$95</a:t>
+                        <a:t>40</a:t>
                       </a:r>
-                      <a:endParaRPr lang="en-US" sz="1400" dirty="0">
-                        <a:latin typeface="Calibri" charset="0"/>
-                        <a:ea typeface="Calibri" charset="0"/>
-                        <a:cs typeface="Calibri" charset="0"/>
-                      </a:endParaRPr>
-                    </a:p>
-                  </a:txBody>
-                  <a:tcPr marL="91440" marR="91440" marT="45720" marB="45720">
-                    <a:lnL w="6350" cap="flat" cmpd="sng" algn="ctr">
-                      <a:solidFill>
-                        <a:srgbClr val="A9D8C2"/>
-                      </a:solidFill>
-                      <a:prstDash val="solid"/>
-                      <a:round/>
-                      <a:headEnd type="none" w="med" len="med"/>
-                      <a:tailEnd type="none" w="med" len="med"/>
-                    </a:lnL>
-                    <a:lnR w="6350" cap="flat" cmpd="sng" algn="ctr">
-                      <a:solidFill>
-                        <a:srgbClr val="A9D8C2"/>
-                      </a:solidFill>
-                      <a:prstDash val="solid"/>
-                      <a:round/>
-                      <a:headEnd type="none" w="med" len="med"/>
-                      <a:tailEnd type="none" w="med" len="med"/>
-                    </a:lnR>
-                    <a:lnT w="6350" cap="flat" cmpd="sng" algn="ctr">
-                      <a:solidFill>
-                        <a:srgbClr val="A9D8C2"/>
-                      </a:solidFill>
-                      <a:prstDash val="solid"/>
-                      <a:round/>
-                      <a:headEnd type="none" w="med" len="med"/>
-                      <a:tailEnd type="none" w="med" len="med"/>
-                    </a:lnT>
-                    <a:lnB w="6350" cap="flat" cmpd="sng" algn="ctr">
-                      <a:solidFill>
-                        <a:srgbClr val="A9D8C2"/>
-                      </a:solidFill>
-                      <a:prstDash val="solid"/>
-                      <a:round/>
-                      <a:headEnd type="none" w="med" len="med"/>
-                      <a:tailEnd type="none" w="med" len="med"/>
-                    </a:lnB>
-                  </a:tcPr>
-                </a:tc>
-              </a:tr>
-              <a:tr h="411480">
-                <a:tc>
-                  <a:txBody>
-                    <a:bodyPr/>
-                    <a:lstStyle/>
-                    <a:p>
-                      <a:pPr indent="0" marL="0">
-                        <a:buNone/>
-                      </a:pPr>
-                      <a:r>
-                        <a:rPr lang="en-US" sz="1400" dirty="0">
-                          <a:solidFill>
-                            <a:schemeClr val="tx1"/>
-                          </a:solidFill>
-                          <a:latin typeface="Calibri" pitchFamily="34" charset="0"/>
-                          <a:ea typeface="Calibri" pitchFamily="34" charset="-122"/>
-                          <a:cs typeface="Calibri" pitchFamily="34" charset="-120"/>
-                        </a:rPr>
-                        <a:t>Share captured on Nelo</a:t>
-                      </a:r>
-                      <a:endParaRPr lang="en-US" sz="1400" dirty="0">
+                      <a:endParaRPr lang="en-US" sz="1300" dirty="0">
                         <a:latin typeface="Calibri" charset="0"/>
                         <a:ea typeface="Calibri" charset="0"/>
                         <a:cs typeface="Calibri" charset="0"/>
@@ -11120,7 +12399,7 @@
                         <a:buNone/>
                       </a:pPr>
                       <a:r>
-                        <a:rPr lang="en-US" sz="1400" dirty="0">
+                        <a:rPr lang="en-US" sz="1300" dirty="0">
                           <a:solidFill>
                             <a:schemeClr val="tx1"/>
                           </a:solidFill>
@@ -11128,76 +12407,9 @@
                           <a:ea typeface="Calibri" pitchFamily="34" charset="-122"/>
                           <a:cs typeface="Calibri" pitchFamily="34" charset="-120"/>
                         </a:rPr>
-                        <a:t>40%</a:t>
+                        <a:t>$300</a:t>
                       </a:r>
-                      <a:endParaRPr lang="en-US" sz="1400" dirty="0">
-                        <a:latin typeface="Calibri" charset="0"/>
-                        <a:ea typeface="Calibri" charset="0"/>
-                        <a:cs typeface="Calibri" charset="0"/>
-                      </a:endParaRPr>
-                    </a:p>
-                  </a:txBody>
-                  <a:tcPr marL="91440" marR="91440" marT="45720" marB="45720">
-                    <a:lnL w="6350" cap="flat" cmpd="sng" algn="ctr">
-                      <a:solidFill>
-                        <a:srgbClr val="A9D8C2"/>
-                      </a:solidFill>
-                      <a:prstDash val="solid"/>
-                      <a:round/>
-                      <a:headEnd type="none" w="med" len="med"/>
-                      <a:tailEnd type="none" w="med" len="med"/>
-                    </a:lnL>
-                    <a:lnR w="6350" cap="flat" cmpd="sng" algn="ctr">
-                      <a:solidFill>
-                        <a:srgbClr val="A9D8C2"/>
-                      </a:solidFill>
-                      <a:prstDash val="solid"/>
-                      <a:round/>
-                      <a:headEnd type="none" w="med" len="med"/>
-                      <a:tailEnd type="none" w="med" len="med"/>
-                    </a:lnR>
-                    <a:lnT w="6350" cap="flat" cmpd="sng" algn="ctr">
-                      <a:solidFill>
-                        <a:srgbClr val="A9D8C2"/>
-                      </a:solidFill>
-                      <a:prstDash val="solid"/>
-                      <a:round/>
-                      <a:headEnd type="none" w="med" len="med"/>
-                      <a:tailEnd type="none" w="med" len="med"/>
-                    </a:lnT>
-                    <a:lnB w="6350" cap="flat" cmpd="sng" algn="ctr">
-                      <a:solidFill>
-                        <a:srgbClr val="A9D8C2"/>
-                      </a:solidFill>
-                      <a:prstDash val="solid"/>
-                      <a:round/>
-                      <a:headEnd type="none" w="med" len="med"/>
-                      <a:tailEnd type="none" w="med" len="med"/>
-                    </a:lnB>
-                  </a:tcPr>
-                </a:tc>
-              </a:tr>
-              <a:tr h="411480">
-                <a:tc>
-                  <a:txBody>
-                    <a:bodyPr/>
-                    <a:lstStyle/>
-                    <a:p>
-                      <a:pPr indent="0" marL="0">
-                        <a:buNone/>
-                      </a:pPr>
-                      <a:r>
-                        <a:rPr lang="en-US" sz="1400" dirty="0">
-                          <a:solidFill>
-                            <a:schemeClr val="tx1"/>
-                          </a:solidFill>
-                          <a:latin typeface="Calibri" pitchFamily="34" charset="0"/>
-                          <a:ea typeface="Calibri" pitchFamily="34" charset="-122"/>
-                          <a:cs typeface="Calibri" pitchFamily="34" charset="-120"/>
-                        </a:rPr>
-                        <a:t>Platform fee</a:t>
-                      </a:r>
-                      <a:endParaRPr lang="en-US" sz="1400" dirty="0">
+                      <a:endParaRPr lang="en-US" sz="1300" dirty="0">
                         <a:latin typeface="Calibri" charset="0"/>
                         <a:ea typeface="Calibri" charset="0"/>
                         <a:cs typeface="Calibri" charset="0"/>
@@ -11252,7 +12464,7 @@
                         <a:buNone/>
                       </a:pPr>
                       <a:r>
-                        <a:rPr lang="en-US" sz="1400" dirty="0">
+                        <a:rPr lang="en-US" sz="1300" dirty="0">
                           <a:solidFill>
                             <a:schemeClr val="tx1"/>
                           </a:solidFill>
@@ -11260,9 +12472,9 @@
                           <a:ea typeface="Calibri" pitchFamily="34" charset="-122"/>
                           <a:cs typeface="Calibri" pitchFamily="34" charset="-120"/>
                         </a:rPr>
-                        <a:t>0.50%</a:t>
+                        <a:t>$4,800</a:t>
                       </a:r>
-                      <a:endParaRPr lang="en-US" sz="1400" dirty="0">
+                      <a:endParaRPr lang="en-US" sz="1300" dirty="0">
                         <a:latin typeface="Calibri" charset="0"/>
                         <a:ea typeface="Calibri" charset="0"/>
                         <a:cs typeface="Calibri" charset="0"/>
@@ -11309,7 +12521,7 @@
                   </a:tcPr>
                 </a:tc>
               </a:tr>
-              <a:tr h="411480">
+              <a:tr h="384048">
                 <a:tc>
                   <a:txBody>
                     <a:bodyPr/>
@@ -11319,7 +12531,7 @@
                         <a:buNone/>
                       </a:pPr>
                       <a:r>
-                        <a:rPr lang="en-US" sz="1400" dirty="0">
+                        <a:rPr lang="en-US" sz="1300" dirty="0">
                           <a:solidFill>
                             <a:schemeClr val="tx1"/>
                           </a:solidFill>
@@ -11327,9 +12539,9 @@
                           <a:ea typeface="Calibri" pitchFamily="34" charset="-122"/>
                           <a:cs typeface="Calibri" pitchFamily="34" charset="-120"/>
                         </a:rPr>
-                        <a:t>Payout spread</a:t>
+                        <a:t>Restaurants, food and beverage</a:t>
                       </a:r>
-                      <a:endParaRPr lang="en-US" sz="1400" dirty="0">
+                      <a:endParaRPr lang="en-US" sz="1300" dirty="0">
                         <a:latin typeface="Calibri" charset="0"/>
                         <a:ea typeface="Calibri" charset="0"/>
                         <a:cs typeface="Calibri" charset="0"/>
@@ -11384,7 +12596,7 @@
                         <a:buNone/>
                       </a:pPr>
                       <a:r>
-                        <a:rPr lang="en-US" sz="1400" dirty="0">
+                        <a:rPr lang="en-US" sz="1300" dirty="0">
                           <a:solidFill>
                             <a:schemeClr val="tx1"/>
                           </a:solidFill>
@@ -11392,76 +12604,9 @@
                           <a:ea typeface="Calibri" pitchFamily="34" charset="-122"/>
                           <a:cs typeface="Calibri" pitchFamily="34" charset="-120"/>
                         </a:rPr>
-                        <a:t>0.50%</a:t>
+                        <a:t>20</a:t>
                       </a:r>
-                      <a:endParaRPr lang="en-US" sz="1400" dirty="0">
-                        <a:latin typeface="Calibri" charset="0"/>
-                        <a:ea typeface="Calibri" charset="0"/>
-                        <a:cs typeface="Calibri" charset="0"/>
-                      </a:endParaRPr>
-                    </a:p>
-                  </a:txBody>
-                  <a:tcPr marL="91440" marR="91440" marT="45720" marB="45720">
-                    <a:lnL w="6350" cap="flat" cmpd="sng" algn="ctr">
-                      <a:solidFill>
-                        <a:srgbClr val="A9D8C2"/>
-                      </a:solidFill>
-                      <a:prstDash val="solid"/>
-                      <a:round/>
-                      <a:headEnd type="none" w="med" len="med"/>
-                      <a:tailEnd type="none" w="med" len="med"/>
-                    </a:lnL>
-                    <a:lnR w="6350" cap="flat" cmpd="sng" algn="ctr">
-                      <a:solidFill>
-                        <a:srgbClr val="A9D8C2"/>
-                      </a:solidFill>
-                      <a:prstDash val="solid"/>
-                      <a:round/>
-                      <a:headEnd type="none" w="med" len="med"/>
-                      <a:tailEnd type="none" w="med" len="med"/>
-                    </a:lnR>
-                    <a:lnT w="6350" cap="flat" cmpd="sng" algn="ctr">
-                      <a:solidFill>
-                        <a:srgbClr val="A9D8C2"/>
-                      </a:solidFill>
-                      <a:prstDash val="solid"/>
-                      <a:round/>
-                      <a:headEnd type="none" w="med" len="med"/>
-                      <a:tailEnd type="none" w="med" len="med"/>
-                    </a:lnT>
-                    <a:lnB w="6350" cap="flat" cmpd="sng" algn="ctr">
-                      <a:solidFill>
-                        <a:srgbClr val="A9D8C2"/>
-                      </a:solidFill>
-                      <a:prstDash val="solid"/>
-                      <a:round/>
-                      <a:headEnd type="none" w="med" len="med"/>
-                      <a:tailEnd type="none" w="med" len="med"/>
-                    </a:lnB>
-                  </a:tcPr>
-                </a:tc>
-              </a:tr>
-              <a:tr h="411480">
-                <a:tc>
-                  <a:txBody>
-                    <a:bodyPr/>
-                    <a:lstStyle/>
-                    <a:p>
-                      <a:pPr indent="0" marL="0">
-                        <a:buNone/>
-                      </a:pPr>
-                      <a:r>
-                        <a:rPr lang="en-US" sz="1400" dirty="0">
-                          <a:solidFill>
-                            <a:schemeClr val="tx1"/>
-                          </a:solidFill>
-                          <a:latin typeface="Calibri" pitchFamily="34" charset="0"/>
-                          <a:ea typeface="Calibri" pitchFamily="34" charset="-122"/>
-                          <a:cs typeface="Calibri" pitchFamily="34" charset="-120"/>
-                        </a:rPr>
-                        <a:t>Less: insurance reserve</a:t>
-                      </a:r>
-                      <a:endParaRPr lang="en-US" sz="1400" dirty="0">
+                      <a:endParaRPr lang="en-US" sz="1300" dirty="0">
                         <a:latin typeface="Calibri" charset="0"/>
                         <a:ea typeface="Calibri" charset="0"/>
                         <a:cs typeface="Calibri" charset="0"/>
@@ -11516,7 +12661,7 @@
                         <a:buNone/>
                       </a:pPr>
                       <a:r>
-                        <a:rPr lang="en-US" sz="1400" dirty="0">
+                        <a:rPr lang="en-US" sz="1300" dirty="0">
                           <a:solidFill>
                             <a:schemeClr val="tx1"/>
                           </a:solidFill>
@@ -11524,76 +12669,9 @@
                           <a:ea typeface="Calibri" pitchFamily="34" charset="-122"/>
                           <a:cs typeface="Calibri" pitchFamily="34" charset="-120"/>
                         </a:rPr>
-                        <a:t>(0.29%)</a:t>
+                        <a:t>$1,200</a:t>
                       </a:r>
-                      <a:endParaRPr lang="en-US" sz="1400" dirty="0">
-                        <a:latin typeface="Calibri" charset="0"/>
-                        <a:ea typeface="Calibri" charset="0"/>
-                        <a:cs typeface="Calibri" charset="0"/>
-                      </a:endParaRPr>
-                    </a:p>
-                  </a:txBody>
-                  <a:tcPr marL="91440" marR="91440" marT="45720" marB="45720">
-                    <a:lnL w="6350" cap="flat" cmpd="sng" algn="ctr">
-                      <a:solidFill>
-                        <a:srgbClr val="A9D8C2"/>
-                      </a:solidFill>
-                      <a:prstDash val="solid"/>
-                      <a:round/>
-                      <a:headEnd type="none" w="med" len="med"/>
-                      <a:tailEnd type="none" w="med" len="med"/>
-                    </a:lnL>
-                    <a:lnR w="6350" cap="flat" cmpd="sng" algn="ctr">
-                      <a:solidFill>
-                        <a:srgbClr val="A9D8C2"/>
-                      </a:solidFill>
-                      <a:prstDash val="solid"/>
-                      <a:round/>
-                      <a:headEnd type="none" w="med" len="med"/>
-                      <a:tailEnd type="none" w="med" len="med"/>
-                    </a:lnR>
-                    <a:lnT w="6350" cap="flat" cmpd="sng" algn="ctr">
-                      <a:solidFill>
-                        <a:srgbClr val="A9D8C2"/>
-                      </a:solidFill>
-                      <a:prstDash val="solid"/>
-                      <a:round/>
-                      <a:headEnd type="none" w="med" len="med"/>
-                      <a:tailEnd type="none" w="med" len="med"/>
-                    </a:lnT>
-                    <a:lnB w="6350" cap="flat" cmpd="sng" algn="ctr">
-                      <a:solidFill>
-                        <a:srgbClr val="A9D8C2"/>
-                      </a:solidFill>
-                      <a:prstDash val="solid"/>
-                      <a:round/>
-                      <a:headEnd type="none" w="med" len="med"/>
-                      <a:tailEnd type="none" w="med" len="med"/>
-                    </a:lnB>
-                  </a:tcPr>
-                </a:tc>
-              </a:tr>
-              <a:tr h="411480">
-                <a:tc>
-                  <a:txBody>
-                    <a:bodyPr/>
-                    <a:lstStyle/>
-                    <a:p>
-                      <a:pPr indent="0" marL="0">
-                        <a:buNone/>
-                      </a:pPr>
-                      <a:r>
-                        <a:rPr lang="en-US" sz="1400" dirty="0">
-                          <a:solidFill>
-                            <a:schemeClr val="tx1"/>
-                          </a:solidFill>
-                          <a:latin typeface="Calibri" pitchFamily="34" charset="0"/>
-                          <a:ea typeface="Calibri" pitchFamily="34" charset="-122"/>
-                          <a:cs typeface="Calibri" pitchFamily="34" charset="-120"/>
-                        </a:rPr>
-                        <a:t>Less: Trust Stake rebate</a:t>
-                      </a:r>
-                      <a:endParaRPr lang="en-US" sz="1400" dirty="0">
+                      <a:endParaRPr lang="en-US" sz="1300" dirty="0">
                         <a:latin typeface="Calibri" charset="0"/>
                         <a:ea typeface="Calibri" charset="0"/>
                         <a:cs typeface="Calibri" charset="0"/>
@@ -11648,7 +12726,7 @@
                         <a:buNone/>
                       </a:pPr>
                       <a:r>
-                        <a:rPr lang="en-US" sz="1400" dirty="0">
+                        <a:rPr lang="en-US" sz="1300" dirty="0">
                           <a:solidFill>
                             <a:schemeClr val="tx1"/>
                           </a:solidFill>
@@ -11656,9 +12734,9 @@
                           <a:ea typeface="Calibri" pitchFamily="34" charset="-122"/>
                           <a:cs typeface="Calibri" pitchFamily="34" charset="-120"/>
                         </a:rPr>
-                        <a:t>(0.10%)</a:t>
+                        <a:t>$9,600</a:t>
                       </a:r>
-                      <a:endParaRPr lang="en-US" sz="1400" dirty="0">
+                      <a:endParaRPr lang="en-US" sz="1300" dirty="0">
                         <a:latin typeface="Calibri" charset="0"/>
                         <a:ea typeface="Calibri" charset="0"/>
                         <a:cs typeface="Calibri" charset="0"/>
@@ -11705,7 +12783,7 @@
                   </a:tcPr>
                 </a:tc>
               </a:tr>
-              <a:tr h="411480">
+              <a:tr h="384048">
                 <a:tc>
                   <a:txBody>
                     <a:bodyPr/>
@@ -11715,7 +12793,7 @@
                         <a:buNone/>
                       </a:pPr>
                       <a:r>
-                        <a:rPr lang="en-US" sz="1400" b="1" dirty="0">
+                        <a:rPr lang="en-US" sz="1300" dirty="0">
                           <a:solidFill>
                             <a:schemeClr val="tx1"/>
                           </a:solidFill>
@@ -11723,9 +12801,9 @@
                           <a:ea typeface="Calibri" pitchFamily="34" charset="-122"/>
                           <a:cs typeface="Calibri" pitchFamily="34" charset="-120"/>
                         </a:rPr>
-                        <a:t>Net take rate</a:t>
+                        <a:t>Logistics, couriers and taxis</a:t>
                       </a:r>
-                      <a:endParaRPr lang="en-US" sz="1400" dirty="0">
+                      <a:endParaRPr lang="en-US" sz="1300" dirty="0">
                         <a:latin typeface="Calibri" charset="0"/>
                         <a:ea typeface="Calibri" charset="0"/>
                         <a:cs typeface="Calibri" charset="0"/>
@@ -11780,7 +12858,7 @@
                         <a:buNone/>
                       </a:pPr>
                       <a:r>
-                        <a:rPr lang="en-US" sz="1400" b="1" dirty="0">
+                        <a:rPr lang="en-US" sz="1300" dirty="0">
                           <a:solidFill>
                             <a:schemeClr val="tx1"/>
                           </a:solidFill>
@@ -11788,76 +12866,9 @@
                           <a:ea typeface="Calibri" pitchFamily="34" charset="-122"/>
                           <a:cs typeface="Calibri" pitchFamily="34" charset="-120"/>
                         </a:rPr>
-                        <a:t>0.61%</a:t>
+                        <a:t>15</a:t>
                       </a:r>
-                      <a:endParaRPr lang="en-US" sz="1400" dirty="0">
-                        <a:latin typeface="Calibri" charset="0"/>
-                        <a:ea typeface="Calibri" charset="0"/>
-                        <a:cs typeface="Calibri" charset="0"/>
-                      </a:endParaRPr>
-                    </a:p>
-                  </a:txBody>
-                  <a:tcPr marL="91440" marR="91440" marT="45720" marB="45720">
-                    <a:lnL w="6350" cap="flat" cmpd="sng" algn="ctr">
-                      <a:solidFill>
-                        <a:srgbClr val="A9D8C2"/>
-                      </a:solidFill>
-                      <a:prstDash val="solid"/>
-                      <a:round/>
-                      <a:headEnd type="none" w="med" len="med"/>
-                      <a:tailEnd type="none" w="med" len="med"/>
-                    </a:lnL>
-                    <a:lnR w="6350" cap="flat" cmpd="sng" algn="ctr">
-                      <a:solidFill>
-                        <a:srgbClr val="A9D8C2"/>
-                      </a:solidFill>
-                      <a:prstDash val="solid"/>
-                      <a:round/>
-                      <a:headEnd type="none" w="med" len="med"/>
-                      <a:tailEnd type="none" w="med" len="med"/>
-                    </a:lnR>
-                    <a:lnT w="6350" cap="flat" cmpd="sng" algn="ctr">
-                      <a:solidFill>
-                        <a:srgbClr val="A9D8C2"/>
-                      </a:solidFill>
-                      <a:prstDash val="solid"/>
-                      <a:round/>
-                      <a:headEnd type="none" w="med" len="med"/>
-                      <a:tailEnd type="none" w="med" len="med"/>
-                    </a:lnT>
-                    <a:lnB w="6350" cap="flat" cmpd="sng" algn="ctr">
-                      <a:solidFill>
-                        <a:srgbClr val="A9D8C2"/>
-                      </a:solidFill>
-                      <a:prstDash val="solid"/>
-                      <a:round/>
-                      <a:headEnd type="none" w="med" len="med"/>
-                      <a:tailEnd type="none" w="med" len="med"/>
-                    </a:lnB>
-                  </a:tcPr>
-                </a:tc>
-              </a:tr>
-              <a:tr h="411480">
-                <a:tc>
-                  <a:txBody>
-                    <a:bodyPr/>
-                    <a:lstStyle/>
-                    <a:p>
-                      <a:pPr indent="0" marL="0">
-                        <a:buNone/>
-                      </a:pPr>
-                      <a:r>
-                        <a:rPr lang="en-US" sz="1400" b="1" dirty="0">
-                          <a:solidFill>
-                            <a:schemeClr val="tx1"/>
-                          </a:solidFill>
-                          <a:latin typeface="Calibri" pitchFamily="34" charset="0"/>
-                          <a:ea typeface="Calibri" pitchFamily="34" charset="-122"/>
-                          <a:cs typeface="Calibri" pitchFamily="34" charset="-120"/>
-                        </a:rPr>
-                        <a:t>Per merchant per month</a:t>
-                      </a:r>
-                      <a:endParaRPr lang="en-US" sz="1400" dirty="0">
+                      <a:endParaRPr lang="en-US" sz="1300" dirty="0">
                         <a:latin typeface="Calibri" charset="0"/>
                         <a:ea typeface="Calibri" charset="0"/>
                         <a:cs typeface="Calibri" charset="0"/>
@@ -11912,7 +12923,7 @@
                         <a:buNone/>
                       </a:pPr>
                       <a:r>
-                        <a:rPr lang="en-US" sz="1400" b="1" dirty="0">
+                        <a:rPr lang="en-US" sz="1300" dirty="0">
                           <a:solidFill>
                             <a:schemeClr val="tx1"/>
                           </a:solidFill>
@@ -11920,9 +12931,1122 @@
                           <a:ea typeface="Calibri" pitchFamily="34" charset="-122"/>
                           <a:cs typeface="Calibri" pitchFamily="34" charset="-120"/>
                         </a:rPr>
-                        <a:t>≈ $7</a:t>
+                        <a:t>$400</a:t>
                       </a:r>
-                      <a:endParaRPr lang="en-US" sz="1400" dirty="0">
+                      <a:endParaRPr lang="en-US" sz="1300" dirty="0">
+                        <a:latin typeface="Calibri" charset="0"/>
+                        <a:ea typeface="Calibri" charset="0"/>
+                        <a:cs typeface="Calibri" charset="0"/>
+                      </a:endParaRPr>
+                    </a:p>
+                  </a:txBody>
+                  <a:tcPr marL="91440" marR="91440" marT="45720" marB="45720">
+                    <a:lnL w="6350" cap="flat" cmpd="sng" algn="ctr">
+                      <a:solidFill>
+                        <a:srgbClr val="A9D8C2"/>
+                      </a:solidFill>
+                      <a:prstDash val="solid"/>
+                      <a:round/>
+                      <a:headEnd type="none" w="med" len="med"/>
+                      <a:tailEnd type="none" w="med" len="med"/>
+                    </a:lnL>
+                    <a:lnR w="6350" cap="flat" cmpd="sng" algn="ctr">
+                      <a:solidFill>
+                        <a:srgbClr val="A9D8C2"/>
+                      </a:solidFill>
+                      <a:prstDash val="solid"/>
+                      <a:round/>
+                      <a:headEnd type="none" w="med" len="med"/>
+                      <a:tailEnd type="none" w="med" len="med"/>
+                    </a:lnR>
+                    <a:lnT w="6350" cap="flat" cmpd="sng" algn="ctr">
+                      <a:solidFill>
+                        <a:srgbClr val="A9D8C2"/>
+                      </a:solidFill>
+                      <a:prstDash val="solid"/>
+                      <a:round/>
+                      <a:headEnd type="none" w="med" len="med"/>
+                      <a:tailEnd type="none" w="med" len="med"/>
+                    </a:lnT>
+                    <a:lnB w="6350" cap="flat" cmpd="sng" algn="ctr">
+                      <a:solidFill>
+                        <a:srgbClr val="A9D8C2"/>
+                      </a:solidFill>
+                      <a:prstDash val="solid"/>
+                      <a:round/>
+                      <a:headEnd type="none" w="med" len="med"/>
+                      <a:tailEnd type="none" w="med" len="med"/>
+                    </a:lnB>
+                  </a:tcPr>
+                </a:tc>
+                <a:tc>
+                  <a:txBody>
+                    <a:bodyPr/>
+                    <a:lstStyle/>
+                    <a:p>
+                      <a:pPr algn="r" indent="0" marL="0">
+                        <a:buNone/>
+                      </a:pPr>
+                      <a:r>
+                        <a:rPr lang="en-US" sz="1300" dirty="0">
+                          <a:solidFill>
+                            <a:schemeClr val="tx1"/>
+                          </a:solidFill>
+                          <a:latin typeface="Calibri" pitchFamily="34" charset="0"/>
+                          <a:ea typeface="Calibri" pitchFamily="34" charset="-122"/>
+                          <a:cs typeface="Calibri" pitchFamily="34" charset="-120"/>
+                        </a:rPr>
+                        <a:t>$2,400</a:t>
+                      </a:r>
+                      <a:endParaRPr lang="en-US" sz="1300" dirty="0">
+                        <a:latin typeface="Calibri" charset="0"/>
+                        <a:ea typeface="Calibri" charset="0"/>
+                        <a:cs typeface="Calibri" charset="0"/>
+                      </a:endParaRPr>
+                    </a:p>
+                  </a:txBody>
+                  <a:tcPr marL="91440" marR="91440" marT="45720" marB="45720">
+                    <a:lnL w="6350" cap="flat" cmpd="sng" algn="ctr">
+                      <a:solidFill>
+                        <a:srgbClr val="A9D8C2"/>
+                      </a:solidFill>
+                      <a:prstDash val="solid"/>
+                      <a:round/>
+                      <a:headEnd type="none" w="med" len="med"/>
+                      <a:tailEnd type="none" w="med" len="med"/>
+                    </a:lnL>
+                    <a:lnR w="6350" cap="flat" cmpd="sng" algn="ctr">
+                      <a:solidFill>
+                        <a:srgbClr val="A9D8C2"/>
+                      </a:solidFill>
+                      <a:prstDash val="solid"/>
+                      <a:round/>
+                      <a:headEnd type="none" w="med" len="med"/>
+                      <a:tailEnd type="none" w="med" len="med"/>
+                    </a:lnR>
+                    <a:lnT w="6350" cap="flat" cmpd="sng" algn="ctr">
+                      <a:solidFill>
+                        <a:srgbClr val="A9D8C2"/>
+                      </a:solidFill>
+                      <a:prstDash val="solid"/>
+                      <a:round/>
+                      <a:headEnd type="none" w="med" len="med"/>
+                      <a:tailEnd type="none" w="med" len="med"/>
+                    </a:lnT>
+                    <a:lnB w="6350" cap="flat" cmpd="sng" algn="ctr">
+                      <a:solidFill>
+                        <a:srgbClr val="A9D8C2"/>
+                      </a:solidFill>
+                      <a:prstDash val="solid"/>
+                      <a:round/>
+                      <a:headEnd type="none" w="med" len="med"/>
+                      <a:tailEnd type="none" w="med" len="med"/>
+                    </a:lnB>
+                  </a:tcPr>
+                </a:tc>
+              </a:tr>
+              <a:tr h="384048">
+                <a:tc>
+                  <a:txBody>
+                    <a:bodyPr/>
+                    <a:lstStyle/>
+                    <a:p>
+                      <a:pPr indent="0" marL="0">
+                        <a:buNone/>
+                      </a:pPr>
+                      <a:r>
+                        <a:rPr lang="en-US" sz="1300" dirty="0">
+                          <a:solidFill>
+                            <a:schemeClr val="tx1"/>
+                          </a:solidFill>
+                          <a:latin typeface="Calibri" pitchFamily="34" charset="0"/>
+                          <a:ea typeface="Calibri" pitchFamily="34" charset="-122"/>
+                          <a:cs typeface="Calibri" pitchFamily="34" charset="-120"/>
+                        </a:rPr>
+                        <a:t>Field services and on-site pros</a:t>
+                      </a:r>
+                      <a:endParaRPr lang="en-US" sz="1300" dirty="0">
+                        <a:latin typeface="Calibri" charset="0"/>
+                        <a:ea typeface="Calibri" charset="0"/>
+                        <a:cs typeface="Calibri" charset="0"/>
+                      </a:endParaRPr>
+                    </a:p>
+                  </a:txBody>
+                  <a:tcPr marL="91440" marR="91440" marT="45720" marB="45720">
+                    <a:lnL w="6350" cap="flat" cmpd="sng" algn="ctr">
+                      <a:solidFill>
+                        <a:srgbClr val="A9D8C2"/>
+                      </a:solidFill>
+                      <a:prstDash val="solid"/>
+                      <a:round/>
+                      <a:headEnd type="none" w="med" len="med"/>
+                      <a:tailEnd type="none" w="med" len="med"/>
+                    </a:lnL>
+                    <a:lnR w="6350" cap="flat" cmpd="sng" algn="ctr">
+                      <a:solidFill>
+                        <a:srgbClr val="A9D8C2"/>
+                      </a:solidFill>
+                      <a:prstDash val="solid"/>
+                      <a:round/>
+                      <a:headEnd type="none" w="med" len="med"/>
+                      <a:tailEnd type="none" w="med" len="med"/>
+                    </a:lnR>
+                    <a:lnT w="6350" cap="flat" cmpd="sng" algn="ctr">
+                      <a:solidFill>
+                        <a:srgbClr val="A9D8C2"/>
+                      </a:solidFill>
+                      <a:prstDash val="solid"/>
+                      <a:round/>
+                      <a:headEnd type="none" w="med" len="med"/>
+                      <a:tailEnd type="none" w="med" len="med"/>
+                    </a:lnT>
+                    <a:lnB w="6350" cap="flat" cmpd="sng" algn="ctr">
+                      <a:solidFill>
+                        <a:srgbClr val="A9D8C2"/>
+                      </a:solidFill>
+                      <a:prstDash val="solid"/>
+                      <a:round/>
+                      <a:headEnd type="none" w="med" len="med"/>
+                      <a:tailEnd type="none" w="med" len="med"/>
+                    </a:lnB>
+                  </a:tcPr>
+                </a:tc>
+                <a:tc>
+                  <a:txBody>
+                    <a:bodyPr/>
+                    <a:lstStyle/>
+                    <a:p>
+                      <a:pPr algn="r" indent="0" marL="0">
+                        <a:buNone/>
+                      </a:pPr>
+                      <a:r>
+                        <a:rPr lang="en-US" sz="1300" dirty="0">
+                          <a:solidFill>
+                            <a:schemeClr val="tx1"/>
+                          </a:solidFill>
+                          <a:latin typeface="Calibri" pitchFamily="34" charset="0"/>
+                          <a:ea typeface="Calibri" pitchFamily="34" charset="-122"/>
+                          <a:cs typeface="Calibri" pitchFamily="34" charset="-120"/>
+                        </a:rPr>
+                        <a:t>10</a:t>
+                      </a:r>
+                      <a:endParaRPr lang="en-US" sz="1300" dirty="0">
+                        <a:latin typeface="Calibri" charset="0"/>
+                        <a:ea typeface="Calibri" charset="0"/>
+                        <a:cs typeface="Calibri" charset="0"/>
+                      </a:endParaRPr>
+                    </a:p>
+                  </a:txBody>
+                  <a:tcPr marL="91440" marR="91440" marT="45720" marB="45720">
+                    <a:lnL w="6350" cap="flat" cmpd="sng" algn="ctr">
+                      <a:solidFill>
+                        <a:srgbClr val="A9D8C2"/>
+                      </a:solidFill>
+                      <a:prstDash val="solid"/>
+                      <a:round/>
+                      <a:headEnd type="none" w="med" len="med"/>
+                      <a:tailEnd type="none" w="med" len="med"/>
+                    </a:lnL>
+                    <a:lnR w="6350" cap="flat" cmpd="sng" algn="ctr">
+                      <a:solidFill>
+                        <a:srgbClr val="A9D8C2"/>
+                      </a:solidFill>
+                      <a:prstDash val="solid"/>
+                      <a:round/>
+                      <a:headEnd type="none" w="med" len="med"/>
+                      <a:tailEnd type="none" w="med" len="med"/>
+                    </a:lnR>
+                    <a:lnT w="6350" cap="flat" cmpd="sng" algn="ctr">
+                      <a:solidFill>
+                        <a:srgbClr val="A9D8C2"/>
+                      </a:solidFill>
+                      <a:prstDash val="solid"/>
+                      <a:round/>
+                      <a:headEnd type="none" w="med" len="med"/>
+                      <a:tailEnd type="none" w="med" len="med"/>
+                    </a:lnT>
+                    <a:lnB w="6350" cap="flat" cmpd="sng" algn="ctr">
+                      <a:solidFill>
+                        <a:srgbClr val="A9D8C2"/>
+                      </a:solidFill>
+                      <a:prstDash val="solid"/>
+                      <a:round/>
+                      <a:headEnd type="none" w="med" len="med"/>
+                      <a:tailEnd type="none" w="med" len="med"/>
+                    </a:lnB>
+                  </a:tcPr>
+                </a:tc>
+                <a:tc>
+                  <a:txBody>
+                    <a:bodyPr/>
+                    <a:lstStyle/>
+                    <a:p>
+                      <a:pPr algn="r" indent="0" marL="0">
+                        <a:buNone/>
+                      </a:pPr>
+                      <a:r>
+                        <a:rPr lang="en-US" sz="1300" dirty="0">
+                          <a:solidFill>
+                            <a:schemeClr val="tx1"/>
+                          </a:solidFill>
+                          <a:latin typeface="Calibri" pitchFamily="34" charset="0"/>
+                          <a:ea typeface="Calibri" pitchFamily="34" charset="-122"/>
+                          <a:cs typeface="Calibri" pitchFamily="34" charset="-120"/>
+                        </a:rPr>
+                        <a:t>$250</a:t>
+                      </a:r>
+                      <a:endParaRPr lang="en-US" sz="1300" dirty="0">
+                        <a:latin typeface="Calibri" charset="0"/>
+                        <a:ea typeface="Calibri" charset="0"/>
+                        <a:cs typeface="Calibri" charset="0"/>
+                      </a:endParaRPr>
+                    </a:p>
+                  </a:txBody>
+                  <a:tcPr marL="91440" marR="91440" marT="45720" marB="45720">
+                    <a:lnL w="6350" cap="flat" cmpd="sng" algn="ctr">
+                      <a:solidFill>
+                        <a:srgbClr val="A9D8C2"/>
+                      </a:solidFill>
+                      <a:prstDash val="solid"/>
+                      <a:round/>
+                      <a:headEnd type="none" w="med" len="med"/>
+                      <a:tailEnd type="none" w="med" len="med"/>
+                    </a:lnL>
+                    <a:lnR w="6350" cap="flat" cmpd="sng" algn="ctr">
+                      <a:solidFill>
+                        <a:srgbClr val="A9D8C2"/>
+                      </a:solidFill>
+                      <a:prstDash val="solid"/>
+                      <a:round/>
+                      <a:headEnd type="none" w="med" len="med"/>
+                      <a:tailEnd type="none" w="med" len="med"/>
+                    </a:lnR>
+                    <a:lnT w="6350" cap="flat" cmpd="sng" algn="ctr">
+                      <a:solidFill>
+                        <a:srgbClr val="A9D8C2"/>
+                      </a:solidFill>
+                      <a:prstDash val="solid"/>
+                      <a:round/>
+                      <a:headEnd type="none" w="med" len="med"/>
+                      <a:tailEnd type="none" w="med" len="med"/>
+                    </a:lnT>
+                    <a:lnB w="6350" cap="flat" cmpd="sng" algn="ctr">
+                      <a:solidFill>
+                        <a:srgbClr val="A9D8C2"/>
+                      </a:solidFill>
+                      <a:prstDash val="solid"/>
+                      <a:round/>
+                      <a:headEnd type="none" w="med" len="med"/>
+                      <a:tailEnd type="none" w="med" len="med"/>
+                    </a:lnB>
+                  </a:tcPr>
+                </a:tc>
+                <a:tc>
+                  <a:txBody>
+                    <a:bodyPr/>
+                    <a:lstStyle/>
+                    <a:p>
+                      <a:pPr algn="r" indent="0" marL="0">
+                        <a:buNone/>
+                      </a:pPr>
+                      <a:r>
+                        <a:rPr lang="en-US" sz="1300" dirty="0">
+                          <a:solidFill>
+                            <a:schemeClr val="tx1"/>
+                          </a:solidFill>
+                          <a:latin typeface="Calibri" pitchFamily="34" charset="0"/>
+                          <a:ea typeface="Calibri" pitchFamily="34" charset="-122"/>
+                          <a:cs typeface="Calibri" pitchFamily="34" charset="-120"/>
+                        </a:rPr>
+                        <a:t>$1,000</a:t>
+                      </a:r>
+                      <a:endParaRPr lang="en-US" sz="1300" dirty="0">
+                        <a:latin typeface="Calibri" charset="0"/>
+                        <a:ea typeface="Calibri" charset="0"/>
+                        <a:cs typeface="Calibri" charset="0"/>
+                      </a:endParaRPr>
+                    </a:p>
+                  </a:txBody>
+                  <a:tcPr marL="91440" marR="91440" marT="45720" marB="45720">
+                    <a:lnL w="6350" cap="flat" cmpd="sng" algn="ctr">
+                      <a:solidFill>
+                        <a:srgbClr val="A9D8C2"/>
+                      </a:solidFill>
+                      <a:prstDash val="solid"/>
+                      <a:round/>
+                      <a:headEnd type="none" w="med" len="med"/>
+                      <a:tailEnd type="none" w="med" len="med"/>
+                    </a:lnL>
+                    <a:lnR w="6350" cap="flat" cmpd="sng" algn="ctr">
+                      <a:solidFill>
+                        <a:srgbClr val="A9D8C2"/>
+                      </a:solidFill>
+                      <a:prstDash val="solid"/>
+                      <a:round/>
+                      <a:headEnd type="none" w="med" len="med"/>
+                      <a:tailEnd type="none" w="med" len="med"/>
+                    </a:lnR>
+                    <a:lnT w="6350" cap="flat" cmpd="sng" algn="ctr">
+                      <a:solidFill>
+                        <a:srgbClr val="A9D8C2"/>
+                      </a:solidFill>
+                      <a:prstDash val="solid"/>
+                      <a:round/>
+                      <a:headEnd type="none" w="med" len="med"/>
+                      <a:tailEnd type="none" w="med" len="med"/>
+                    </a:lnT>
+                    <a:lnB w="6350" cap="flat" cmpd="sng" algn="ctr">
+                      <a:solidFill>
+                        <a:srgbClr val="A9D8C2"/>
+                      </a:solidFill>
+                      <a:prstDash val="solid"/>
+                      <a:round/>
+                      <a:headEnd type="none" w="med" len="med"/>
+                      <a:tailEnd type="none" w="med" len="med"/>
+                    </a:lnB>
+                  </a:tcPr>
+                </a:tc>
+              </a:tr>
+              <a:tr h="384048">
+                <a:tc>
+                  <a:txBody>
+                    <a:bodyPr/>
+                    <a:lstStyle/>
+                    <a:p>
+                      <a:pPr indent="0" marL="0">
+                        <a:buNone/>
+                      </a:pPr>
+                      <a:r>
+                        <a:rPr lang="en-US" sz="1300" dirty="0">
+                          <a:solidFill>
+                            <a:schemeClr val="tx1"/>
+                          </a:solidFill>
+                          <a:latin typeface="Calibri" pitchFamily="34" charset="0"/>
+                          <a:ea typeface="Calibri" pitchFamily="34" charset="-122"/>
+                          <a:cs typeface="Calibri" pitchFamily="34" charset="-120"/>
+                        </a:rPr>
+                        <a:t>Fashion and luxury jewellery</a:t>
+                      </a:r>
+                      <a:endParaRPr lang="en-US" sz="1300" dirty="0">
+                        <a:latin typeface="Calibri" charset="0"/>
+                        <a:ea typeface="Calibri" charset="0"/>
+                        <a:cs typeface="Calibri" charset="0"/>
+                      </a:endParaRPr>
+                    </a:p>
+                  </a:txBody>
+                  <a:tcPr marL="91440" marR="91440" marT="45720" marB="45720">
+                    <a:lnL w="6350" cap="flat" cmpd="sng" algn="ctr">
+                      <a:solidFill>
+                        <a:srgbClr val="A9D8C2"/>
+                      </a:solidFill>
+                      <a:prstDash val="solid"/>
+                      <a:round/>
+                      <a:headEnd type="none" w="med" len="med"/>
+                      <a:tailEnd type="none" w="med" len="med"/>
+                    </a:lnL>
+                    <a:lnR w="6350" cap="flat" cmpd="sng" algn="ctr">
+                      <a:solidFill>
+                        <a:srgbClr val="A9D8C2"/>
+                      </a:solidFill>
+                      <a:prstDash val="solid"/>
+                      <a:round/>
+                      <a:headEnd type="none" w="med" len="med"/>
+                      <a:tailEnd type="none" w="med" len="med"/>
+                    </a:lnR>
+                    <a:lnT w="6350" cap="flat" cmpd="sng" algn="ctr">
+                      <a:solidFill>
+                        <a:srgbClr val="A9D8C2"/>
+                      </a:solidFill>
+                      <a:prstDash val="solid"/>
+                      <a:round/>
+                      <a:headEnd type="none" w="med" len="med"/>
+                      <a:tailEnd type="none" w="med" len="med"/>
+                    </a:lnT>
+                    <a:lnB w="6350" cap="flat" cmpd="sng" algn="ctr">
+                      <a:solidFill>
+                        <a:srgbClr val="A9D8C2"/>
+                      </a:solidFill>
+                      <a:prstDash val="solid"/>
+                      <a:round/>
+                      <a:headEnd type="none" w="med" len="med"/>
+                      <a:tailEnd type="none" w="med" len="med"/>
+                    </a:lnB>
+                  </a:tcPr>
+                </a:tc>
+                <a:tc>
+                  <a:txBody>
+                    <a:bodyPr/>
+                    <a:lstStyle/>
+                    <a:p>
+                      <a:pPr algn="r" indent="0" marL="0">
+                        <a:buNone/>
+                      </a:pPr>
+                      <a:r>
+                        <a:rPr lang="en-US" sz="1300" dirty="0">
+                          <a:solidFill>
+                            <a:schemeClr val="tx1"/>
+                          </a:solidFill>
+                          <a:latin typeface="Calibri" pitchFamily="34" charset="0"/>
+                          <a:ea typeface="Calibri" pitchFamily="34" charset="-122"/>
+                          <a:cs typeface="Calibri" pitchFamily="34" charset="-120"/>
+                        </a:rPr>
+                        <a:t>10</a:t>
+                      </a:r>
+                      <a:endParaRPr lang="en-US" sz="1300" dirty="0">
+                        <a:latin typeface="Calibri" charset="0"/>
+                        <a:ea typeface="Calibri" charset="0"/>
+                        <a:cs typeface="Calibri" charset="0"/>
+                      </a:endParaRPr>
+                    </a:p>
+                  </a:txBody>
+                  <a:tcPr marL="91440" marR="91440" marT="45720" marB="45720">
+                    <a:lnL w="6350" cap="flat" cmpd="sng" algn="ctr">
+                      <a:solidFill>
+                        <a:srgbClr val="A9D8C2"/>
+                      </a:solidFill>
+                      <a:prstDash val="solid"/>
+                      <a:round/>
+                      <a:headEnd type="none" w="med" len="med"/>
+                      <a:tailEnd type="none" w="med" len="med"/>
+                    </a:lnL>
+                    <a:lnR w="6350" cap="flat" cmpd="sng" algn="ctr">
+                      <a:solidFill>
+                        <a:srgbClr val="A9D8C2"/>
+                      </a:solidFill>
+                      <a:prstDash val="solid"/>
+                      <a:round/>
+                      <a:headEnd type="none" w="med" len="med"/>
+                      <a:tailEnd type="none" w="med" len="med"/>
+                    </a:lnR>
+                    <a:lnT w="6350" cap="flat" cmpd="sng" algn="ctr">
+                      <a:solidFill>
+                        <a:srgbClr val="A9D8C2"/>
+                      </a:solidFill>
+                      <a:prstDash val="solid"/>
+                      <a:round/>
+                      <a:headEnd type="none" w="med" len="med"/>
+                      <a:tailEnd type="none" w="med" len="med"/>
+                    </a:lnT>
+                    <a:lnB w="6350" cap="flat" cmpd="sng" algn="ctr">
+                      <a:solidFill>
+                        <a:srgbClr val="A9D8C2"/>
+                      </a:solidFill>
+                      <a:prstDash val="solid"/>
+                      <a:round/>
+                      <a:headEnd type="none" w="med" len="med"/>
+                      <a:tailEnd type="none" w="med" len="med"/>
+                    </a:lnB>
+                  </a:tcPr>
+                </a:tc>
+                <a:tc>
+                  <a:txBody>
+                    <a:bodyPr/>
+                    <a:lstStyle/>
+                    <a:p>
+                      <a:pPr algn="r" indent="0" marL="0">
+                        <a:buNone/>
+                      </a:pPr>
+                      <a:r>
+                        <a:rPr lang="en-US" sz="1300" dirty="0">
+                          <a:solidFill>
+                            <a:schemeClr val="tx1"/>
+                          </a:solidFill>
+                          <a:latin typeface="Calibri" pitchFamily="34" charset="0"/>
+                          <a:ea typeface="Calibri" pitchFamily="34" charset="-122"/>
+                          <a:cs typeface="Calibri" pitchFamily="34" charset="-120"/>
+                        </a:rPr>
+                        <a:t>$2,000</a:t>
+                      </a:r>
+                      <a:endParaRPr lang="en-US" sz="1300" dirty="0">
+                        <a:latin typeface="Calibri" charset="0"/>
+                        <a:ea typeface="Calibri" charset="0"/>
+                        <a:cs typeface="Calibri" charset="0"/>
+                      </a:endParaRPr>
+                    </a:p>
+                  </a:txBody>
+                  <a:tcPr marL="91440" marR="91440" marT="45720" marB="45720">
+                    <a:lnL w="6350" cap="flat" cmpd="sng" algn="ctr">
+                      <a:solidFill>
+                        <a:srgbClr val="A9D8C2"/>
+                      </a:solidFill>
+                      <a:prstDash val="solid"/>
+                      <a:round/>
+                      <a:headEnd type="none" w="med" len="med"/>
+                      <a:tailEnd type="none" w="med" len="med"/>
+                    </a:lnL>
+                    <a:lnR w="6350" cap="flat" cmpd="sng" algn="ctr">
+                      <a:solidFill>
+                        <a:srgbClr val="A9D8C2"/>
+                      </a:solidFill>
+                      <a:prstDash val="solid"/>
+                      <a:round/>
+                      <a:headEnd type="none" w="med" len="med"/>
+                      <a:tailEnd type="none" w="med" len="med"/>
+                    </a:lnR>
+                    <a:lnT w="6350" cap="flat" cmpd="sng" algn="ctr">
+                      <a:solidFill>
+                        <a:srgbClr val="A9D8C2"/>
+                      </a:solidFill>
+                      <a:prstDash val="solid"/>
+                      <a:round/>
+                      <a:headEnd type="none" w="med" len="med"/>
+                      <a:tailEnd type="none" w="med" len="med"/>
+                    </a:lnT>
+                    <a:lnB w="6350" cap="flat" cmpd="sng" algn="ctr">
+                      <a:solidFill>
+                        <a:srgbClr val="A9D8C2"/>
+                      </a:solidFill>
+                      <a:prstDash val="solid"/>
+                      <a:round/>
+                      <a:headEnd type="none" w="med" len="med"/>
+                      <a:tailEnd type="none" w="med" len="med"/>
+                    </a:lnB>
+                  </a:tcPr>
+                </a:tc>
+                <a:tc>
+                  <a:txBody>
+                    <a:bodyPr/>
+                    <a:lstStyle/>
+                    <a:p>
+                      <a:pPr algn="r" indent="0" marL="0">
+                        <a:buNone/>
+                      </a:pPr>
+                      <a:r>
+                        <a:rPr lang="en-US" sz="1300" dirty="0">
+                          <a:solidFill>
+                            <a:schemeClr val="tx1"/>
+                          </a:solidFill>
+                          <a:latin typeface="Calibri" pitchFamily="34" charset="0"/>
+                          <a:ea typeface="Calibri" pitchFamily="34" charset="-122"/>
+                          <a:cs typeface="Calibri" pitchFamily="34" charset="-120"/>
+                        </a:rPr>
+                        <a:t>$8,000</a:t>
+                      </a:r>
+                      <a:endParaRPr lang="en-US" sz="1300" dirty="0">
+                        <a:latin typeface="Calibri" charset="0"/>
+                        <a:ea typeface="Calibri" charset="0"/>
+                        <a:cs typeface="Calibri" charset="0"/>
+                      </a:endParaRPr>
+                    </a:p>
+                  </a:txBody>
+                  <a:tcPr marL="91440" marR="91440" marT="45720" marB="45720">
+                    <a:lnL w="6350" cap="flat" cmpd="sng" algn="ctr">
+                      <a:solidFill>
+                        <a:srgbClr val="A9D8C2"/>
+                      </a:solidFill>
+                      <a:prstDash val="solid"/>
+                      <a:round/>
+                      <a:headEnd type="none" w="med" len="med"/>
+                      <a:tailEnd type="none" w="med" len="med"/>
+                    </a:lnL>
+                    <a:lnR w="6350" cap="flat" cmpd="sng" algn="ctr">
+                      <a:solidFill>
+                        <a:srgbClr val="A9D8C2"/>
+                      </a:solidFill>
+                      <a:prstDash val="solid"/>
+                      <a:round/>
+                      <a:headEnd type="none" w="med" len="med"/>
+                      <a:tailEnd type="none" w="med" len="med"/>
+                    </a:lnR>
+                    <a:lnT w="6350" cap="flat" cmpd="sng" algn="ctr">
+                      <a:solidFill>
+                        <a:srgbClr val="A9D8C2"/>
+                      </a:solidFill>
+                      <a:prstDash val="solid"/>
+                      <a:round/>
+                      <a:headEnd type="none" w="med" len="med"/>
+                      <a:tailEnd type="none" w="med" len="med"/>
+                    </a:lnT>
+                    <a:lnB w="6350" cap="flat" cmpd="sng" algn="ctr">
+                      <a:solidFill>
+                        <a:srgbClr val="A9D8C2"/>
+                      </a:solidFill>
+                      <a:prstDash val="solid"/>
+                      <a:round/>
+                      <a:headEnd type="none" w="med" len="med"/>
+                      <a:tailEnd type="none" w="med" len="med"/>
+                    </a:lnB>
+                  </a:tcPr>
+                </a:tc>
+              </a:tr>
+              <a:tr h="384048">
+                <a:tc>
+                  <a:txBody>
+                    <a:bodyPr/>
+                    <a:lstStyle/>
+                    <a:p>
+                      <a:pPr indent="0" marL="0">
+                        <a:buNone/>
+                      </a:pPr>
+                      <a:r>
+                        <a:rPr lang="en-US" sz="1300" dirty="0">
+                          <a:solidFill>
+                            <a:schemeClr val="tx1"/>
+                          </a:solidFill>
+                          <a:latin typeface="Calibri" pitchFamily="34" charset="0"/>
+                          <a:ea typeface="Calibri" pitchFamily="34" charset="-122"/>
+                          <a:cs typeface="Calibri" pitchFamily="34" charset="-120"/>
+                        </a:rPr>
+                        <a:t>Supermarkets, superstores, malls</a:t>
+                      </a:r>
+                      <a:endParaRPr lang="en-US" sz="1300" dirty="0">
+                        <a:latin typeface="Calibri" charset="0"/>
+                        <a:ea typeface="Calibri" charset="0"/>
+                        <a:cs typeface="Calibri" charset="0"/>
+                      </a:endParaRPr>
+                    </a:p>
+                  </a:txBody>
+                  <a:tcPr marL="91440" marR="91440" marT="45720" marB="45720">
+                    <a:lnL w="6350" cap="flat" cmpd="sng" algn="ctr">
+                      <a:solidFill>
+                        <a:srgbClr val="A9D8C2"/>
+                      </a:solidFill>
+                      <a:prstDash val="solid"/>
+                      <a:round/>
+                      <a:headEnd type="none" w="med" len="med"/>
+                      <a:tailEnd type="none" w="med" len="med"/>
+                    </a:lnL>
+                    <a:lnR w="6350" cap="flat" cmpd="sng" algn="ctr">
+                      <a:solidFill>
+                        <a:srgbClr val="A9D8C2"/>
+                      </a:solidFill>
+                      <a:prstDash val="solid"/>
+                      <a:round/>
+                      <a:headEnd type="none" w="med" len="med"/>
+                      <a:tailEnd type="none" w="med" len="med"/>
+                    </a:lnR>
+                    <a:lnT w="6350" cap="flat" cmpd="sng" algn="ctr">
+                      <a:solidFill>
+                        <a:srgbClr val="A9D8C2"/>
+                      </a:solidFill>
+                      <a:prstDash val="solid"/>
+                      <a:round/>
+                      <a:headEnd type="none" w="med" len="med"/>
+                      <a:tailEnd type="none" w="med" len="med"/>
+                    </a:lnT>
+                    <a:lnB w="6350" cap="flat" cmpd="sng" algn="ctr">
+                      <a:solidFill>
+                        <a:srgbClr val="A9D8C2"/>
+                      </a:solidFill>
+                      <a:prstDash val="solid"/>
+                      <a:round/>
+                      <a:headEnd type="none" w="med" len="med"/>
+                      <a:tailEnd type="none" w="med" len="med"/>
+                    </a:lnB>
+                  </a:tcPr>
+                </a:tc>
+                <a:tc>
+                  <a:txBody>
+                    <a:bodyPr/>
+                    <a:lstStyle/>
+                    <a:p>
+                      <a:pPr algn="r" indent="0" marL="0">
+                        <a:buNone/>
+                      </a:pPr>
+                      <a:r>
+                        <a:rPr lang="en-US" sz="1300" dirty="0">
+                          <a:solidFill>
+                            <a:schemeClr val="tx1"/>
+                          </a:solidFill>
+                          <a:latin typeface="Calibri" pitchFamily="34" charset="0"/>
+                          <a:ea typeface="Calibri" pitchFamily="34" charset="-122"/>
+                          <a:cs typeface="Calibri" pitchFamily="34" charset="-120"/>
+                        </a:rPr>
+                        <a:t>5</a:t>
+                      </a:r>
+                      <a:endParaRPr lang="en-US" sz="1300" dirty="0">
+                        <a:latin typeface="Calibri" charset="0"/>
+                        <a:ea typeface="Calibri" charset="0"/>
+                        <a:cs typeface="Calibri" charset="0"/>
+                      </a:endParaRPr>
+                    </a:p>
+                  </a:txBody>
+                  <a:tcPr marL="91440" marR="91440" marT="45720" marB="45720">
+                    <a:lnL w="6350" cap="flat" cmpd="sng" algn="ctr">
+                      <a:solidFill>
+                        <a:srgbClr val="A9D8C2"/>
+                      </a:solidFill>
+                      <a:prstDash val="solid"/>
+                      <a:round/>
+                      <a:headEnd type="none" w="med" len="med"/>
+                      <a:tailEnd type="none" w="med" len="med"/>
+                    </a:lnL>
+                    <a:lnR w="6350" cap="flat" cmpd="sng" algn="ctr">
+                      <a:solidFill>
+                        <a:srgbClr val="A9D8C2"/>
+                      </a:solidFill>
+                      <a:prstDash val="solid"/>
+                      <a:round/>
+                      <a:headEnd type="none" w="med" len="med"/>
+                      <a:tailEnd type="none" w="med" len="med"/>
+                    </a:lnR>
+                    <a:lnT w="6350" cap="flat" cmpd="sng" algn="ctr">
+                      <a:solidFill>
+                        <a:srgbClr val="A9D8C2"/>
+                      </a:solidFill>
+                      <a:prstDash val="solid"/>
+                      <a:round/>
+                      <a:headEnd type="none" w="med" len="med"/>
+                      <a:tailEnd type="none" w="med" len="med"/>
+                    </a:lnT>
+                    <a:lnB w="6350" cap="flat" cmpd="sng" algn="ctr">
+                      <a:solidFill>
+                        <a:srgbClr val="A9D8C2"/>
+                      </a:solidFill>
+                      <a:prstDash val="solid"/>
+                      <a:round/>
+                      <a:headEnd type="none" w="med" len="med"/>
+                      <a:tailEnd type="none" w="med" len="med"/>
+                    </a:lnB>
+                  </a:tcPr>
+                </a:tc>
+                <a:tc>
+                  <a:txBody>
+                    <a:bodyPr/>
+                    <a:lstStyle/>
+                    <a:p>
+                      <a:pPr algn="r" indent="0" marL="0">
+                        <a:buNone/>
+                      </a:pPr>
+                      <a:r>
+                        <a:rPr lang="en-US" sz="1300" dirty="0">
+                          <a:solidFill>
+                            <a:schemeClr val="tx1"/>
+                          </a:solidFill>
+                          <a:latin typeface="Calibri" pitchFamily="34" charset="0"/>
+                          <a:ea typeface="Calibri" pitchFamily="34" charset="-122"/>
+                          <a:cs typeface="Calibri" pitchFamily="34" charset="-120"/>
+                        </a:rPr>
+                        <a:t>$5,000</a:t>
+                      </a:r>
+                      <a:endParaRPr lang="en-US" sz="1300" dirty="0">
+                        <a:latin typeface="Calibri" charset="0"/>
+                        <a:ea typeface="Calibri" charset="0"/>
+                        <a:cs typeface="Calibri" charset="0"/>
+                      </a:endParaRPr>
+                    </a:p>
+                  </a:txBody>
+                  <a:tcPr marL="91440" marR="91440" marT="45720" marB="45720">
+                    <a:lnL w="6350" cap="flat" cmpd="sng" algn="ctr">
+                      <a:solidFill>
+                        <a:srgbClr val="A9D8C2"/>
+                      </a:solidFill>
+                      <a:prstDash val="solid"/>
+                      <a:round/>
+                      <a:headEnd type="none" w="med" len="med"/>
+                      <a:tailEnd type="none" w="med" len="med"/>
+                    </a:lnL>
+                    <a:lnR w="6350" cap="flat" cmpd="sng" algn="ctr">
+                      <a:solidFill>
+                        <a:srgbClr val="A9D8C2"/>
+                      </a:solidFill>
+                      <a:prstDash val="solid"/>
+                      <a:round/>
+                      <a:headEnd type="none" w="med" len="med"/>
+                      <a:tailEnd type="none" w="med" len="med"/>
+                    </a:lnR>
+                    <a:lnT w="6350" cap="flat" cmpd="sng" algn="ctr">
+                      <a:solidFill>
+                        <a:srgbClr val="A9D8C2"/>
+                      </a:solidFill>
+                      <a:prstDash val="solid"/>
+                      <a:round/>
+                      <a:headEnd type="none" w="med" len="med"/>
+                      <a:tailEnd type="none" w="med" len="med"/>
+                    </a:lnT>
+                    <a:lnB w="6350" cap="flat" cmpd="sng" algn="ctr">
+                      <a:solidFill>
+                        <a:srgbClr val="A9D8C2"/>
+                      </a:solidFill>
+                      <a:prstDash val="solid"/>
+                      <a:round/>
+                      <a:headEnd type="none" w="med" len="med"/>
+                      <a:tailEnd type="none" w="med" len="med"/>
+                    </a:lnB>
+                  </a:tcPr>
+                </a:tc>
+                <a:tc>
+                  <a:txBody>
+                    <a:bodyPr/>
+                    <a:lstStyle/>
+                    <a:p>
+                      <a:pPr algn="r" indent="0" marL="0">
+                        <a:buNone/>
+                      </a:pPr>
+                      <a:r>
+                        <a:rPr lang="en-US" sz="1300" dirty="0">
+                          <a:solidFill>
+                            <a:schemeClr val="tx1"/>
+                          </a:solidFill>
+                          <a:latin typeface="Calibri" pitchFamily="34" charset="0"/>
+                          <a:ea typeface="Calibri" pitchFamily="34" charset="-122"/>
+                          <a:cs typeface="Calibri" pitchFamily="34" charset="-120"/>
+                        </a:rPr>
+                        <a:t>$10,000</a:t>
+                      </a:r>
+                      <a:endParaRPr lang="en-US" sz="1300" dirty="0">
+                        <a:latin typeface="Calibri" charset="0"/>
+                        <a:ea typeface="Calibri" charset="0"/>
+                        <a:cs typeface="Calibri" charset="0"/>
+                      </a:endParaRPr>
+                    </a:p>
+                  </a:txBody>
+                  <a:tcPr marL="91440" marR="91440" marT="45720" marB="45720">
+                    <a:lnL w="6350" cap="flat" cmpd="sng" algn="ctr">
+                      <a:solidFill>
+                        <a:srgbClr val="A9D8C2"/>
+                      </a:solidFill>
+                      <a:prstDash val="solid"/>
+                      <a:round/>
+                      <a:headEnd type="none" w="med" len="med"/>
+                      <a:tailEnd type="none" w="med" len="med"/>
+                    </a:lnL>
+                    <a:lnR w="6350" cap="flat" cmpd="sng" algn="ctr">
+                      <a:solidFill>
+                        <a:srgbClr val="A9D8C2"/>
+                      </a:solidFill>
+                      <a:prstDash val="solid"/>
+                      <a:round/>
+                      <a:headEnd type="none" w="med" len="med"/>
+                      <a:tailEnd type="none" w="med" len="med"/>
+                    </a:lnR>
+                    <a:lnT w="6350" cap="flat" cmpd="sng" algn="ctr">
+                      <a:solidFill>
+                        <a:srgbClr val="A9D8C2"/>
+                      </a:solidFill>
+                      <a:prstDash val="solid"/>
+                      <a:round/>
+                      <a:headEnd type="none" w="med" len="med"/>
+                      <a:tailEnd type="none" w="med" len="med"/>
+                    </a:lnT>
+                    <a:lnB w="6350" cap="flat" cmpd="sng" algn="ctr">
+                      <a:solidFill>
+                        <a:srgbClr val="A9D8C2"/>
+                      </a:solidFill>
+                      <a:prstDash val="solid"/>
+                      <a:round/>
+                      <a:headEnd type="none" w="med" len="med"/>
+                      <a:tailEnd type="none" w="med" len="med"/>
+                    </a:lnB>
+                  </a:tcPr>
+                </a:tc>
+              </a:tr>
+              <a:tr h="384048">
+                <a:tc>
+                  <a:txBody>
+                    <a:bodyPr/>
+                    <a:lstStyle/>
+                    <a:p>
+                      <a:pPr indent="0" marL="0">
+                        <a:buNone/>
+                      </a:pPr>
+                      <a:r>
+                        <a:rPr lang="en-US" sz="1300" b="1" dirty="0">
+                          <a:solidFill>
+                            <a:schemeClr val="tx1"/>
+                          </a:solidFill>
+                          <a:latin typeface="Calibri" pitchFamily="34" charset="0"/>
+                          <a:ea typeface="Calibri" pitchFamily="34" charset="-122"/>
+                          <a:cs typeface="Calibri" pitchFamily="34" charset="-120"/>
+                        </a:rPr>
+                        <a:t>100 businesses</a:t>
+                      </a:r>
+                      <a:endParaRPr lang="en-US" sz="1300" dirty="0">
+                        <a:latin typeface="Calibri" charset="0"/>
+                        <a:ea typeface="Calibri" charset="0"/>
+                        <a:cs typeface="Calibri" charset="0"/>
+                      </a:endParaRPr>
+                    </a:p>
+                  </a:txBody>
+                  <a:tcPr marL="91440" marR="91440" marT="45720" marB="45720">
+                    <a:lnL w="6350" cap="flat" cmpd="sng" algn="ctr">
+                      <a:solidFill>
+                        <a:srgbClr val="A9D8C2"/>
+                      </a:solidFill>
+                      <a:prstDash val="solid"/>
+                      <a:round/>
+                      <a:headEnd type="none" w="med" len="med"/>
+                      <a:tailEnd type="none" w="med" len="med"/>
+                    </a:lnL>
+                    <a:lnR w="6350" cap="flat" cmpd="sng" algn="ctr">
+                      <a:solidFill>
+                        <a:srgbClr val="A9D8C2"/>
+                      </a:solidFill>
+                      <a:prstDash val="solid"/>
+                      <a:round/>
+                      <a:headEnd type="none" w="med" len="med"/>
+                      <a:tailEnd type="none" w="med" len="med"/>
+                    </a:lnR>
+                    <a:lnT w="6350" cap="flat" cmpd="sng" algn="ctr">
+                      <a:solidFill>
+                        <a:srgbClr val="A9D8C2"/>
+                      </a:solidFill>
+                      <a:prstDash val="solid"/>
+                      <a:round/>
+                      <a:headEnd type="none" w="med" len="med"/>
+                      <a:tailEnd type="none" w="med" len="med"/>
+                    </a:lnT>
+                    <a:lnB w="6350" cap="flat" cmpd="sng" algn="ctr">
+                      <a:solidFill>
+                        <a:srgbClr val="A9D8C2"/>
+                      </a:solidFill>
+                      <a:prstDash val="solid"/>
+                      <a:round/>
+                      <a:headEnd type="none" w="med" len="med"/>
+                      <a:tailEnd type="none" w="med" len="med"/>
+                    </a:lnB>
+                  </a:tcPr>
+                </a:tc>
+                <a:tc>
+                  <a:txBody>
+                    <a:bodyPr/>
+                    <a:lstStyle/>
+                    <a:p>
+                      <a:pPr algn="r" indent="0" marL="0">
+                        <a:buNone/>
+                      </a:pPr>
+                      <a:r>
+                        <a:rPr lang="en-US" sz="1300" b="1" dirty="0">
+                          <a:solidFill>
+                            <a:schemeClr val="tx1"/>
+                          </a:solidFill>
+                          <a:latin typeface="Calibri" pitchFamily="34" charset="0"/>
+                          <a:ea typeface="Calibri" pitchFamily="34" charset="-122"/>
+                          <a:cs typeface="Calibri" pitchFamily="34" charset="-120"/>
+                        </a:rPr>
+                        <a:t>100</a:t>
+                      </a:r>
+                      <a:endParaRPr lang="en-US" sz="1300" dirty="0">
+                        <a:latin typeface="Calibri" charset="0"/>
+                        <a:ea typeface="Calibri" charset="0"/>
+                        <a:cs typeface="Calibri" charset="0"/>
+                      </a:endParaRPr>
+                    </a:p>
+                  </a:txBody>
+                  <a:tcPr marL="91440" marR="91440" marT="45720" marB="45720">
+                    <a:lnL w="6350" cap="flat" cmpd="sng" algn="ctr">
+                      <a:solidFill>
+                        <a:srgbClr val="A9D8C2"/>
+                      </a:solidFill>
+                      <a:prstDash val="solid"/>
+                      <a:round/>
+                      <a:headEnd type="none" w="med" len="med"/>
+                      <a:tailEnd type="none" w="med" len="med"/>
+                    </a:lnL>
+                    <a:lnR w="6350" cap="flat" cmpd="sng" algn="ctr">
+                      <a:solidFill>
+                        <a:srgbClr val="A9D8C2"/>
+                      </a:solidFill>
+                      <a:prstDash val="solid"/>
+                      <a:round/>
+                      <a:headEnd type="none" w="med" len="med"/>
+                      <a:tailEnd type="none" w="med" len="med"/>
+                    </a:lnR>
+                    <a:lnT w="6350" cap="flat" cmpd="sng" algn="ctr">
+                      <a:solidFill>
+                        <a:srgbClr val="A9D8C2"/>
+                      </a:solidFill>
+                      <a:prstDash val="solid"/>
+                      <a:round/>
+                      <a:headEnd type="none" w="med" len="med"/>
+                      <a:tailEnd type="none" w="med" len="med"/>
+                    </a:lnT>
+                    <a:lnB w="6350" cap="flat" cmpd="sng" algn="ctr">
+                      <a:solidFill>
+                        <a:srgbClr val="A9D8C2"/>
+                      </a:solidFill>
+                      <a:prstDash val="solid"/>
+                      <a:round/>
+                      <a:headEnd type="none" w="med" len="med"/>
+                      <a:tailEnd type="none" w="med" len="med"/>
+                    </a:lnB>
+                  </a:tcPr>
+                </a:tc>
+                <a:tc>
+                  <a:txBody>
+                    <a:bodyPr/>
+                    <a:lstStyle/>
+                    <a:p>
+                      <a:pPr algn="r" indent="0" marL="0">
+                        <a:buNone/>
+                      </a:pPr>
+                      <a:r>
+                        <a:rPr lang="en-US" sz="1300" b="1" dirty="0">
+                          <a:solidFill>
+                            <a:schemeClr val="tx1"/>
+                          </a:solidFill>
+                          <a:latin typeface="Calibri" pitchFamily="34" charset="0"/>
+                          <a:ea typeface="Calibri" pitchFamily="34" charset="-122"/>
+                          <a:cs typeface="Calibri" pitchFamily="34" charset="-120"/>
+                        </a:rPr>
+                        <a:t>$895 avg</a:t>
+                      </a:r>
+                      <a:endParaRPr lang="en-US" sz="1300" dirty="0">
+                        <a:latin typeface="Calibri" charset="0"/>
+                        <a:ea typeface="Calibri" charset="0"/>
+                        <a:cs typeface="Calibri" charset="0"/>
+                      </a:endParaRPr>
+                    </a:p>
+                  </a:txBody>
+                  <a:tcPr marL="91440" marR="91440" marT="45720" marB="45720">
+                    <a:lnL w="6350" cap="flat" cmpd="sng" algn="ctr">
+                      <a:solidFill>
+                        <a:srgbClr val="A9D8C2"/>
+                      </a:solidFill>
+                      <a:prstDash val="solid"/>
+                      <a:round/>
+                      <a:headEnd type="none" w="med" len="med"/>
+                      <a:tailEnd type="none" w="med" len="med"/>
+                    </a:lnL>
+                    <a:lnR w="6350" cap="flat" cmpd="sng" algn="ctr">
+                      <a:solidFill>
+                        <a:srgbClr val="A9D8C2"/>
+                      </a:solidFill>
+                      <a:prstDash val="solid"/>
+                      <a:round/>
+                      <a:headEnd type="none" w="med" len="med"/>
+                      <a:tailEnd type="none" w="med" len="med"/>
+                    </a:lnR>
+                    <a:lnT w="6350" cap="flat" cmpd="sng" algn="ctr">
+                      <a:solidFill>
+                        <a:srgbClr val="A9D8C2"/>
+                      </a:solidFill>
+                      <a:prstDash val="solid"/>
+                      <a:round/>
+                      <a:headEnd type="none" w="med" len="med"/>
+                      <a:tailEnd type="none" w="med" len="med"/>
+                    </a:lnT>
+                    <a:lnB w="6350" cap="flat" cmpd="sng" algn="ctr">
+                      <a:solidFill>
+                        <a:srgbClr val="A9D8C2"/>
+                      </a:solidFill>
+                      <a:prstDash val="solid"/>
+                      <a:round/>
+                      <a:headEnd type="none" w="med" len="med"/>
+                      <a:tailEnd type="none" w="med" len="med"/>
+                    </a:lnB>
+                  </a:tcPr>
+                </a:tc>
+                <a:tc>
+                  <a:txBody>
+                    <a:bodyPr/>
+                    <a:lstStyle/>
+                    <a:p>
+                      <a:pPr algn="r" indent="0" marL="0">
+                        <a:buNone/>
+                      </a:pPr>
+                      <a:r>
+                        <a:rPr lang="en-US" sz="1300" b="1" dirty="0">
+                          <a:solidFill>
+                            <a:schemeClr val="accent1"/>
+                          </a:solidFill>
+                          <a:latin typeface="Calibri" pitchFamily="34" charset="0"/>
+                          <a:ea typeface="Calibri" pitchFamily="34" charset="-122"/>
+                          <a:cs typeface="Calibri" pitchFamily="34" charset="-120"/>
+                        </a:rPr>
+                        <a:t>$35,800</a:t>
+                      </a:r>
+                      <a:endParaRPr lang="en-US" sz="1300" dirty="0">
                         <a:latin typeface="Calibri" charset="0"/>
                         <a:ea typeface="Calibri" charset="0"/>
                         <a:cs typeface="Calibri" charset="0"/>
@@ -11973,32 +14097,16 @@
           </a:graphicData>
         </a:graphic>
       </p:graphicFrame>
-      <p:graphicFrame>
-        <p:nvGraphicFramePr>
-          <p:cNvPr id="5" name="Chart 0" descr=""/>
-          <p:cNvGraphicFramePr/>
-          <p:nvPr/>
-        </p:nvGraphicFramePr>
-        <p:xfrm>
-          <a:off x="6126480" y="1828800"/>
-          <a:ext cx="5486400" cy="2834640"/>
-        </p:xfrm>
-        <a:graphic xmlns:a="http://schemas.openxmlformats.org/drawingml/2006/main">
-          <a:graphicData uri="http://schemas.openxmlformats.org/drawingml/2006/chart">
-            <c:chart xmlns:c="http://schemas.openxmlformats.org/drawingml/2006/chart" r:id="rId1"/>
-          </a:graphicData>
-        </a:graphic>
-      </p:graphicFrame>
-      <p:sp>
-        <p:nvSpPr>
-          <p:cNvPr id="6" name="Text 2"/>
+      <p:sp>
+        <p:nvSpPr>
+          <p:cNvPr id="5" name="Text 2"/>
           <p:cNvSpPr txBox="1"/>
           <p:nvPr/>
         </p:nvSpPr>
         <p:spPr>
           <a:xfrm>
-            <a:off x="6126480" y="4800600"/>
-            <a:ext cx="5486400" cy="1097280"/>
+            <a:off x="548640" y="5074920"/>
+            <a:ext cx="6949440" cy="457200"/>
           </a:xfrm>
           <a:prstGeom prst="rect">
             <a:avLst/>
@@ -12014,20 +14122,444 @@
               <a:buNone/>
             </a:pPr>
             <a:r>
-              <a:rPr lang="en-US" sz="1400" dirty="0">
+              <a:rPr lang="en-US" sz="1200" i="1" dirty="0">
+                <a:solidFill>
+                  <a:schemeClr val="accent6"/>
+                </a:solidFill>
+              </a:rPr>
+              <a:t>Takings are what each business sells in a day; Nelo is assumed to carry 40% of it in year one.</a:t>
+            </a:r>
+            <a:endParaRPr lang="en-US" sz="1200" dirty="0"/>
+          </a:p>
+        </p:txBody>
+      </p:sp>
+      <p:sp>
+        <p:nvSpPr>
+          <p:cNvPr id="6" name="take rate"/>
+          <p:cNvSpPr/>
+          <p:nvPr/>
+        </p:nvSpPr>
+        <p:spPr>
+          <a:xfrm>
+            <a:off x="7863840" y="1828800"/>
+            <a:ext cx="3749040" cy="777240"/>
+          </a:xfrm>
+          <a:prstGeom prst="roundRect">
+            <a:avLst>
+              <a:gd name="adj" fmla="val 14118"/>
+            </a:avLst>
+          </a:prstGeom>
+          <a:solidFill>
+            <a:srgbClr val="EEF5F1"/>
+          </a:solidFill>
+          <a:ln/>
+        </p:spPr>
+      </p:sp>
+      <p:sp>
+        <p:nvSpPr>
+          <p:cNvPr id="7" name="Text 4"/>
+          <p:cNvSpPr txBox="1"/>
+          <p:nvPr/>
+        </p:nvSpPr>
+        <p:spPr>
+          <a:xfrm>
+            <a:off x="8092440" y="1938528"/>
+            <a:ext cx="1463040" cy="548640"/>
+          </a:xfrm>
+          <a:prstGeom prst="rect">
+            <a:avLst/>
+          </a:prstGeom>
+          <a:noFill/>
+          <a:ln/>
+        </p:spPr>
+        <p:txBody>
+          <a:bodyPr wrap="square" lIns="0" tIns="0" rIns="0" bIns="0" rtlCol="0" anchor="ctr"/>
+          <a:lstStyle/>
+          <a:p>
+            <a:pPr indent="0" marL="0">
+              <a:buNone/>
+            </a:pPr>
+            <a:r>
+              <a:rPr lang="en-US" sz="2400" b="1" dirty="0">
+                <a:solidFill>
+                  <a:schemeClr val="accent1"/>
+                </a:solidFill>
+                <a:latin typeface="Arial" pitchFamily="34" charset="0"/>
+                <a:ea typeface="Arial" pitchFamily="34" charset="-122"/>
+                <a:cs typeface="Arial" pitchFamily="34" charset="-120"/>
+              </a:rPr>
+              <a:t>0.50%</a:t>
+            </a:r>
+            <a:endParaRPr lang="en-US" sz="2400" dirty="0"/>
+          </a:p>
+        </p:txBody>
+      </p:sp>
+      <p:sp>
+        <p:nvSpPr>
+          <p:cNvPr id="8" name="Text 5"/>
+          <p:cNvSpPr txBox="1"/>
+          <p:nvPr/>
+        </p:nvSpPr>
+        <p:spPr>
+          <a:xfrm>
+            <a:off x="9555480" y="1938528"/>
+            <a:ext cx="1920240" cy="548640"/>
+          </a:xfrm>
+          <a:prstGeom prst="rect">
+            <a:avLst/>
+          </a:prstGeom>
+          <a:noFill/>
+          <a:ln/>
+        </p:spPr>
+        <p:txBody>
+          <a:bodyPr wrap="square" lIns="0" tIns="0" rIns="0" bIns="0" rtlCol="0" anchor="ctr"/>
+          <a:lstStyle/>
+          <a:p>
+            <a:pPr indent="0" marL="0">
+              <a:buNone/>
+            </a:pPr>
+            <a:r>
+              <a:rPr lang="en-US" sz="1300" dirty="0">
                 <a:solidFill>
                   <a:schemeClr val="tx1"/>
                 </a:solidFill>
               </a:rPr>
-              <a:t>Thin per merchant and normal for acquiring. The business is volume and retention: a merchant who got paid on an afternoon the bank terminal was down does not go back. Lending against observed cash flow comes next.</a:t>
-            </a:r>
-            <a:endParaRPr lang="en-US" sz="1400" dirty="0"/>
-          </a:p>
-        </p:txBody>
-      </p:sp>
-      <p:sp>
-        <p:nvSpPr>
-          <p:cNvPr id="7" name="Text 3"/>
+              <a:t>platform fee on volume</a:t>
+            </a:r>
+            <a:endParaRPr lang="en-US" sz="1300" dirty="0"/>
+          </a:p>
+        </p:txBody>
+      </p:sp>
+      <p:sp>
+        <p:nvSpPr>
+          <p:cNvPr id="9" name="take rate"/>
+          <p:cNvSpPr/>
+          <p:nvPr/>
+        </p:nvSpPr>
+        <p:spPr>
+          <a:xfrm>
+            <a:off x="7863840" y="2743200"/>
+            <a:ext cx="3749040" cy="777240"/>
+          </a:xfrm>
+          <a:prstGeom prst="roundRect">
+            <a:avLst>
+              <a:gd name="adj" fmla="val 14118"/>
+            </a:avLst>
+          </a:prstGeom>
+          <a:solidFill>
+            <a:srgbClr val="EEF5F1"/>
+          </a:solidFill>
+          <a:ln/>
+        </p:spPr>
+      </p:sp>
+      <p:sp>
+        <p:nvSpPr>
+          <p:cNvPr id="10" name="Text 7"/>
+          <p:cNvSpPr txBox="1"/>
+          <p:nvPr/>
+        </p:nvSpPr>
+        <p:spPr>
+          <a:xfrm>
+            <a:off x="8092440" y="2852928"/>
+            <a:ext cx="1463040" cy="548640"/>
+          </a:xfrm>
+          <a:prstGeom prst="rect">
+            <a:avLst/>
+          </a:prstGeom>
+          <a:noFill/>
+          <a:ln/>
+        </p:spPr>
+        <p:txBody>
+          <a:bodyPr wrap="square" lIns="0" tIns="0" rIns="0" bIns="0" rtlCol="0" anchor="ctr"/>
+          <a:lstStyle/>
+          <a:p>
+            <a:pPr indent="0" marL="0">
+              <a:buNone/>
+            </a:pPr>
+            <a:r>
+              <a:rPr lang="en-US" sz="2400" b="1" dirty="0">
+                <a:solidFill>
+                  <a:schemeClr val="accent1"/>
+                </a:solidFill>
+                <a:latin typeface="Arial" pitchFamily="34" charset="0"/>
+                <a:ea typeface="Arial" pitchFamily="34" charset="-122"/>
+                <a:cs typeface="Arial" pitchFamily="34" charset="-120"/>
+              </a:rPr>
+              <a:t>0.50%</a:t>
+            </a:r>
+            <a:endParaRPr lang="en-US" sz="2400" dirty="0"/>
+          </a:p>
+        </p:txBody>
+      </p:sp>
+      <p:sp>
+        <p:nvSpPr>
+          <p:cNvPr id="11" name="Text 8"/>
+          <p:cNvSpPr txBox="1"/>
+          <p:nvPr/>
+        </p:nvSpPr>
+        <p:spPr>
+          <a:xfrm>
+            <a:off x="9555480" y="2852928"/>
+            <a:ext cx="1920240" cy="548640"/>
+          </a:xfrm>
+          <a:prstGeom prst="rect">
+            <a:avLst/>
+          </a:prstGeom>
+          <a:noFill/>
+          <a:ln/>
+        </p:spPr>
+        <p:txBody>
+          <a:bodyPr wrap="square" lIns="0" tIns="0" rIns="0" bIns="0" rtlCol="0" anchor="ctr"/>
+          <a:lstStyle/>
+          <a:p>
+            <a:pPr indent="0" marL="0">
+              <a:buNone/>
+            </a:pPr>
+            <a:r>
+              <a:rPr lang="en-US" sz="1300" dirty="0">
+                <a:solidFill>
+                  <a:schemeClr val="tx1"/>
+                </a:solidFill>
+              </a:rPr>
+              <a:t>spread on the naira payout</a:t>
+            </a:r>
+            <a:endParaRPr lang="en-US" sz="1300" dirty="0"/>
+          </a:p>
+        </p:txBody>
+      </p:sp>
+      <p:sp>
+        <p:nvSpPr>
+          <p:cNvPr id="12" name="take rate"/>
+          <p:cNvSpPr/>
+          <p:nvPr/>
+        </p:nvSpPr>
+        <p:spPr>
+          <a:xfrm>
+            <a:off x="7863840" y="3657600"/>
+            <a:ext cx="3749040" cy="777240"/>
+          </a:xfrm>
+          <a:prstGeom prst="roundRect">
+            <a:avLst>
+              <a:gd name="adj" fmla="val 14118"/>
+            </a:avLst>
+          </a:prstGeom>
+          <a:solidFill>
+            <a:srgbClr val="EEF5F1"/>
+          </a:solidFill>
+          <a:ln/>
+        </p:spPr>
+      </p:sp>
+      <p:sp>
+        <p:nvSpPr>
+          <p:cNvPr id="13" name="Text 10"/>
+          <p:cNvSpPr txBox="1"/>
+          <p:nvPr/>
+        </p:nvSpPr>
+        <p:spPr>
+          <a:xfrm>
+            <a:off x="8092440" y="3767328"/>
+            <a:ext cx="1463040" cy="548640"/>
+          </a:xfrm>
+          <a:prstGeom prst="rect">
+            <a:avLst/>
+          </a:prstGeom>
+          <a:noFill/>
+          <a:ln/>
+        </p:spPr>
+        <p:txBody>
+          <a:bodyPr wrap="square" lIns="0" tIns="0" rIns="0" bIns="0" rtlCol="0" anchor="ctr"/>
+          <a:lstStyle/>
+          <a:p>
+            <a:pPr indent="0" marL="0">
+              <a:buNone/>
+            </a:pPr>
+            <a:r>
+              <a:rPr lang="en-US" sz="2400" b="1" dirty="0">
+                <a:solidFill>
+                  <a:schemeClr val="accent1"/>
+                </a:solidFill>
+                <a:latin typeface="Arial" pitchFamily="34" charset="0"/>
+                <a:ea typeface="Arial" pitchFamily="34" charset="-122"/>
+                <a:cs typeface="Arial" pitchFamily="34" charset="-120"/>
+              </a:rPr>
+              <a:t>−0.39%</a:t>
+            </a:r>
+            <a:endParaRPr lang="en-US" sz="2400" dirty="0"/>
+          </a:p>
+        </p:txBody>
+      </p:sp>
+      <p:sp>
+        <p:nvSpPr>
+          <p:cNvPr id="14" name="Text 11"/>
+          <p:cNvSpPr txBox="1"/>
+          <p:nvPr/>
+        </p:nvSpPr>
+        <p:spPr>
+          <a:xfrm>
+            <a:off x="9555480" y="3767328"/>
+            <a:ext cx="1920240" cy="548640"/>
+          </a:xfrm>
+          <a:prstGeom prst="rect">
+            <a:avLst/>
+          </a:prstGeom>
+          <a:noFill/>
+          <a:ln/>
+        </p:spPr>
+        <p:txBody>
+          <a:bodyPr wrap="square" lIns="0" tIns="0" rIns="0" bIns="0" rtlCol="0" anchor="ctr"/>
+          <a:lstStyle/>
+          <a:p>
+            <a:pPr indent="0" marL="0">
+              <a:buNone/>
+            </a:pPr>
+            <a:r>
+              <a:rPr lang="en-US" sz="1300" dirty="0">
+                <a:solidFill>
+                  <a:schemeClr val="tx1"/>
+                </a:solidFill>
+              </a:rPr>
+              <a:t>insurance reserve and Trust Stake rebate</a:t>
+            </a:r>
+            <a:endParaRPr lang="en-US" sz="1300" dirty="0"/>
+          </a:p>
+        </p:txBody>
+      </p:sp>
+      <p:sp>
+        <p:nvSpPr>
+          <p:cNvPr id="15" name="take rate"/>
+          <p:cNvSpPr/>
+          <p:nvPr/>
+        </p:nvSpPr>
+        <p:spPr>
+          <a:xfrm>
+            <a:off x="7863840" y="4572000"/>
+            <a:ext cx="3749040" cy="777240"/>
+          </a:xfrm>
+          <a:prstGeom prst="roundRect">
+            <a:avLst>
+              <a:gd name="adj" fmla="val 14118"/>
+            </a:avLst>
+          </a:prstGeom>
+          <a:solidFill>
+            <a:srgbClr val="1A6B4C"/>
+          </a:solidFill>
+          <a:ln/>
+        </p:spPr>
+      </p:sp>
+      <p:sp>
+        <p:nvSpPr>
+          <p:cNvPr id="16" name="Text 13"/>
+          <p:cNvSpPr txBox="1"/>
+          <p:nvPr/>
+        </p:nvSpPr>
+        <p:spPr>
+          <a:xfrm>
+            <a:off x="8092440" y="4681728"/>
+            <a:ext cx="1463040" cy="548640"/>
+          </a:xfrm>
+          <a:prstGeom prst="rect">
+            <a:avLst/>
+          </a:prstGeom>
+          <a:noFill/>
+          <a:ln/>
+        </p:spPr>
+        <p:txBody>
+          <a:bodyPr wrap="square" lIns="0" tIns="0" rIns="0" bIns="0" rtlCol="0" anchor="ctr"/>
+          <a:lstStyle/>
+          <a:p>
+            <a:pPr indent="0" marL="0">
+              <a:buNone/>
+            </a:pPr>
+            <a:r>
+              <a:rPr lang="en-US" sz="2400" b="1" dirty="0">
+                <a:solidFill>
+                  <a:schemeClr val="bg1"/>
+                </a:solidFill>
+                <a:latin typeface="Arial" pitchFamily="34" charset="0"/>
+                <a:ea typeface="Arial" pitchFamily="34" charset="-122"/>
+                <a:cs typeface="Arial" pitchFamily="34" charset="-120"/>
+              </a:rPr>
+              <a:t>0.61%</a:t>
+            </a:r>
+            <a:endParaRPr lang="en-US" sz="2400" dirty="0"/>
+          </a:p>
+        </p:txBody>
+      </p:sp>
+      <p:sp>
+        <p:nvSpPr>
+          <p:cNvPr id="17" name="Text 14"/>
+          <p:cNvSpPr txBox="1"/>
+          <p:nvPr/>
+        </p:nvSpPr>
+        <p:spPr>
+          <a:xfrm>
+            <a:off x="9555480" y="4681728"/>
+            <a:ext cx="1920240" cy="548640"/>
+          </a:xfrm>
+          <a:prstGeom prst="rect">
+            <a:avLst/>
+          </a:prstGeom>
+          <a:noFill/>
+          <a:ln/>
+        </p:spPr>
+        <p:txBody>
+          <a:bodyPr wrap="square" lIns="0" tIns="0" rIns="0" bIns="0" rtlCol="0" anchor="ctr"/>
+          <a:lstStyle/>
+          <a:p>
+            <a:pPr indent="0" marL="0">
+              <a:buNone/>
+            </a:pPr>
+            <a:r>
+              <a:rPr lang="en-US" sz="1300" dirty="0">
+                <a:solidFill>
+                  <a:schemeClr val="bg1"/>
+                </a:solidFill>
+              </a:rPr>
+              <a:t>net take rate</a:t>
+            </a:r>
+            <a:endParaRPr lang="en-US" sz="1300" dirty="0"/>
+          </a:p>
+        </p:txBody>
+      </p:sp>
+      <p:sp>
+        <p:nvSpPr>
+          <p:cNvPr id="18" name="Text 15"/>
+          <p:cNvSpPr txBox="1"/>
+          <p:nvPr/>
+        </p:nvSpPr>
+        <p:spPr>
+          <a:xfrm>
+            <a:off x="7863840" y="5486400"/>
+            <a:ext cx="3749040" cy="457200"/>
+          </a:xfrm>
+          <a:prstGeom prst="rect">
+            <a:avLst/>
+          </a:prstGeom>
+          <a:noFill/>
+          <a:ln/>
+        </p:spPr>
+        <p:txBody>
+          <a:bodyPr wrap="square" lIns="0" tIns="0" rIns="0" bIns="0" rtlCol="0" anchor="t"/>
+          <a:lstStyle/>
+          <a:p>
+            <a:pPr indent="0" marL="0">
+              <a:buNone/>
+            </a:pPr>
+            <a:r>
+              <a:rPr lang="en-US" sz="1200" i="1" dirty="0">
+                <a:solidFill>
+                  <a:schemeClr val="accent1"/>
+                </a:solidFill>
+              </a:rPr>
+              <a:t>Then lending against the cash flow we can see: where acquirers make their margin.</a:t>
+            </a:r>
+            <a:endParaRPr lang="en-US" sz="1200" dirty="0"/>
+          </a:p>
+        </p:txBody>
+      </p:sp>
+      <p:sp>
+        <p:nvSpPr>
+          <p:cNvPr id="19" name="Text 16"/>
           <p:cNvSpPr txBox="1"/>
           <p:nvPr/>
         </p:nvSpPr>
@@ -12055,7 +14587,7 @@
                   <a:schemeClr val="accent6"/>
                 </a:solidFill>
               </a:rPr>
-              <a:t>Illustrative model with stated assumptions, not a forecast</a:t>
+              <a:t>Illustrative model: every input is a stated assumption, to be replaced with measured numbers from the first 100</a:t>
             </a:r>
             <a:endParaRPr lang="en-US" sz="1000" dirty="0"/>
           </a:p>

--- a/docs/deck/nelo-deck.pptx
+++ b/docs/deck/nelo-deck.pptx
@@ -123,30 +123,30 @@
   <p:extLst>
     <p:ext uri="{521415D9-36F7-43E2-AB2F-B90AF26B5E84}">
       <p14:sectionLst xmlns:p14="http://schemas.microsoft.com/office/powerpoint/2010/main">
-        <p14:section name="Opening" id="{76e8caed-be52-508b-fe29-aa8f752290f1}">
+        <p14:section name="Opening" id="{c8adf936-f669-daf5-9cc4-6933fb19fdbe}">
           <p14:sldIdLst>
             <p14:sldId id="256"/>
           </p14:sldIdLst>
         </p14:section>
-        <p14:section name="Problem" id="{7a0041f2-86b9-7d72-2f49-59a01317b942}">
+        <p14:section name="Problem" id="{186b2bf5-dc54-8f00-91a3-5eec7db49e2e}">
           <p14:sldIdLst>
             <p14:sldId id="257"/>
             <p14:sldId id="258"/>
           </p14:sldIdLst>
         </p14:section>
-        <p14:section name="Product" id="{e69e8d8b-277e-b77f-5e1f-e84ab2a0988b}">
+        <p14:section name="Product" id="{2e1b777e-d46a-650d-598b-8f9b4de84ffc}">
           <p14:sldIdLst>
             <p14:sldId id="259"/>
             <p14:sldId id="260"/>
           </p14:sldIdLst>
         </p14:section>
-        <p14:section name="Proof" id="{f4e24fd6-a12f-a04b-1b5e-ac96fba9cc69}">
+        <p14:section name="Proof" id="{7c485117-a664-5c07-f2ce-3ff34ad6704b}">
           <p14:sldIdLst>
             <p14:sldId id="261"/>
             <p14:sldId id="262"/>
           </p14:sldIdLst>
         </p14:section>
-        <p14:section name="Business" id="{0f1b97de-d9a0-c217-4b1d-cd4b42df6dcc}">
+        <p14:section name="Business" id="{a7693e43-437d-9b41-7bd1-79427f7fc48f}">
           <p14:sldIdLst>
             <p14:sldId id="263"/>
             <p14:sldId id="264"/>
@@ -157,7 +157,7 @@
             <p14:sldId id="269"/>
           </p14:sldIdLst>
         </p14:section>
-        <p14:section name="Close" id="{660311cb-1ae8-792a-30c3-7286efc8777e}">
+        <p14:section name="Close" id="{7a184e24-4501-bd4e-e601-f41beb1e4817}">
           <p14:sldIdLst>
             <p14:sldId id="270"/>
             <p14:sldId id="271"/>
@@ -9880,8 +9880,8 @@
         </p:nvSpPr>
         <p:spPr>
           <a:xfrm>
-            <a:off x="822960" y="2606040"/>
-            <a:ext cx="2971800" cy="3063240"/>
+            <a:off x="822960" y="2560320"/>
+            <a:ext cx="2971800" cy="3154680"/>
           </a:xfrm>
           <a:prstGeom prst="rect">
             <a:avLst/>
@@ -9895,74 +9895,74 @@
           <a:p>
             <a:pPr marL="342900" indent="-342900">
               <a:spcAft>
-                <a:spcPts val="800"/>
+                <a:spcPts val="600"/>
               </a:spcAft>
               <a:buSzPct val="100000"/>
               <a:buChar char="•"/>
             </a:pPr>
             <a:r>
-              <a:rPr lang="en-US" sz="1400" dirty="0">
+              <a:rPr lang="en-US" sz="1300" dirty="0">
                 <a:solidFill>
                   <a:schemeClr val="tx1"/>
                 </a:solidFill>
               </a:rPr>
               <a:t>Cash-out on Solana mainnet, paid to a Nigerian bank by paj.cash</a:t>
             </a:r>
-            <a:endParaRPr lang="en-US" sz="1400" dirty="0"/>
+            <a:endParaRPr lang="en-US" sz="1300" dirty="0"/>
           </a:p>
           <a:p>
             <a:pPr marL="342900" indent="-342900">
               <a:spcAft>
-                <a:spcPts val="800"/>
+                <a:spcPts val="600"/>
               </a:spcAft>
               <a:buSzPct val="100000"/>
               <a:buChar char="•"/>
             </a:pPr>
             <a:r>
-              <a:rPr lang="en-US" sz="1400" dirty="0">
+              <a:rPr lang="en-US" sz="1300" dirty="0">
                 <a:solidFill>
                   <a:schemeClr val="tx1"/>
                 </a:solidFill>
               </a:rPr>
               <a:t>Signed release APKs: the till and nelo pay</a:t>
             </a:r>
-            <a:endParaRPr lang="en-US" sz="1400" dirty="0"/>
+            <a:endParaRPr lang="en-US" sz="1300" dirty="0"/>
           </a:p>
           <a:p>
             <a:pPr marL="342900" indent="-342900">
               <a:spcAft>
-                <a:spcPts val="800"/>
+                <a:spcPts val="600"/>
               </a:spcAft>
               <a:buSzPct val="100000"/>
               <a:buChar char="•"/>
             </a:pPr>
             <a:r>
-              <a:rPr lang="en-US" sz="1400" dirty="0">
+              <a:rPr lang="en-US" sz="1300" dirty="0">
                 <a:solidFill>
                   <a:schemeClr val="tx1"/>
                 </a:solidFill>
               </a:rPr>
               <a:t>Mobile Wallet Adapter for every merchant signature</a:t>
             </a:r>
-            <a:endParaRPr lang="en-US" sz="1400" dirty="0"/>
+            <a:endParaRPr lang="en-US" sz="1300" dirty="0"/>
           </a:p>
           <a:p>
             <a:pPr marL="342900" indent="-342900">
               <a:spcAft>
-                <a:spcPts val="800"/>
+                <a:spcPts val="600"/>
               </a:spcAft>
               <a:buSzPct val="100000"/>
               <a:buChar char="•"/>
             </a:pPr>
             <a:r>
-              <a:rPr lang="en-US" sz="1400" dirty="0">
+              <a:rPr lang="en-US" sz="1300" dirty="0">
                 <a:solidFill>
                   <a:schemeClr val="tx1"/>
                 </a:solidFill>
               </a:rPr>
               <a:t>paj.cash's live naira rate on the till</a:t>
             </a:r>
-            <a:endParaRPr lang="en-US" sz="1400" dirty="0"/>
+            <a:endParaRPr lang="en-US" sz="1300" dirty="0"/>
           </a:p>
         </p:txBody>
       </p:sp>
@@ -10032,8 +10032,8 @@
         </p:nvSpPr>
         <p:spPr>
           <a:xfrm>
-            <a:off x="4572000" y="2606040"/>
-            <a:ext cx="2971800" cy="3063240"/>
+            <a:off x="4572000" y="2560320"/>
+            <a:ext cx="2971800" cy="3154680"/>
           </a:xfrm>
           <a:prstGeom prst="rect">
             <a:avLst/>
@@ -10047,74 +10047,74 @@
           <a:p>
             <a:pPr marL="342900" indent="-342900">
               <a:spcAft>
-                <a:spcPts val="800"/>
+                <a:spcPts val="600"/>
               </a:spcAft>
               <a:buSzPct val="100000"/>
               <a:buChar char="•"/>
             </a:pPr>
             <a:r>
-              <a:rPr lang="en-US" sz="1400" dirty="0">
+              <a:rPr lang="en-US" sz="1300" dirty="0">
                 <a:solidFill>
                   <a:schemeClr val="tx1"/>
                 </a:solidFill>
               </a:rPr>
               <a:t>Vault program: secure-chip signatures verified on chain</a:t>
             </a:r>
-            <a:endParaRPr lang="en-US" sz="1400" dirty="0"/>
+            <a:endParaRPr lang="en-US" sz="1300" dirty="0"/>
           </a:p>
           <a:p>
             <a:pPr marL="342900" indent="-342900">
               <a:spcAft>
-                <a:spcPts val="800"/>
+                <a:spcPts val="600"/>
               </a:spcAft>
               <a:buSzPct val="100000"/>
               <a:buChar char="•"/>
             </a:pPr>
             <a:r>
-              <a:rPr lang="en-US" sz="1400" dirty="0">
+              <a:rPr lang="en-US" sz="1300" dirty="0">
                 <a:solidFill>
                   <a:schemeClr val="tx1"/>
                 </a:solidFill>
               </a:rPr>
               <a:t>Offline sale, both phones in airplane mode, settled on reconnect</a:t>
             </a:r>
-            <a:endParaRPr lang="en-US" sz="1400" dirty="0"/>
+            <a:endParaRPr lang="en-US" sz="1300" dirty="0"/>
           </a:p>
           <a:p>
             <a:pPr marL="342900" indent="-342900">
               <a:spcAft>
-                <a:spcPts val="800"/>
+                <a:spcPts val="600"/>
               </a:spcAft>
               <a:buSzPct val="100000"/>
               <a:buChar char="•"/>
             </a:pPr>
             <a:r>
-              <a:rPr lang="en-US" sz="1400" dirty="0">
+              <a:rPr lang="en-US" sz="1300" dirty="0">
                 <a:solidFill>
                   <a:schemeClr val="tx1"/>
                 </a:solidFill>
               </a:rPr>
               <a:t>Replay refused; a forged double spend freezes the vault</a:t>
             </a:r>
-            <a:endParaRPr lang="en-US" sz="1400" dirty="0"/>
+            <a:endParaRPr lang="en-US" sz="1300" dirty="0"/>
           </a:p>
           <a:p>
             <a:pPr marL="342900" indent="-342900">
               <a:spcAft>
-                <a:spcPts val="800"/>
+                <a:spcPts val="600"/>
               </a:spcAft>
               <a:buSzPct val="100000"/>
               <a:buChar char="•"/>
             </a:pPr>
             <a:r>
-              <a:rPr lang="en-US" sz="1400" dirty="0">
+              <a:rPr lang="en-US" sz="1300" dirty="0">
                 <a:solidFill>
                   <a:schemeClr val="tx1"/>
                 </a:solidFill>
               </a:rPr>
               <a:t>anchor test green: 40 of 40</a:t>
             </a:r>
-            <a:endParaRPr lang="en-US" sz="1400" dirty="0"/>
+            <a:endParaRPr lang="en-US" sz="1300" dirty="0"/>
           </a:p>
         </p:txBody>
       </p:sp>
@@ -10184,8 +10184,8 @@
         </p:nvSpPr>
         <p:spPr>
           <a:xfrm>
-            <a:off x="8321040" y="2606040"/>
-            <a:ext cx="2971800" cy="3063240"/>
+            <a:off x="8321040" y="2560320"/>
+            <a:ext cx="2971800" cy="3154680"/>
           </a:xfrm>
           <a:prstGeom prst="rect">
             <a:avLst/>
@@ -10199,74 +10199,92 @@
           <a:p>
             <a:pPr marL="342900" indent="-342900">
               <a:spcAft>
-                <a:spcPts val="800"/>
+                <a:spcPts val="600"/>
               </a:spcAft>
               <a:buSzPct val="100000"/>
               <a:buChar char="•"/>
             </a:pPr>
             <a:r>
-              <a:rPr lang="en-US" sz="1400" dirty="0">
+              <a:rPr lang="en-US" sz="1300" dirty="0">
                 <a:solidFill>
                   <a:schemeClr val="tx1"/>
                 </a:solidFill>
               </a:rPr>
               <a:t>nelo pay services beyond paying a friend</a:t>
             </a:r>
-            <a:endParaRPr lang="en-US" sz="1400" dirty="0"/>
+            <a:endParaRPr lang="en-US" sz="1300" dirty="0"/>
           </a:p>
           <a:p>
             <a:pPr marL="342900" indent="-342900">
               <a:spcAft>
-                <a:spcPts val="800"/>
+                <a:spcPts val="600"/>
               </a:spcAft>
               <a:buSzPct val="100000"/>
               <a:buChar char="•"/>
             </a:pPr>
             <a:r>
-              <a:rPr lang="en-US" sz="1400" dirty="0">
+              <a:rPr lang="en-US" sz="1300" dirty="0">
                 <a:solidFill>
                   <a:schemeClr val="tx1"/>
                 </a:solidFill>
               </a:rPr>
               <a:t>Rebate payout and the SKR premium (≈1.001×)</a:t>
             </a:r>
-            <a:endParaRPr lang="en-US" sz="1400" dirty="0"/>
+            <a:endParaRPr lang="en-US" sz="1300" dirty="0"/>
           </a:p>
           <a:p>
             <a:pPr marL="342900" indent="-342900">
               <a:spcAft>
-                <a:spcPts val="800"/>
+                <a:spcPts val="600"/>
               </a:spcAft>
               <a:buSzPct val="100000"/>
               <a:buChar char="•"/>
             </a:pPr>
             <a:r>
-              <a:rPr lang="en-US" sz="1400" dirty="0">
+              <a:rPr lang="en-US" sz="1300" dirty="0">
                 <a:solidFill>
                   <a:schemeClr val="tx1"/>
                 </a:solidFill>
               </a:rPr>
               <a:t>QR only; NFC not yet</a:t>
             </a:r>
-            <a:endParaRPr lang="en-US" sz="1400" dirty="0"/>
+            <a:endParaRPr lang="en-US" sz="1300" dirty="0"/>
           </a:p>
           <a:p>
             <a:pPr marL="342900" indent="-342900">
               <a:spcAft>
-                <a:spcPts val="800"/>
+                <a:spcPts val="600"/>
               </a:spcAft>
               <a:buSzPct val="100000"/>
               <a:buChar char="•"/>
             </a:pPr>
             <a:r>
-              <a:rPr lang="en-US" sz="1400" dirty="0">
+              <a:rPr lang="en-US" sz="1300" dirty="0">
                 <a:solidFill>
                   <a:schemeClr val="tx1"/>
                 </a:solidFill>
               </a:rPr>
               <a:t>UseAzza payouts: partner agreed, integration next</a:t>
             </a:r>
-            <a:endParaRPr lang="en-US" sz="1400" dirty="0"/>
+            <a:endParaRPr lang="en-US" sz="1300" dirty="0"/>
+          </a:p>
+          <a:p>
+            <a:pPr marL="342900" indent="-342900">
+              <a:spcAft>
+                <a:spcPts val="600"/>
+              </a:spcAft>
+              <a:buSzPct val="100000"/>
+              <a:buChar char="•"/>
+            </a:pPr>
+            <a:r>
+              <a:rPr lang="en-US" sz="1300" dirty="0">
+                <a:solidFill>
+                  <a:schemeClr val="tx1"/>
+                </a:solidFill>
+              </a:rPr>
+              <a:t>Phone-number sign-up off (Privy SMS for Nigeria)</a:t>
+            </a:r>
+            <a:endParaRPr lang="en-US" sz="1300" dirty="0"/>
           </a:p>
         </p:txBody>
       </p:sp>

--- a/docs/deck/nelo-deck.pptx
+++ b/docs/deck/nelo-deck.pptx
@@ -123,30 +123,30 @@
   <p:extLst>
     <p:ext uri="{521415D9-36F7-43E2-AB2F-B90AF26B5E84}">
       <p14:sectionLst xmlns:p14="http://schemas.microsoft.com/office/powerpoint/2010/main">
-        <p14:section name="Opening" id="{c8adf936-f669-daf5-9cc4-6933fb19fdbe}">
+        <p14:section name="Opening" id="{ad6bcc3b-69c8-6947-ec9a-4cabd8b6b7b3}">
           <p14:sldIdLst>
             <p14:sldId id="256"/>
           </p14:sldIdLst>
         </p14:section>
-        <p14:section name="Problem" id="{186b2bf5-dc54-8f00-91a3-5eec7db49e2e}">
+        <p14:section name="Problem" id="{28e1e0a1-84b8-0d6b-71bb-877fe1ad2d9e}">
           <p14:sldIdLst>
             <p14:sldId id="257"/>
             <p14:sldId id="258"/>
           </p14:sldIdLst>
         </p14:section>
-        <p14:section name="Product" id="{2e1b777e-d46a-650d-598b-8f9b4de84ffc}">
+        <p14:section name="Product" id="{2888e25c-3578-2ab3-3d6b-60dfed5c54ce}">
           <p14:sldIdLst>
             <p14:sldId id="259"/>
             <p14:sldId id="260"/>
           </p14:sldIdLst>
         </p14:section>
-        <p14:section name="Proof" id="{7c485117-a664-5c07-f2ce-3ff34ad6704b}">
+        <p14:section name="Proof" id="{b317f663-dcf2-dfd0-b385-67e8ee5945ee}">
           <p14:sldIdLst>
             <p14:sldId id="261"/>
             <p14:sldId id="262"/>
           </p14:sldIdLst>
         </p14:section>
-        <p14:section name="Business" id="{a7693e43-437d-9b41-7bd1-79427f7fc48f}">
+        <p14:section name="Business" id="{308d4d08-b7fc-b90c-cc4d-d06fde61421c}">
           <p14:sldIdLst>
             <p14:sldId id="263"/>
             <p14:sldId id="264"/>
@@ -157,7 +157,7 @@
             <p14:sldId id="269"/>
           </p14:sldIdLst>
         </p14:section>
-        <p14:section name="Close" id="{7a184e24-4501-bd4e-e601-f41beb1e4817}">
+        <p14:section name="Close" id="{8c984572-f32f-ae5d-d7c8-bddfa73f3090}">
           <p14:sldIdLst>
             <p14:sldId id="270"/>
             <p14:sldId id="271"/>
@@ -9964,86 +9964,6 @@
             </a:r>
             <a:endParaRPr lang="en-US" sz="1300" dirty="0"/>
           </a:p>
-        </p:txBody>
-      </p:sp>
-      <p:sp>
-        <p:nvSpPr>
-          <p:cNvPr id="7" name="column"/>
-          <p:cNvSpPr/>
-          <p:nvPr/>
-        </p:nvSpPr>
-        <p:spPr>
-          <a:xfrm>
-            <a:off x="4297680" y="1874520"/>
-            <a:ext cx="3474720" cy="3931920"/>
-          </a:xfrm>
-          <a:prstGeom prst="roundRect">
-            <a:avLst>
-              <a:gd name="adj" fmla="val 5789"/>
-            </a:avLst>
-          </a:prstGeom>
-          <a:solidFill>
-            <a:srgbClr val="FFFFFF"/>
-          </a:solidFill>
-          <a:ln/>
-        </p:spPr>
-      </p:sp>
-      <p:sp>
-        <p:nvSpPr>
-          <p:cNvPr id="8" name="Text 6"/>
-          <p:cNvSpPr txBox="1"/>
-          <p:nvPr/>
-        </p:nvSpPr>
-        <p:spPr>
-          <a:xfrm>
-            <a:off x="4572000" y="2057400"/>
-            <a:ext cx="2926080" cy="457200"/>
-          </a:xfrm>
-          <a:prstGeom prst="rect">
-            <a:avLst/>
-          </a:prstGeom>
-          <a:noFill/>
-          <a:ln/>
-        </p:spPr>
-        <p:txBody>
-          <a:bodyPr wrap="square" lIns="0" tIns="0" rIns="0" bIns="0" rtlCol="0" anchor="t"/>
-          <a:lstStyle/>
-          <a:p>
-            <a:pPr indent="0" marL="0">
-              <a:buNone/>
-            </a:pPr>
-            <a:r>
-              <a:rPr lang="en-US" sz="2000" b="1" dirty="0">
-                <a:solidFill>
-                  <a:srgbClr val="9C4FC9"/>
-                </a:solidFill>
-              </a:rPr>
-              <a:t>On devnet</a:t>
-            </a:r>
-            <a:endParaRPr lang="en-US" sz="2000" dirty="0"/>
-          </a:p>
-        </p:txBody>
-      </p:sp>
-      <p:sp>
-        <p:nvSpPr>
-          <p:cNvPr id="9" name="Text 7"/>
-          <p:cNvSpPr txBox="1"/>
-          <p:nvPr/>
-        </p:nvSpPr>
-        <p:spPr>
-          <a:xfrm>
-            <a:off x="4572000" y="2560320"/>
-            <a:ext cx="2971800" cy="3154680"/>
-          </a:xfrm>
-          <a:prstGeom prst="rect">
-            <a:avLst/>
-          </a:prstGeom>
-          <a:noFill/>
-          <a:ln/>
-        </p:spPr>
-        <p:txBody>
-          <a:bodyPr wrap="square" lIns="0" tIns="0" rIns="0" bIns="0" rtlCol="0" anchor="t"/>
-          <a:lstStyle/>
           <a:p>
             <a:pPr marL="342900" indent="-342900">
               <a:spcAft>
@@ -10058,10 +9978,90 @@
                   <a:schemeClr val="tx1"/>
                 </a:solidFill>
               </a:rPr>
-              <a:t>Vault program: secure-chip signatures verified on chain</a:t>
+              <a:t>Payout partners from day one: paj.cash and UseAzza (9+ currencies)</a:t>
             </a:r>
             <a:endParaRPr lang="en-US" sz="1300" dirty="0"/>
           </a:p>
+        </p:txBody>
+      </p:sp>
+      <p:sp>
+        <p:nvSpPr>
+          <p:cNvPr id="7" name="column"/>
+          <p:cNvSpPr/>
+          <p:nvPr/>
+        </p:nvSpPr>
+        <p:spPr>
+          <a:xfrm>
+            <a:off x="4297680" y="1874520"/>
+            <a:ext cx="3474720" cy="3931920"/>
+          </a:xfrm>
+          <a:prstGeom prst="roundRect">
+            <a:avLst>
+              <a:gd name="adj" fmla="val 5789"/>
+            </a:avLst>
+          </a:prstGeom>
+          <a:solidFill>
+            <a:srgbClr val="FFFFFF"/>
+          </a:solidFill>
+          <a:ln/>
+        </p:spPr>
+      </p:sp>
+      <p:sp>
+        <p:nvSpPr>
+          <p:cNvPr id="8" name="Text 6"/>
+          <p:cNvSpPr txBox="1"/>
+          <p:nvPr/>
+        </p:nvSpPr>
+        <p:spPr>
+          <a:xfrm>
+            <a:off x="4572000" y="2057400"/>
+            <a:ext cx="2926080" cy="457200"/>
+          </a:xfrm>
+          <a:prstGeom prst="rect">
+            <a:avLst/>
+          </a:prstGeom>
+          <a:noFill/>
+          <a:ln/>
+        </p:spPr>
+        <p:txBody>
+          <a:bodyPr wrap="square" lIns="0" tIns="0" rIns="0" bIns="0" rtlCol="0" anchor="t"/>
+          <a:lstStyle/>
+          <a:p>
+            <a:pPr indent="0" marL="0">
+              <a:buNone/>
+            </a:pPr>
+            <a:r>
+              <a:rPr lang="en-US" sz="2000" b="1" dirty="0">
+                <a:solidFill>
+                  <a:srgbClr val="9C4FC9"/>
+                </a:solidFill>
+              </a:rPr>
+              <a:t>On devnet</a:t>
+            </a:r>
+            <a:endParaRPr lang="en-US" sz="2000" dirty="0"/>
+          </a:p>
+        </p:txBody>
+      </p:sp>
+      <p:sp>
+        <p:nvSpPr>
+          <p:cNvPr id="9" name="Text 7"/>
+          <p:cNvSpPr txBox="1"/>
+          <p:nvPr/>
+        </p:nvSpPr>
+        <p:spPr>
+          <a:xfrm>
+            <a:off x="4572000" y="2560320"/>
+            <a:ext cx="2971800" cy="3154680"/>
+          </a:xfrm>
+          <a:prstGeom prst="rect">
+            <a:avLst/>
+          </a:prstGeom>
+          <a:noFill/>
+          <a:ln/>
+        </p:spPr>
+        <p:txBody>
+          <a:bodyPr wrap="square" lIns="0" tIns="0" rIns="0" bIns="0" rtlCol="0" anchor="t"/>
+          <a:lstStyle/>
           <a:p>
             <a:pPr marL="342900" indent="-342900">
               <a:spcAft>
@@ -10076,7 +10076,7 @@
                   <a:schemeClr val="tx1"/>
                 </a:solidFill>
               </a:rPr>
-              <a:t>Offline sale, both phones in airplane mode, settled on reconnect</a:t>
+              <a:t>Vault program: secure-chip signatures verified on chain</a:t>
             </a:r>
             <a:endParaRPr lang="en-US" sz="1300" dirty="0"/>
           </a:p>
@@ -10094,7 +10094,7 @@
                   <a:schemeClr val="tx1"/>
                 </a:solidFill>
               </a:rPr>
-              <a:t>Replay refused; a forged double spend freezes the vault</a:t>
+              <a:t>Offline sale, both phones in airplane mode, settled on reconnect</a:t>
             </a:r>
             <a:endParaRPr lang="en-US" sz="1300" dirty="0"/>
           </a:p>
@@ -10112,90 +10112,10 @@
                   <a:schemeClr val="tx1"/>
                 </a:solidFill>
               </a:rPr>
-              <a:t>anchor test green: 40 of 40</a:t>
+              <a:t>Replay refused; a forged double spend freezes the vault</a:t>
             </a:r>
             <a:endParaRPr lang="en-US" sz="1300" dirty="0"/>
           </a:p>
-        </p:txBody>
-      </p:sp>
-      <p:sp>
-        <p:nvSpPr>
-          <p:cNvPr id="10" name="column"/>
-          <p:cNvSpPr/>
-          <p:nvPr/>
-        </p:nvSpPr>
-        <p:spPr>
-          <a:xfrm>
-            <a:off x="8046720" y="1874520"/>
-            <a:ext cx="3474720" cy="3931920"/>
-          </a:xfrm>
-          <a:prstGeom prst="roundRect">
-            <a:avLst>
-              <a:gd name="adj" fmla="val 5789"/>
-            </a:avLst>
-          </a:prstGeom>
-          <a:solidFill>
-            <a:srgbClr val="FFFFFF"/>
-          </a:solidFill>
-          <a:ln/>
-        </p:spPr>
-      </p:sp>
-      <p:sp>
-        <p:nvSpPr>
-          <p:cNvPr id="11" name="Text 9"/>
-          <p:cNvSpPr txBox="1"/>
-          <p:nvPr/>
-        </p:nvSpPr>
-        <p:spPr>
-          <a:xfrm>
-            <a:off x="8321040" y="2057400"/>
-            <a:ext cx="2926080" cy="457200"/>
-          </a:xfrm>
-          <a:prstGeom prst="rect">
-            <a:avLst/>
-          </a:prstGeom>
-          <a:noFill/>
-          <a:ln/>
-        </p:spPr>
-        <p:txBody>
-          <a:bodyPr wrap="square" lIns="0" tIns="0" rIns="0" bIns="0" rtlCol="0" anchor="t"/>
-          <a:lstStyle/>
-          <a:p>
-            <a:pPr indent="0" marL="0">
-              <a:buNone/>
-            </a:pPr>
-            <a:r>
-              <a:rPr lang="en-US" sz="2000" b="1" dirty="0">
-                <a:solidFill>
-                  <a:srgbClr val="C2560C"/>
-                </a:solidFill>
-              </a:rPr>
-              <a:t>Declared, not built yet</a:t>
-            </a:r>
-            <a:endParaRPr lang="en-US" sz="2000" dirty="0"/>
-          </a:p>
-        </p:txBody>
-      </p:sp>
-      <p:sp>
-        <p:nvSpPr>
-          <p:cNvPr id="12" name="Text 10"/>
-          <p:cNvSpPr txBox="1"/>
-          <p:nvPr/>
-        </p:nvSpPr>
-        <p:spPr>
-          <a:xfrm>
-            <a:off x="8321040" y="2560320"/>
-            <a:ext cx="2971800" cy="3154680"/>
-          </a:xfrm>
-          <a:prstGeom prst="rect">
-            <a:avLst/>
-          </a:prstGeom>
-          <a:noFill/>
-          <a:ln/>
-        </p:spPr>
-        <p:txBody>
-          <a:bodyPr wrap="square" lIns="0" tIns="0" rIns="0" bIns="0" rtlCol="0" anchor="t"/>
-          <a:lstStyle/>
           <a:p>
             <a:pPr marL="342900" indent="-342900">
               <a:spcAft>
@@ -10210,10 +10130,90 @@
                   <a:schemeClr val="tx1"/>
                 </a:solidFill>
               </a:rPr>
-              <a:t>nelo pay services beyond paying a friend</a:t>
+              <a:t>anchor test green: 40 of 40</a:t>
             </a:r>
             <a:endParaRPr lang="en-US" sz="1300" dirty="0"/>
           </a:p>
+        </p:txBody>
+      </p:sp>
+      <p:sp>
+        <p:nvSpPr>
+          <p:cNvPr id="10" name="column"/>
+          <p:cNvSpPr/>
+          <p:nvPr/>
+        </p:nvSpPr>
+        <p:spPr>
+          <a:xfrm>
+            <a:off x="8046720" y="1874520"/>
+            <a:ext cx="3474720" cy="3931920"/>
+          </a:xfrm>
+          <a:prstGeom prst="roundRect">
+            <a:avLst>
+              <a:gd name="adj" fmla="val 5789"/>
+            </a:avLst>
+          </a:prstGeom>
+          <a:solidFill>
+            <a:srgbClr val="FFFFFF"/>
+          </a:solidFill>
+          <a:ln/>
+        </p:spPr>
+      </p:sp>
+      <p:sp>
+        <p:nvSpPr>
+          <p:cNvPr id="11" name="Text 9"/>
+          <p:cNvSpPr txBox="1"/>
+          <p:nvPr/>
+        </p:nvSpPr>
+        <p:spPr>
+          <a:xfrm>
+            <a:off x="8321040" y="2057400"/>
+            <a:ext cx="2926080" cy="457200"/>
+          </a:xfrm>
+          <a:prstGeom prst="rect">
+            <a:avLst/>
+          </a:prstGeom>
+          <a:noFill/>
+          <a:ln/>
+        </p:spPr>
+        <p:txBody>
+          <a:bodyPr wrap="square" lIns="0" tIns="0" rIns="0" bIns="0" rtlCol="0" anchor="t"/>
+          <a:lstStyle/>
+          <a:p>
+            <a:pPr indent="0" marL="0">
+              <a:buNone/>
+            </a:pPr>
+            <a:r>
+              <a:rPr lang="en-US" sz="2000" b="1" dirty="0">
+                <a:solidFill>
+                  <a:srgbClr val="C2560C"/>
+                </a:solidFill>
+              </a:rPr>
+              <a:t>Declared, not built yet</a:t>
+            </a:r>
+            <a:endParaRPr lang="en-US" sz="2000" dirty="0"/>
+          </a:p>
+        </p:txBody>
+      </p:sp>
+      <p:sp>
+        <p:nvSpPr>
+          <p:cNvPr id="12" name="Text 10"/>
+          <p:cNvSpPr txBox="1"/>
+          <p:nvPr/>
+        </p:nvSpPr>
+        <p:spPr>
+          <a:xfrm>
+            <a:off x="8321040" y="2560320"/>
+            <a:ext cx="2971800" cy="3154680"/>
+          </a:xfrm>
+          <a:prstGeom prst="rect">
+            <a:avLst/>
+          </a:prstGeom>
+          <a:noFill/>
+          <a:ln/>
+        </p:spPr>
+        <p:txBody>
+          <a:bodyPr wrap="square" lIns="0" tIns="0" rIns="0" bIns="0" rtlCol="0" anchor="t"/>
+          <a:lstStyle/>
           <a:p>
             <a:pPr marL="342900" indent="-342900">
               <a:spcAft>
@@ -10228,7 +10228,7 @@
                   <a:schemeClr val="tx1"/>
                 </a:solidFill>
               </a:rPr>
-              <a:t>Rebate payout and the SKR premium (≈1.001×)</a:t>
+              <a:t>nelo pay services beyond paying a friend</a:t>
             </a:r>
             <a:endParaRPr lang="en-US" sz="1300" dirty="0"/>
           </a:p>
@@ -10246,7 +10246,7 @@
                   <a:schemeClr val="tx1"/>
                 </a:solidFill>
               </a:rPr>
-              <a:t>QR only; NFC not yet</a:t>
+              <a:t>Rebate payout and the SKR premium (≈1.001×)</a:t>
             </a:r>
             <a:endParaRPr lang="en-US" sz="1300" dirty="0"/>
           </a:p>
@@ -10264,7 +10264,7 @@
                   <a:schemeClr val="tx1"/>
                 </a:solidFill>
               </a:rPr>
-              <a:t>UseAzza payouts: partner agreed, integration next</a:t>
+              <a:t>QR only; NFC not yet</a:t>
             </a:r>
             <a:endParaRPr lang="en-US" sz="1300" dirty="0"/>
           </a:p>
@@ -10631,7 +10631,7 @@
                   <a:schemeClr val="accent6"/>
                 </a:solidFill>
               </a:rPr>
-              <a:t>dApp Store listing. One market cluster, door to door. Cash-outs through paj.cash.</a:t>
+              <a:t>dApp Store listing. One market cluster in Nigeria, door to door. Cash-outs through paj.cash and UseAzza.</a:t>
             </a:r>
             <a:endParaRPr lang="en-US" sz="1400" dirty="0"/>
           </a:p>
@@ -11088,7 +11088,7 @@
                   <a:schemeClr val="accent1"/>
                 </a:solidFill>
               </a:rPr>
-              <a:t>Payout partners were the one blocking dependency. paj.cash is live for naira; UseAzza brings 9+ more payout currencies.</a:t>
+              <a:t>Payout partners were the one blocking dependency. paj.cash and UseAzza are live from day one: Nigeria first, then 9+ more currencies.</a:t>
             </a:r>
             <a:endParaRPr lang="en-US" sz="1500" dirty="0"/>
           </a:p>
@@ -16152,7 +16152,7 @@
                   <a:schemeClr val="bg1"/>
                 </a:solidFill>
               </a:rPr>
-              <a:t>≈3% of TAM: in-person business payments in the 10+ currencies paj.cash and UseAzza pay out in</a:t>
+              <a:t>≈3% of TAM: in-person business payments, Nigeria first, then the 9+ currencies UseAzza pays out in</a:t>
             </a:r>
             <a:endParaRPr lang="en-US" sz="1100" dirty="0"/>
           </a:p>
